--- a/reports/acdr2026_staff_deployment/ACDR2026_配席表_0928_荒木田修正.pptx
+++ b/reports/acdr2026_staff_deployment/ACDR2026_配席表_0928_荒木田修正.pptx
@@ -8964,7 +8964,7 @@
                 <a:latin typeface="Meiryo UI" panose="020B0604030504040204" pitchFamily="50" charset="-128"/>
                 <a:ea typeface="Meiryo UI" panose="020B0604030504040204" pitchFamily="50" charset="-128"/>
               </a:rPr>
-              <a:t>Japan</a:t>
+              <a:t>Azerbaijan</a:t>
             </a:r>
           </a:p>
         </p:txBody>
@@ -9009,7 +9009,7 @@
                 <a:latin typeface="Meiryo UI" panose="020B0604030504040204" pitchFamily="50" charset="-128"/>
                 <a:ea typeface="Meiryo UI" panose="020B0604030504040204" pitchFamily="50" charset="-128"/>
               </a:rPr>
-              <a:t>Viet Nam</a:t>
+              <a:t>Armenia</a:t>
             </a:r>
             <a:endParaRPr lang="ja-JP" altLang="ja-JP" sz="600" b="0" i="0" u="none" strike="noStrike" dirty="0">
               <a:solidFill>
@@ -9037,7 +9037,7 @@
         <p:spPr>
           <a:xfrm>
             <a:off x="3695363" y="4843073"/>
-            <a:ext cx="409366" cy="80791"/>
+            <a:ext cx="409366" cy="157735"/>
           </a:xfrm>
           <a:prstGeom prst="rect">
             <a:avLst/>
@@ -9062,7 +9062,7 @@
                 <a:latin typeface="Meiryo UI" panose="020B0604030504040204" pitchFamily="50" charset="-128"/>
                 <a:ea typeface="Meiryo UI" panose="020B0604030504040204" pitchFamily="50" charset="-128"/>
               </a:rPr>
-              <a:t>Armenia</a:t>
+              <a:t>Bangladesh</a:t>
             </a:r>
           </a:p>
         </p:txBody>
@@ -9107,7 +9107,7 @@
                 <a:latin typeface="Meiryo UI" panose="020B0604030504040204" pitchFamily="50" charset="-128"/>
                 <a:ea typeface="Meiryo UI" panose="020B0604030504040204" pitchFamily="50" charset="-128"/>
               </a:rPr>
-              <a:t>Azerbaijan</a:t>
+              <a:t>Bhutan</a:t>
             </a:r>
           </a:p>
         </p:txBody>
@@ -9152,7 +9152,7 @@
                 <a:latin typeface="Meiryo UI" panose="020B0604030504040204" pitchFamily="50" charset="-128"/>
                 <a:ea typeface="Meiryo UI" panose="020B0604030504040204" pitchFamily="50" charset="-128"/>
               </a:rPr>
-              <a:t>Bangladesh</a:t>
+              <a:t>Brunei</a:t>
             </a:r>
           </a:p>
         </p:txBody>
@@ -9197,7 +9197,7 @@
                 <a:latin typeface="Meiryo UI" panose="020B0604030504040204" pitchFamily="50" charset="-128"/>
                 <a:ea typeface="Meiryo UI" panose="020B0604030504040204" pitchFamily="50" charset="-128"/>
               </a:rPr>
-              <a:t>Bhutan</a:t>
+              <a:t>Cambodia</a:t>
             </a:r>
           </a:p>
         </p:txBody>
@@ -9242,7 +9242,7 @@
                 <a:latin typeface="Meiryo UI" panose="020B0604030504040204" pitchFamily="50" charset="-128"/>
                 <a:ea typeface="Meiryo UI" panose="020B0604030504040204" pitchFamily="50" charset="-128"/>
               </a:rPr>
-              <a:t>Brunei</a:t>
+              <a:t>Fiji</a:t>
             </a:r>
           </a:p>
         </p:txBody>
@@ -9287,7 +9287,7 @@
                 <a:latin typeface="Meiryo UI" panose="020B0604030504040204" pitchFamily="50" charset="-128"/>
                 <a:ea typeface="Meiryo UI" panose="020B0604030504040204" pitchFamily="50" charset="-128"/>
               </a:rPr>
-              <a:t>Cambodia</a:t>
+              <a:t>India</a:t>
             </a:r>
           </a:p>
         </p:txBody>
@@ -9332,7 +9332,7 @@
                 <a:latin typeface="Meiryo UI" panose="020B0604030504040204" pitchFamily="50" charset="-128"/>
                 <a:ea typeface="Meiryo UI" panose="020B0604030504040204" pitchFamily="50" charset="-128"/>
               </a:rPr>
-              <a:t>India</a:t>
+              <a:t>Malaysia</a:t>
             </a:r>
           </a:p>
         </p:txBody>
@@ -9377,7 +9377,7 @@
                 <a:latin typeface="Meiryo UI" panose="020B0604030504040204" pitchFamily="50" charset="-128"/>
                 <a:ea typeface="Meiryo UI" panose="020B0604030504040204" pitchFamily="50" charset="-128"/>
               </a:rPr>
-              <a:t>Lao PDR</a:t>
+              <a:t>Maldives</a:t>
             </a:r>
           </a:p>
         </p:txBody>
@@ -9422,7 +9422,7 @@
                 <a:latin typeface="Meiryo UI" panose="020B0604030504040204" pitchFamily="50" charset="-128"/>
                 <a:ea typeface="Meiryo UI" panose="020B0604030504040204" pitchFamily="50" charset="-128"/>
               </a:rPr>
-              <a:t>Malaysia</a:t>
+              <a:t>Mongolia</a:t>
             </a:r>
           </a:p>
         </p:txBody>
@@ -9512,7 +9512,7 @@
                 <a:latin typeface="Meiryo UI" panose="020B0604030504040204" pitchFamily="50" charset="-128"/>
                 <a:ea typeface="Meiryo UI" panose="020B0604030504040204" pitchFamily="50" charset="-128"/>
               </a:rPr>
-              <a:t>Thailand</a:t>
+              <a:t>Turkiye</a:t>
             </a:r>
             <a:endParaRPr lang="en-GB" altLang="ja-JP" sz="600" u="none" strike="noStrike" dirty="0">
               <a:effectLst/>
@@ -9562,7 +9562,7 @@
                 <a:latin typeface="Meiryo UI" panose="020B0604030504040204" pitchFamily="50" charset="-128"/>
                 <a:ea typeface="Meiryo UI" panose="020B0604030504040204" pitchFamily="50" charset="-128"/>
               </a:rPr>
-              <a:t>Turkiye</a:t>
+              <a:t>Uzbekistan</a:t>
             </a:r>
           </a:p>
         </p:txBody>
@@ -9697,7 +9697,7 @@
                 <a:latin typeface="Meiryo UI" panose="020B0604030504040204" pitchFamily="50" charset="-128"/>
                 <a:ea typeface="Meiryo UI" panose="020B0604030504040204" pitchFamily="50" charset="-128"/>
               </a:rPr>
-              <a:t>Uzbekistan</a:t>
+              <a:t>Viet Nam</a:t>
             </a:r>
           </a:p>
         </p:txBody>
@@ -9742,7 +9742,7 @@
                 <a:latin typeface="Meiryo UI" panose="020B0604030504040204" pitchFamily="50" charset="-128"/>
                 <a:ea typeface="Meiryo UI" panose="020B0604030504040204" pitchFamily="50" charset="-128"/>
               </a:rPr>
-              <a:t>Sri Lanka</a:t>
+              <a:t>Thailand</a:t>
             </a:r>
           </a:p>
         </p:txBody>
@@ -9787,7 +9787,7 @@
                 <a:latin typeface="Meiryo UI" panose="020B0604030504040204" pitchFamily="50" charset="-128"/>
                 <a:ea typeface="Meiryo UI" panose="020B0604030504040204" pitchFamily="50" charset="-128"/>
               </a:rPr>
-              <a:t>ROK</a:t>
+              <a:t>Sri Lanka</a:t>
             </a:r>
           </a:p>
         </p:txBody>
@@ -9832,7 +9832,7 @@
                 <a:latin typeface="Meiryo UI" panose="020B0604030504040204" pitchFamily="50" charset="-128"/>
                 <a:ea typeface="Meiryo UI" panose="020B0604030504040204" pitchFamily="50" charset="-128"/>
               </a:rPr>
-              <a:t>PNG</a:t>
+              <a:t>ROK</a:t>
             </a:r>
           </a:p>
         </p:txBody>
@@ -9877,7 +9877,7 @@
                 <a:latin typeface="Meiryo UI" panose="020B0604030504040204" pitchFamily="50" charset="-128"/>
                 <a:ea typeface="Meiryo UI" panose="020B0604030504040204" pitchFamily="50" charset="-128"/>
               </a:rPr>
-              <a:t>Pakistan</a:t>
+              <a:t>PNG</a:t>
             </a:r>
           </a:p>
         </p:txBody>
@@ -9922,7 +9922,7 @@
                 <a:latin typeface="Meiryo UI" panose="020B0604030504040204" pitchFamily="50" charset="-128"/>
                 <a:ea typeface="Meiryo UI" panose="020B0604030504040204" pitchFamily="50" charset="-128"/>
               </a:rPr>
-              <a:t>Myanmar</a:t>
+              <a:t>Pakistan</a:t>
             </a:r>
           </a:p>
         </p:txBody>
@@ -9967,7 +9967,7 @@
                 <a:latin typeface="Meiryo UI" panose="020B0604030504040204" pitchFamily="50" charset="-128"/>
                 <a:ea typeface="Meiryo UI" panose="020B0604030504040204" pitchFamily="50" charset="-128"/>
               </a:rPr>
-              <a:t>Mongolia</a:t>
+              <a:t>Myanmar</a:t>
             </a:r>
           </a:p>
         </p:txBody>
@@ -10012,7 +10012,7 @@
                 <a:latin typeface="Meiryo UI" panose="020B0604030504040204" pitchFamily="50" charset="-128"/>
                 <a:ea typeface="Meiryo UI" panose="020B0604030504040204" pitchFamily="50" charset="-128"/>
               </a:rPr>
-              <a:t>Maldives</a:t>
+              <a:t>Japan</a:t>
             </a:r>
           </a:p>
         </p:txBody>
@@ -10147,7 +10147,7 @@
                 <a:latin typeface="Meiryo UI" panose="020B0604030504040204" pitchFamily="50" charset="-128"/>
                 <a:ea typeface="Meiryo UI" panose="020B0604030504040204" pitchFamily="50" charset="-128"/>
               </a:rPr>
-              <a:t>Fiji</a:t>
+              <a:t>Lao PDR</a:t>
             </a:r>
           </a:p>
         </p:txBody>
@@ -10211,7 +10211,7 @@
         </p:nvSpPr>
         <p:spPr>
           <a:xfrm>
-            <a:off x="1330000" y="4106846"/>
+            <a:off x="1285000" y="4106846"/>
             <a:ext cx="409366" cy="80791"/>
           </a:xfrm>
           <a:prstGeom prst="rect">
@@ -10659,186 +10659,6 @@
       </p:sp>
       <p:sp>
         <p:nvSpPr>
-          <p:cNvPr id="141" name="テキスト ボックス 140">
-            <a:extLst>
-              <a:ext uri="{FF2B5EF4-FFF2-40B4-BE49-F238E27FC236}">
-                <a16:creationId xmlns:a16="http://schemas.microsoft.com/office/drawing/2014/main" id="{029688E0-E253-EA47-C9A5-5ACC0501AACA}"/>
-              </a:ext>
-            </a:extLst>
-          </p:cNvPr>
-          <p:cNvSpPr txBox="1"/>
-          <p:nvPr/>
-        </p:nvSpPr>
-        <p:spPr>
-          <a:xfrm>
-            <a:off x="3930000" y="7687920"/>
-            <a:ext cx="304684" cy="80791"/>
-          </a:xfrm>
-          <a:prstGeom prst="rect">
-            <a:avLst/>
-          </a:prstGeom>
-          <a:noFill/>
-        </p:spPr>
-        <p:txBody>
-          <a:bodyPr wrap="square" lIns="0" tIns="0" rIns="0" bIns="0">
-            <a:spAutoFit/>
-          </a:bodyPr>
-          <a:lstStyle/>
-          <a:p>
-            <a:pPr algn="l" fontAlgn="ctr">
-              <a:lnSpc>
-                <a:spcPts val="600"/>
-              </a:lnSpc>
-              <a:buNone/>
-            </a:pPr>
-            <a:r>
-              <a:rPr lang="en-GB" altLang="ja-JP" sz="600" u="none" strike="noStrike" dirty="0">
-                <a:effectLst/>
-                <a:latin typeface="Meiryo UI" panose="020B0604030504040204" pitchFamily="50" charset="-128"/>
-                <a:ea typeface="Meiryo UI" panose="020B0604030504040204" pitchFamily="50" charset="-128"/>
-              </a:rPr>
-              <a:t>ROK</a:t>
-            </a:r>
-          </a:p>
-        </p:txBody>
-      </p:sp>
-      <p:sp>
-        <p:nvSpPr>
-          <p:cNvPr id="143" name="テキスト ボックス 142">
-            <a:extLst>
-              <a:ext uri="{FF2B5EF4-FFF2-40B4-BE49-F238E27FC236}">
-                <a16:creationId xmlns:a16="http://schemas.microsoft.com/office/drawing/2014/main" id="{A3D5358F-77D6-D1CD-2235-433327F98C4C}"/>
-              </a:ext>
-            </a:extLst>
-          </p:cNvPr>
-          <p:cNvSpPr txBox="1"/>
-          <p:nvPr/>
-        </p:nvSpPr>
-        <p:spPr>
-          <a:xfrm>
-            <a:off x="4170000" y="7687920"/>
-            <a:ext cx="304684" cy="80791"/>
-          </a:xfrm>
-          <a:prstGeom prst="rect">
-            <a:avLst/>
-          </a:prstGeom>
-          <a:noFill/>
-        </p:spPr>
-        <p:txBody>
-          <a:bodyPr wrap="square" lIns="0" tIns="0" rIns="0" bIns="0">
-            <a:spAutoFit/>
-          </a:bodyPr>
-          <a:lstStyle/>
-          <a:p>
-            <a:pPr algn="l" fontAlgn="ctr">
-              <a:lnSpc>
-                <a:spcPts val="600"/>
-              </a:lnSpc>
-              <a:buNone/>
-            </a:pPr>
-            <a:r>
-              <a:rPr lang="en-GB" altLang="ja-JP" sz="600" u="none" strike="noStrike" dirty="0">
-                <a:effectLst/>
-                <a:latin typeface="Meiryo UI" panose="020B0604030504040204" pitchFamily="50" charset="-128"/>
-                <a:ea typeface="Meiryo UI" panose="020B0604030504040204" pitchFamily="50" charset="-128"/>
-              </a:rPr>
-              <a:t>ROK</a:t>
-            </a:r>
-          </a:p>
-        </p:txBody>
-      </p:sp>
-      <p:sp>
-        <p:nvSpPr>
-          <p:cNvPr id="145" name="テキスト ボックス 144">
-            <a:extLst>
-              <a:ext uri="{FF2B5EF4-FFF2-40B4-BE49-F238E27FC236}">
-                <a16:creationId xmlns:a16="http://schemas.microsoft.com/office/drawing/2014/main" id="{6451F370-7251-CA17-6373-FA7B8E90DF8F}"/>
-              </a:ext>
-            </a:extLst>
-          </p:cNvPr>
-          <p:cNvSpPr txBox="1"/>
-          <p:nvPr/>
-        </p:nvSpPr>
-        <p:spPr>
-          <a:xfrm>
-            <a:off x="1951433" y="7709098"/>
-            <a:ext cx="409366" cy="80791"/>
-          </a:xfrm>
-          <a:prstGeom prst="rect">
-            <a:avLst/>
-          </a:prstGeom>
-          <a:noFill/>
-        </p:spPr>
-        <p:txBody>
-          <a:bodyPr wrap="square" lIns="0" tIns="0" rIns="0" bIns="0">
-            <a:spAutoFit/>
-          </a:bodyPr>
-          <a:lstStyle/>
-          <a:p>
-            <a:pPr algn="l" fontAlgn="ctr">
-              <a:lnSpc>
-                <a:spcPts val="600"/>
-              </a:lnSpc>
-              <a:buNone/>
-            </a:pPr>
-            <a:r>
-              <a:rPr lang="en-GB" altLang="ja-JP" sz="600" u="none" strike="noStrike" dirty="0">
-                <a:effectLst/>
-                <a:latin typeface="Meiryo UI" panose="020B0604030504040204" pitchFamily="50" charset="-128"/>
-                <a:ea typeface="Meiryo UI" panose="020B0604030504040204" pitchFamily="50" charset="-128"/>
-              </a:rPr>
-              <a:t>PNG</a:t>
-            </a:r>
-          </a:p>
-        </p:txBody>
-      </p:sp>
-      <p:sp>
-        <p:nvSpPr>
-          <p:cNvPr id="147" name="テキスト ボックス 146">
-            <a:extLst>
-              <a:ext uri="{FF2B5EF4-FFF2-40B4-BE49-F238E27FC236}">
-                <a16:creationId xmlns:a16="http://schemas.microsoft.com/office/drawing/2014/main" id="{30722125-AFD7-1D72-E787-3E7148CB4653}"/>
-              </a:ext>
-            </a:extLst>
-          </p:cNvPr>
-          <p:cNvSpPr txBox="1"/>
-          <p:nvPr/>
-        </p:nvSpPr>
-        <p:spPr>
-          <a:xfrm>
-            <a:off x="2175085" y="7707462"/>
-            <a:ext cx="409366" cy="80791"/>
-          </a:xfrm>
-          <a:prstGeom prst="rect">
-            <a:avLst/>
-          </a:prstGeom>
-          <a:noFill/>
-        </p:spPr>
-        <p:txBody>
-          <a:bodyPr wrap="square" lIns="0" tIns="0" rIns="0" bIns="0">
-            <a:spAutoFit/>
-          </a:bodyPr>
-          <a:lstStyle/>
-          <a:p>
-            <a:pPr algn="l" fontAlgn="ctr">
-              <a:lnSpc>
-                <a:spcPts val="600"/>
-              </a:lnSpc>
-              <a:buNone/>
-            </a:pPr>
-            <a:r>
-              <a:rPr lang="en-GB" altLang="ja-JP" sz="600" u="none" strike="noStrike" dirty="0">
-                <a:effectLst/>
-                <a:latin typeface="Meiryo UI" panose="020B0604030504040204" pitchFamily="50" charset="-128"/>
-                <a:ea typeface="Meiryo UI" panose="020B0604030504040204" pitchFamily="50" charset="-128"/>
-              </a:rPr>
-              <a:t>Pakistan</a:t>
-            </a:r>
-          </a:p>
-        </p:txBody>
-      </p:sp>
-      <p:sp>
-        <p:nvSpPr>
           <p:cNvPr id="149" name="テキスト ボックス 148">
             <a:extLst>
               <a:ext uri="{FF2B5EF4-FFF2-40B4-BE49-F238E27FC236}">
@@ -10851,7 +10671,7 @@
         </p:nvSpPr>
         <p:spPr>
           <a:xfrm>
-            <a:off x="4301150" y="6824007"/>
+            <a:off x="4301150" y="6322685"/>
             <a:ext cx="409366" cy="80791"/>
           </a:xfrm>
           <a:prstGeom prst="rect">
@@ -10896,7 +10716,7 @@
         </p:nvSpPr>
         <p:spPr>
           <a:xfrm>
-            <a:off x="4301150" y="6594699"/>
+            <a:off x="4301150" y="6124153"/>
             <a:ext cx="409366" cy="80791"/>
           </a:xfrm>
           <a:prstGeom prst="rect">
@@ -10941,7 +10761,7 @@
         </p:nvSpPr>
         <p:spPr>
           <a:xfrm>
-            <a:off x="4308492" y="5859749"/>
+            <a:off x="4308492" y="5363227"/>
             <a:ext cx="409366" cy="80791"/>
           </a:xfrm>
           <a:prstGeom prst="rect">
@@ -10968,141 +10788,6 @@
                 <a:ea typeface="Meiryo UI" panose="020B0604030504040204" pitchFamily="50" charset="-128"/>
               </a:rPr>
               <a:t>Brunei</a:t>
-            </a:r>
-          </a:p>
-        </p:txBody>
-      </p:sp>
-      <p:sp>
-        <p:nvSpPr>
-          <p:cNvPr id="155" name="テキスト ボックス 154">
-            <a:extLst>
-              <a:ext uri="{FF2B5EF4-FFF2-40B4-BE49-F238E27FC236}">
-                <a16:creationId xmlns:a16="http://schemas.microsoft.com/office/drawing/2014/main" id="{BC6835BF-D6C2-824A-FACE-28B6A2F7490C}"/>
-              </a:ext>
-            </a:extLst>
-          </p:cNvPr>
-          <p:cNvSpPr txBox="1"/>
-          <p:nvPr/>
-        </p:nvSpPr>
-        <p:spPr>
-          <a:xfrm>
-            <a:off x="4308492" y="4605765"/>
-            <a:ext cx="409366" cy="80791"/>
-          </a:xfrm>
-          <a:prstGeom prst="rect">
-            <a:avLst/>
-          </a:prstGeom>
-          <a:noFill/>
-        </p:spPr>
-        <p:txBody>
-          <a:bodyPr wrap="square" lIns="0" tIns="0" rIns="0" bIns="0">
-            <a:spAutoFit/>
-          </a:bodyPr>
-          <a:lstStyle/>
-          <a:p>
-            <a:pPr algn="l" fontAlgn="ctr">
-              <a:lnSpc>
-                <a:spcPts val="600"/>
-              </a:lnSpc>
-              <a:buNone/>
-            </a:pPr>
-            <a:r>
-              <a:rPr lang="en-GB" altLang="ja-JP" sz="600" u="none" strike="noStrike" dirty="0">
-                <a:effectLst/>
-                <a:latin typeface="Meiryo UI" panose="020B0604030504040204" pitchFamily="50" charset="-128"/>
-                <a:ea typeface="Meiryo UI" panose="020B0604030504040204" pitchFamily="50" charset="-128"/>
-              </a:rPr>
-              <a:t>Japan</a:t>
-            </a:r>
-          </a:p>
-        </p:txBody>
-      </p:sp>
-      <p:sp>
-        <p:nvSpPr>
-          <p:cNvPr id="157" name="テキスト ボックス 156">
-            <a:extLst>
-              <a:ext uri="{FF2B5EF4-FFF2-40B4-BE49-F238E27FC236}">
-                <a16:creationId xmlns:a16="http://schemas.microsoft.com/office/drawing/2014/main" id="{33B94C11-4F8E-37D0-3B80-843953152313}"/>
-              </a:ext>
-            </a:extLst>
-          </p:cNvPr>
-          <p:cNvSpPr txBox="1"/>
-          <p:nvPr/>
-        </p:nvSpPr>
-        <p:spPr>
-          <a:xfrm>
-            <a:off x="4303886" y="4835073"/>
-            <a:ext cx="409366" cy="80791"/>
-          </a:xfrm>
-          <a:prstGeom prst="rect">
-            <a:avLst/>
-          </a:prstGeom>
-          <a:noFill/>
-        </p:spPr>
-        <p:txBody>
-          <a:bodyPr wrap="square" lIns="0" tIns="0" rIns="0" bIns="0">
-            <a:spAutoFit/>
-          </a:bodyPr>
-          <a:lstStyle/>
-          <a:p>
-            <a:pPr algn="l" fontAlgn="ctr">
-              <a:lnSpc>
-                <a:spcPts val="600"/>
-              </a:lnSpc>
-              <a:buNone/>
-            </a:pPr>
-            <a:r>
-              <a:rPr lang="en-GB" altLang="ja-JP" sz="600" u="none" strike="noStrike" dirty="0">
-                <a:effectLst/>
-                <a:latin typeface="Meiryo UI" panose="020B0604030504040204" pitchFamily="50" charset="-128"/>
-                <a:ea typeface="Meiryo UI" panose="020B0604030504040204" pitchFamily="50" charset="-128"/>
-              </a:rPr>
-              <a:t>Japan</a:t>
-            </a:r>
-          </a:p>
-        </p:txBody>
-      </p:sp>
-      <p:sp>
-        <p:nvSpPr>
-          <p:cNvPr id="159" name="テキスト ボックス 158">
-            <a:extLst>
-              <a:ext uri="{FF2B5EF4-FFF2-40B4-BE49-F238E27FC236}">
-                <a16:creationId xmlns:a16="http://schemas.microsoft.com/office/drawing/2014/main" id="{4DC9C3B5-4908-B0DE-BF67-4BA0E1F40D61}"/>
-              </a:ext>
-            </a:extLst>
-          </p:cNvPr>
-          <p:cNvSpPr txBox="1"/>
-          <p:nvPr/>
-        </p:nvSpPr>
-        <p:spPr>
-          <a:xfrm>
-            <a:off x="4308492" y="5100221"/>
-            <a:ext cx="409366" cy="80791"/>
-          </a:xfrm>
-          <a:prstGeom prst="rect">
-            <a:avLst/>
-          </a:prstGeom>
-          <a:noFill/>
-        </p:spPr>
-        <p:txBody>
-          <a:bodyPr wrap="square" lIns="0" tIns="0" rIns="0" bIns="0">
-            <a:spAutoFit/>
-          </a:bodyPr>
-          <a:lstStyle/>
-          <a:p>
-            <a:pPr algn="l" fontAlgn="ctr">
-              <a:lnSpc>
-                <a:spcPts val="600"/>
-              </a:lnSpc>
-              <a:buNone/>
-            </a:pPr>
-            <a:r>
-              <a:rPr lang="en-GB" altLang="ja-JP" sz="600" u="none" strike="noStrike" dirty="0">
-                <a:effectLst/>
-                <a:latin typeface="Meiryo UI" panose="020B0604030504040204" pitchFamily="50" charset="-128"/>
-                <a:ea typeface="Meiryo UI" panose="020B0604030504040204" pitchFamily="50" charset="-128"/>
-              </a:rPr>
-              <a:t>Japan</a:t>
             </a:r>
           </a:p>
         </p:txBody>
@@ -11121,7 +10806,7 @@
         </p:nvSpPr>
         <p:spPr>
           <a:xfrm>
-            <a:off x="4299756" y="5363227"/>
+            <a:off x="4299756" y="4605765"/>
             <a:ext cx="409366" cy="80791"/>
           </a:xfrm>
           <a:prstGeom prst="rect">
@@ -11239,118 +10924,6 @@
               </a:rPr>
               <a:t>Singapore</a:t>
             </a:r>
-          </a:p>
-        </p:txBody>
-      </p:sp>
-      <p:sp>
-        <p:nvSpPr>
-          <p:cNvPr id="167" name="テキスト ボックス 166">
-            <a:extLst>
-              <a:ext uri="{FF2B5EF4-FFF2-40B4-BE49-F238E27FC236}">
-                <a16:creationId xmlns:a16="http://schemas.microsoft.com/office/drawing/2014/main" id="{EDBECD81-6FB8-2D33-08E5-262BE06B316D}"/>
-              </a:ext>
-            </a:extLst>
-          </p:cNvPr>
-          <p:cNvSpPr txBox="1"/>
-          <p:nvPr/>
-        </p:nvSpPr>
-        <p:spPr>
-          <a:xfrm>
-            <a:off x="2967827" y="7707213"/>
-            <a:ext cx="409366" cy="80791"/>
-          </a:xfrm>
-          <a:prstGeom prst="rect">
-            <a:avLst/>
-          </a:prstGeom>
-          <a:solidFill>
-            <a:schemeClr val="accent6">
-              <a:lumMod val="20000"/>
-              <a:lumOff val="80000"/>
-            </a:schemeClr>
-          </a:solidFill>
-        </p:spPr>
-        <p:txBody>
-          <a:bodyPr wrap="square" lIns="0" tIns="0" rIns="0" bIns="0">
-            <a:spAutoFit/>
-          </a:bodyPr>
-          <a:lstStyle/>
-          <a:p>
-            <a:pPr algn="ctr" fontAlgn="ctr">
-              <a:lnSpc>
-                <a:spcPts val="600"/>
-              </a:lnSpc>
-              <a:buNone/>
-            </a:pPr>
-            <a:r>
-              <a:rPr lang="en-GB" altLang="ja-JP" sz="600" u="none" strike="noStrike" dirty="0">
-                <a:effectLst/>
-                <a:latin typeface="Meiryo UI" panose="020B0604030504040204" pitchFamily="50" charset="-128"/>
-                <a:ea typeface="Meiryo UI" panose="020B0604030504040204" pitchFamily="50" charset="-128"/>
-              </a:rPr>
-              <a:t>ADPC</a:t>
-            </a:r>
-          </a:p>
-        </p:txBody>
-      </p:sp>
-      <p:sp>
-        <p:nvSpPr>
-          <p:cNvPr id="169" name="テキスト ボックス 168">
-            <a:extLst>
-              <a:ext uri="{FF2B5EF4-FFF2-40B4-BE49-F238E27FC236}">
-                <a16:creationId xmlns:a16="http://schemas.microsoft.com/office/drawing/2014/main" id="{0A1A056E-6BC4-2877-5DE5-AC08D0114E85}"/>
-              </a:ext>
-            </a:extLst>
-          </p:cNvPr>
-          <p:cNvSpPr txBox="1"/>
-          <p:nvPr/>
-        </p:nvSpPr>
-        <p:spPr>
-          <a:xfrm>
-            <a:off x="2524690" y="7687920"/>
-            <a:ext cx="409366" cy="157735"/>
-          </a:xfrm>
-          <a:prstGeom prst="rect">
-            <a:avLst/>
-          </a:prstGeom>
-          <a:solidFill>
-            <a:schemeClr val="accent6">
-              <a:lumMod val="20000"/>
-              <a:lumOff val="80000"/>
-            </a:schemeClr>
-          </a:solidFill>
-        </p:spPr>
-        <p:txBody>
-          <a:bodyPr wrap="square" lIns="0" tIns="0" rIns="0" bIns="0">
-            <a:spAutoFit/>
-          </a:bodyPr>
-          <a:lstStyle/>
-          <a:p>
-            <a:pPr algn="ctr" fontAlgn="ctr">
-              <a:lnSpc>
-                <a:spcPts val="600"/>
-              </a:lnSpc>
-              <a:buNone/>
-            </a:pPr>
-            <a:r>
-              <a:rPr lang="en-GB" altLang="ja-JP" sz="600" u="none" strike="noStrike" dirty="0">
-                <a:effectLst/>
-                <a:latin typeface="Meiryo UI" panose="020B0604030504040204" pitchFamily="50" charset="-128"/>
-                <a:ea typeface="Meiryo UI" panose="020B0604030504040204" pitchFamily="50" charset="-128"/>
-              </a:rPr>
-              <a:t>A</a:t>
-            </a:r>
-            <a:r>
-              <a:rPr lang="en-GB" altLang="ja-JP" sz="600" dirty="0">
-                <a:latin typeface="Meiryo UI" panose="020B0604030504040204" pitchFamily="50" charset="-128"/>
-                <a:ea typeface="Meiryo UI" panose="020B0604030504040204" pitchFamily="50" charset="-128"/>
-              </a:rPr>
-              <a:t>HA Centre</a:t>
-            </a:r>
-            <a:endParaRPr lang="en-GB" altLang="ja-JP" sz="600" u="none" strike="noStrike" dirty="0">
-              <a:effectLst/>
-              <a:latin typeface="Meiryo UI" panose="020B0604030504040204" pitchFamily="50" charset="-128"/>
-              <a:ea typeface="Meiryo UI" panose="020B0604030504040204" pitchFamily="50" charset="-128"/>
-            </a:endParaRPr>
           </a:p>
         </p:txBody>
       </p:sp>
@@ -11668,1344 +11241,6 @@
       </p:sp>
       <p:sp>
         <p:nvSpPr>
-          <p:cNvPr id="175" name="正方形/長方形 174">
-            <a:extLst>
-              <a:ext uri="{FF2B5EF4-FFF2-40B4-BE49-F238E27FC236}">
-                <a16:creationId xmlns:a16="http://schemas.microsoft.com/office/drawing/2014/main" id="{B8711C39-6FDE-4143-49D8-8B7B48147FF2}"/>
-              </a:ext>
-            </a:extLst>
-          </p:cNvPr>
-          <p:cNvSpPr/>
-          <p:nvPr/>
-        </p:nvSpPr>
-        <p:spPr>
-          <a:xfrm>
-            <a:off x="2054041" y="7435396"/>
-            <a:ext cx="436816" cy="192003"/>
-          </a:xfrm>
-          <a:prstGeom prst="rect">
-            <a:avLst/>
-          </a:prstGeom>
-          <a:solidFill>
-            <a:srgbClr val="4BACC6"/>
-          </a:solidFill>
-          <a:ln w="25400" cap="flat" cmpd="sng" algn="ctr">
-            <a:solidFill>
-              <a:sysClr val="windowText" lastClr="000000"/>
-            </a:solidFill>
-            <a:prstDash val="solid"/>
-          </a:ln>
-          <a:effectLst/>
-        </p:spPr>
-        <p:txBody>
-          <a:bodyPr lIns="0" tIns="0" rIns="0" bIns="0" rtlCol="0" anchor="ctr" anchorCtr="1"/>
-          <a:lstStyle>
-            <a:lvl1pPr marL="0" indent="0">
-              <a:defRPr sz="1100">
-                <a:solidFill>
-                  <a:schemeClr val="lt1"/>
-                </a:solidFill>
-                <a:latin typeface="+mn-lt"/>
-                <a:ea typeface="+mn-ea"/>
-                <a:cs typeface="+mn-cs"/>
-              </a:defRPr>
-            </a:lvl1pPr>
-            <a:lvl2pPr marL="457200" indent="0">
-              <a:defRPr sz="1100">
-                <a:solidFill>
-                  <a:schemeClr val="lt1"/>
-                </a:solidFill>
-                <a:latin typeface="+mn-lt"/>
-                <a:ea typeface="+mn-ea"/>
-                <a:cs typeface="+mn-cs"/>
-              </a:defRPr>
-            </a:lvl2pPr>
-            <a:lvl3pPr marL="914400" indent="0">
-              <a:defRPr sz="1100">
-                <a:solidFill>
-                  <a:schemeClr val="lt1"/>
-                </a:solidFill>
-                <a:latin typeface="+mn-lt"/>
-                <a:ea typeface="+mn-ea"/>
-                <a:cs typeface="+mn-cs"/>
-              </a:defRPr>
-            </a:lvl3pPr>
-            <a:lvl4pPr marL="1371600" indent="0">
-              <a:defRPr sz="1100">
-                <a:solidFill>
-                  <a:schemeClr val="lt1"/>
-                </a:solidFill>
-                <a:latin typeface="+mn-lt"/>
-                <a:ea typeface="+mn-ea"/>
-                <a:cs typeface="+mn-cs"/>
-              </a:defRPr>
-            </a:lvl4pPr>
-            <a:lvl5pPr marL="1828800" indent="0">
-              <a:defRPr sz="1100">
-                <a:solidFill>
-                  <a:schemeClr val="lt1"/>
-                </a:solidFill>
-                <a:latin typeface="+mn-lt"/>
-                <a:ea typeface="+mn-ea"/>
-                <a:cs typeface="+mn-cs"/>
-              </a:defRPr>
-            </a:lvl5pPr>
-            <a:lvl6pPr marL="2286000" indent="0">
-              <a:defRPr sz="1100">
-                <a:solidFill>
-                  <a:schemeClr val="lt1"/>
-                </a:solidFill>
-                <a:latin typeface="+mn-lt"/>
-                <a:ea typeface="+mn-ea"/>
-                <a:cs typeface="+mn-cs"/>
-              </a:defRPr>
-            </a:lvl6pPr>
-            <a:lvl7pPr marL="2743200" indent="0">
-              <a:defRPr sz="1100">
-                <a:solidFill>
-                  <a:schemeClr val="lt1"/>
-                </a:solidFill>
-                <a:latin typeface="+mn-lt"/>
-                <a:ea typeface="+mn-ea"/>
-                <a:cs typeface="+mn-cs"/>
-              </a:defRPr>
-            </a:lvl7pPr>
-            <a:lvl8pPr marL="3200400" indent="0">
-              <a:defRPr sz="1100">
-                <a:solidFill>
-                  <a:schemeClr val="lt1"/>
-                </a:solidFill>
-                <a:latin typeface="+mn-lt"/>
-                <a:ea typeface="+mn-ea"/>
-                <a:cs typeface="+mn-cs"/>
-              </a:defRPr>
-            </a:lvl8pPr>
-            <a:lvl9pPr marL="3657600" indent="0">
-              <a:defRPr sz="1100">
-                <a:solidFill>
-                  <a:schemeClr val="lt1"/>
-                </a:solidFill>
-                <a:latin typeface="+mn-lt"/>
-                <a:ea typeface="+mn-ea"/>
-                <a:cs typeface="+mn-cs"/>
-              </a:defRPr>
-            </a:lvl9pPr>
-          </a:lstStyle>
-          <a:p>
-            <a:pPr defTabSz="914400">
-              <a:defRPr/>
-            </a:pPr>
-            <a:r>
-              <a:rPr kumimoji="1" lang="en-US" altLang="ja-JP" sz="600" kern="0" dirty="0">
-                <a:solidFill>
-                  <a:sysClr val="window" lastClr="FFFFFF"/>
-                </a:solidFill>
-                <a:latin typeface="Calibri"/>
-                <a:ea typeface="ＭＳ Ｐゴシック" panose="020B0600070205080204" pitchFamily="50" charset="-128"/>
-              </a:rPr>
-              <a:t>member</a:t>
-            </a:r>
-            <a:endParaRPr kumimoji="1" lang="ja-JP" altLang="en-US" sz="500" b="0" i="0" u="none" strike="noStrike" kern="0" cap="none" spc="0" normalizeH="0" baseline="0" noProof="0" dirty="0">
-              <a:ln>
-                <a:noFill/>
-              </a:ln>
-              <a:solidFill>
-                <a:sysClr val="window" lastClr="FFFFFF"/>
-              </a:solidFill>
-              <a:effectLst/>
-              <a:uLnTx/>
-              <a:uFillTx/>
-              <a:latin typeface="Calibri"/>
-              <a:ea typeface="ＭＳ Ｐゴシック" panose="020B0600070205080204" pitchFamily="50" charset="-128"/>
-              <a:cs typeface="+mn-cs"/>
-            </a:endParaRPr>
-          </a:p>
-        </p:txBody>
-      </p:sp>
-      <p:sp>
-        <p:nvSpPr>
-          <p:cNvPr id="177" name="正方形/長方形 176">
-            <a:extLst>
-              <a:ext uri="{FF2B5EF4-FFF2-40B4-BE49-F238E27FC236}">
-                <a16:creationId xmlns:a16="http://schemas.microsoft.com/office/drawing/2014/main" id="{05B579E1-AA55-878D-A7FE-D0AF2F6EF8F3}"/>
-              </a:ext>
-            </a:extLst>
-          </p:cNvPr>
-          <p:cNvSpPr/>
-          <p:nvPr/>
-        </p:nvSpPr>
-        <p:spPr>
-          <a:xfrm>
-            <a:off x="2510965" y="7435396"/>
-            <a:ext cx="436816" cy="192003"/>
-          </a:xfrm>
-          <a:prstGeom prst="rect">
-            <a:avLst/>
-          </a:prstGeom>
-          <a:solidFill>
-            <a:srgbClr val="4BACC6"/>
-          </a:solidFill>
-          <a:ln w="25400" cap="flat" cmpd="sng" algn="ctr">
-            <a:solidFill>
-              <a:sysClr val="windowText" lastClr="000000"/>
-            </a:solidFill>
-            <a:prstDash val="solid"/>
-          </a:ln>
-          <a:effectLst/>
-        </p:spPr>
-        <p:txBody>
-          <a:bodyPr lIns="0" tIns="0" rIns="0" bIns="0" rtlCol="0" anchor="ctr" anchorCtr="1"/>
-          <a:lstStyle>
-            <a:lvl1pPr marL="0" indent="0">
-              <a:defRPr sz="1100">
-                <a:solidFill>
-                  <a:schemeClr val="lt1"/>
-                </a:solidFill>
-                <a:latin typeface="+mn-lt"/>
-                <a:ea typeface="+mn-ea"/>
-                <a:cs typeface="+mn-cs"/>
-              </a:defRPr>
-            </a:lvl1pPr>
-            <a:lvl2pPr marL="457200" indent="0">
-              <a:defRPr sz="1100">
-                <a:solidFill>
-                  <a:schemeClr val="lt1"/>
-                </a:solidFill>
-                <a:latin typeface="+mn-lt"/>
-                <a:ea typeface="+mn-ea"/>
-                <a:cs typeface="+mn-cs"/>
-              </a:defRPr>
-            </a:lvl2pPr>
-            <a:lvl3pPr marL="914400" indent="0">
-              <a:defRPr sz="1100">
-                <a:solidFill>
-                  <a:schemeClr val="lt1"/>
-                </a:solidFill>
-                <a:latin typeface="+mn-lt"/>
-                <a:ea typeface="+mn-ea"/>
-                <a:cs typeface="+mn-cs"/>
-              </a:defRPr>
-            </a:lvl3pPr>
-            <a:lvl4pPr marL="1371600" indent="0">
-              <a:defRPr sz="1100">
-                <a:solidFill>
-                  <a:schemeClr val="lt1"/>
-                </a:solidFill>
-                <a:latin typeface="+mn-lt"/>
-                <a:ea typeface="+mn-ea"/>
-                <a:cs typeface="+mn-cs"/>
-              </a:defRPr>
-            </a:lvl4pPr>
-            <a:lvl5pPr marL="1828800" indent="0">
-              <a:defRPr sz="1100">
-                <a:solidFill>
-                  <a:schemeClr val="lt1"/>
-                </a:solidFill>
-                <a:latin typeface="+mn-lt"/>
-                <a:ea typeface="+mn-ea"/>
-                <a:cs typeface="+mn-cs"/>
-              </a:defRPr>
-            </a:lvl5pPr>
-            <a:lvl6pPr marL="2286000" indent="0">
-              <a:defRPr sz="1100">
-                <a:solidFill>
-                  <a:schemeClr val="lt1"/>
-                </a:solidFill>
-                <a:latin typeface="+mn-lt"/>
-                <a:ea typeface="+mn-ea"/>
-                <a:cs typeface="+mn-cs"/>
-              </a:defRPr>
-            </a:lvl6pPr>
-            <a:lvl7pPr marL="2743200" indent="0">
-              <a:defRPr sz="1100">
-                <a:solidFill>
-                  <a:schemeClr val="lt1"/>
-                </a:solidFill>
-                <a:latin typeface="+mn-lt"/>
-                <a:ea typeface="+mn-ea"/>
-                <a:cs typeface="+mn-cs"/>
-              </a:defRPr>
-            </a:lvl7pPr>
-            <a:lvl8pPr marL="3200400" indent="0">
-              <a:defRPr sz="1100">
-                <a:solidFill>
-                  <a:schemeClr val="lt1"/>
-                </a:solidFill>
-                <a:latin typeface="+mn-lt"/>
-                <a:ea typeface="+mn-ea"/>
-                <a:cs typeface="+mn-cs"/>
-              </a:defRPr>
-            </a:lvl8pPr>
-            <a:lvl9pPr marL="3657600" indent="0">
-              <a:defRPr sz="1100">
-                <a:solidFill>
-                  <a:schemeClr val="lt1"/>
-                </a:solidFill>
-                <a:latin typeface="+mn-lt"/>
-                <a:ea typeface="+mn-ea"/>
-                <a:cs typeface="+mn-cs"/>
-              </a:defRPr>
-            </a:lvl9pPr>
-          </a:lstStyle>
-          <a:p>
-            <a:pPr defTabSz="914400">
-              <a:defRPr/>
-            </a:pPr>
-            <a:r>
-              <a:rPr kumimoji="1" lang="en-US" altLang="ja-JP" sz="600" kern="0" dirty="0">
-                <a:solidFill>
-                  <a:sysClr val="window" lastClr="FFFFFF"/>
-                </a:solidFill>
-                <a:latin typeface="Calibri"/>
-                <a:ea typeface="ＭＳ Ｐゴシック" panose="020B0600070205080204" pitchFamily="50" charset="-128"/>
-              </a:rPr>
-              <a:t>partner</a:t>
-            </a:r>
-            <a:endParaRPr kumimoji="1" lang="ja-JP" altLang="en-US" sz="500" b="0" i="0" u="none" strike="noStrike" kern="0" cap="none" spc="0" normalizeH="0" baseline="0" noProof="0" dirty="0">
-              <a:ln>
-                <a:noFill/>
-              </a:ln>
-              <a:solidFill>
-                <a:sysClr val="window" lastClr="FFFFFF"/>
-              </a:solidFill>
-              <a:effectLst/>
-              <a:uLnTx/>
-              <a:uFillTx/>
-              <a:latin typeface="Calibri"/>
-              <a:ea typeface="ＭＳ Ｐゴシック" panose="020B0600070205080204" pitchFamily="50" charset="-128"/>
-              <a:cs typeface="+mn-cs"/>
-            </a:endParaRPr>
-          </a:p>
-        </p:txBody>
-      </p:sp>
-      <p:sp>
-        <p:nvSpPr>
-          <p:cNvPr id="179" name="正方形/長方形 178">
-            <a:extLst>
-              <a:ext uri="{FF2B5EF4-FFF2-40B4-BE49-F238E27FC236}">
-                <a16:creationId xmlns:a16="http://schemas.microsoft.com/office/drawing/2014/main" id="{8AAF855B-5F88-6212-17A5-634363FF209F}"/>
-              </a:ext>
-            </a:extLst>
-          </p:cNvPr>
-          <p:cNvSpPr/>
-          <p:nvPr/>
-        </p:nvSpPr>
-        <p:spPr>
-          <a:xfrm>
-            <a:off x="2967889" y="7435396"/>
-            <a:ext cx="436816" cy="192003"/>
-          </a:xfrm>
-          <a:prstGeom prst="rect">
-            <a:avLst/>
-          </a:prstGeom>
-          <a:solidFill>
-            <a:srgbClr val="4BACC6"/>
-          </a:solidFill>
-          <a:ln w="25400" cap="flat" cmpd="sng" algn="ctr">
-            <a:solidFill>
-              <a:sysClr val="windowText" lastClr="000000"/>
-            </a:solidFill>
-            <a:prstDash val="solid"/>
-          </a:ln>
-          <a:effectLst/>
-        </p:spPr>
-        <p:txBody>
-          <a:bodyPr lIns="0" tIns="0" rIns="0" bIns="0" rtlCol="0" anchor="ctr" anchorCtr="1"/>
-          <a:lstStyle>
-            <a:lvl1pPr marL="0" indent="0">
-              <a:defRPr sz="1100">
-                <a:solidFill>
-                  <a:schemeClr val="lt1"/>
-                </a:solidFill>
-                <a:latin typeface="+mn-lt"/>
-                <a:ea typeface="+mn-ea"/>
-                <a:cs typeface="+mn-cs"/>
-              </a:defRPr>
-            </a:lvl1pPr>
-            <a:lvl2pPr marL="457200" indent="0">
-              <a:defRPr sz="1100">
-                <a:solidFill>
-                  <a:schemeClr val="lt1"/>
-                </a:solidFill>
-                <a:latin typeface="+mn-lt"/>
-                <a:ea typeface="+mn-ea"/>
-                <a:cs typeface="+mn-cs"/>
-              </a:defRPr>
-            </a:lvl2pPr>
-            <a:lvl3pPr marL="914400" indent="0">
-              <a:defRPr sz="1100">
-                <a:solidFill>
-                  <a:schemeClr val="lt1"/>
-                </a:solidFill>
-                <a:latin typeface="+mn-lt"/>
-                <a:ea typeface="+mn-ea"/>
-                <a:cs typeface="+mn-cs"/>
-              </a:defRPr>
-            </a:lvl3pPr>
-            <a:lvl4pPr marL="1371600" indent="0">
-              <a:defRPr sz="1100">
-                <a:solidFill>
-                  <a:schemeClr val="lt1"/>
-                </a:solidFill>
-                <a:latin typeface="+mn-lt"/>
-                <a:ea typeface="+mn-ea"/>
-                <a:cs typeface="+mn-cs"/>
-              </a:defRPr>
-            </a:lvl4pPr>
-            <a:lvl5pPr marL="1828800" indent="0">
-              <a:defRPr sz="1100">
-                <a:solidFill>
-                  <a:schemeClr val="lt1"/>
-                </a:solidFill>
-                <a:latin typeface="+mn-lt"/>
-                <a:ea typeface="+mn-ea"/>
-                <a:cs typeface="+mn-cs"/>
-              </a:defRPr>
-            </a:lvl5pPr>
-            <a:lvl6pPr marL="2286000" indent="0">
-              <a:defRPr sz="1100">
-                <a:solidFill>
-                  <a:schemeClr val="lt1"/>
-                </a:solidFill>
-                <a:latin typeface="+mn-lt"/>
-                <a:ea typeface="+mn-ea"/>
-                <a:cs typeface="+mn-cs"/>
-              </a:defRPr>
-            </a:lvl6pPr>
-            <a:lvl7pPr marL="2743200" indent="0">
-              <a:defRPr sz="1100">
-                <a:solidFill>
-                  <a:schemeClr val="lt1"/>
-                </a:solidFill>
-                <a:latin typeface="+mn-lt"/>
-                <a:ea typeface="+mn-ea"/>
-                <a:cs typeface="+mn-cs"/>
-              </a:defRPr>
-            </a:lvl7pPr>
-            <a:lvl8pPr marL="3200400" indent="0">
-              <a:defRPr sz="1100">
-                <a:solidFill>
-                  <a:schemeClr val="lt1"/>
-                </a:solidFill>
-                <a:latin typeface="+mn-lt"/>
-                <a:ea typeface="+mn-ea"/>
-                <a:cs typeface="+mn-cs"/>
-              </a:defRPr>
-            </a:lvl8pPr>
-            <a:lvl9pPr marL="3657600" indent="0">
-              <a:defRPr sz="1100">
-                <a:solidFill>
-                  <a:schemeClr val="lt1"/>
-                </a:solidFill>
-                <a:latin typeface="+mn-lt"/>
-                <a:ea typeface="+mn-ea"/>
-                <a:cs typeface="+mn-cs"/>
-              </a:defRPr>
-            </a:lvl9pPr>
-          </a:lstStyle>
-          <a:p>
-            <a:pPr defTabSz="914400">
-              <a:defRPr/>
-            </a:pPr>
-            <a:r>
-              <a:rPr kumimoji="1" lang="en-US" altLang="ja-JP" sz="600" kern="0" dirty="0">
-                <a:solidFill>
-                  <a:sysClr val="window" lastClr="FFFFFF"/>
-                </a:solidFill>
-                <a:latin typeface="Calibri"/>
-                <a:ea typeface="ＭＳ Ｐゴシック" panose="020B0600070205080204" pitchFamily="50" charset="-128"/>
-              </a:rPr>
-              <a:t>partner</a:t>
-            </a:r>
-            <a:endParaRPr kumimoji="1" lang="ja-JP" altLang="en-US" sz="500" b="0" i="0" u="none" strike="noStrike" kern="0" cap="none" spc="0" normalizeH="0" baseline="0" noProof="0" dirty="0">
-              <a:ln>
-                <a:noFill/>
-              </a:ln>
-              <a:solidFill>
-                <a:sysClr val="window" lastClr="FFFFFF"/>
-              </a:solidFill>
-              <a:effectLst/>
-              <a:uLnTx/>
-              <a:uFillTx/>
-              <a:latin typeface="Calibri"/>
-              <a:ea typeface="ＭＳ Ｐゴシック" panose="020B0600070205080204" pitchFamily="50" charset="-128"/>
-              <a:cs typeface="+mn-cs"/>
-            </a:endParaRPr>
-          </a:p>
-        </p:txBody>
-      </p:sp>
-      <p:sp>
-        <p:nvSpPr>
-          <p:cNvPr id="181" name="正方形/長方形 180">
-            <a:extLst>
-              <a:ext uri="{FF2B5EF4-FFF2-40B4-BE49-F238E27FC236}">
-                <a16:creationId xmlns:a16="http://schemas.microsoft.com/office/drawing/2014/main" id="{DCFFE979-6827-DEBF-E7A3-737DB0B82105}"/>
-              </a:ext>
-            </a:extLst>
-          </p:cNvPr>
-          <p:cNvSpPr/>
-          <p:nvPr/>
-        </p:nvSpPr>
-        <p:spPr>
-          <a:xfrm>
-            <a:off x="3425190" y="7435552"/>
-            <a:ext cx="436816" cy="192003"/>
-          </a:xfrm>
-          <a:prstGeom prst="rect">
-            <a:avLst/>
-          </a:prstGeom>
-          <a:solidFill>
-            <a:srgbClr val="4BACC6"/>
-          </a:solidFill>
-          <a:ln w="25400" cap="flat" cmpd="sng" algn="ctr">
-            <a:solidFill>
-              <a:sysClr val="windowText" lastClr="000000"/>
-            </a:solidFill>
-            <a:prstDash val="solid"/>
-          </a:ln>
-          <a:effectLst/>
-        </p:spPr>
-        <p:txBody>
-          <a:bodyPr lIns="0" tIns="0" rIns="0" bIns="0" rtlCol="0" anchor="ctr" anchorCtr="1"/>
-          <a:lstStyle>
-            <a:lvl1pPr marL="0" indent="0">
-              <a:defRPr sz="1100">
-                <a:solidFill>
-                  <a:schemeClr val="lt1"/>
-                </a:solidFill>
-                <a:latin typeface="+mn-lt"/>
-                <a:ea typeface="+mn-ea"/>
-                <a:cs typeface="+mn-cs"/>
-              </a:defRPr>
-            </a:lvl1pPr>
-            <a:lvl2pPr marL="457200" indent="0">
-              <a:defRPr sz="1100">
-                <a:solidFill>
-                  <a:schemeClr val="lt1"/>
-                </a:solidFill>
-                <a:latin typeface="+mn-lt"/>
-                <a:ea typeface="+mn-ea"/>
-                <a:cs typeface="+mn-cs"/>
-              </a:defRPr>
-            </a:lvl2pPr>
-            <a:lvl3pPr marL="914400" indent="0">
-              <a:defRPr sz="1100">
-                <a:solidFill>
-                  <a:schemeClr val="lt1"/>
-                </a:solidFill>
-                <a:latin typeface="+mn-lt"/>
-                <a:ea typeface="+mn-ea"/>
-                <a:cs typeface="+mn-cs"/>
-              </a:defRPr>
-            </a:lvl3pPr>
-            <a:lvl4pPr marL="1371600" indent="0">
-              <a:defRPr sz="1100">
-                <a:solidFill>
-                  <a:schemeClr val="lt1"/>
-                </a:solidFill>
-                <a:latin typeface="+mn-lt"/>
-                <a:ea typeface="+mn-ea"/>
-                <a:cs typeface="+mn-cs"/>
-              </a:defRPr>
-            </a:lvl4pPr>
-            <a:lvl5pPr marL="1828800" indent="0">
-              <a:defRPr sz="1100">
-                <a:solidFill>
-                  <a:schemeClr val="lt1"/>
-                </a:solidFill>
-                <a:latin typeface="+mn-lt"/>
-                <a:ea typeface="+mn-ea"/>
-                <a:cs typeface="+mn-cs"/>
-              </a:defRPr>
-            </a:lvl5pPr>
-            <a:lvl6pPr marL="2286000" indent="0">
-              <a:defRPr sz="1100">
-                <a:solidFill>
-                  <a:schemeClr val="lt1"/>
-                </a:solidFill>
-                <a:latin typeface="+mn-lt"/>
-                <a:ea typeface="+mn-ea"/>
-                <a:cs typeface="+mn-cs"/>
-              </a:defRPr>
-            </a:lvl6pPr>
-            <a:lvl7pPr marL="2743200" indent="0">
-              <a:defRPr sz="1100">
-                <a:solidFill>
-                  <a:schemeClr val="lt1"/>
-                </a:solidFill>
-                <a:latin typeface="+mn-lt"/>
-                <a:ea typeface="+mn-ea"/>
-                <a:cs typeface="+mn-cs"/>
-              </a:defRPr>
-            </a:lvl7pPr>
-            <a:lvl8pPr marL="3200400" indent="0">
-              <a:defRPr sz="1100">
-                <a:solidFill>
-                  <a:schemeClr val="lt1"/>
-                </a:solidFill>
-                <a:latin typeface="+mn-lt"/>
-                <a:ea typeface="+mn-ea"/>
-                <a:cs typeface="+mn-cs"/>
-              </a:defRPr>
-            </a:lvl8pPr>
-            <a:lvl9pPr marL="3657600" indent="0">
-              <a:defRPr sz="1100">
-                <a:solidFill>
-                  <a:schemeClr val="lt1"/>
-                </a:solidFill>
-                <a:latin typeface="+mn-lt"/>
-                <a:ea typeface="+mn-ea"/>
-                <a:cs typeface="+mn-cs"/>
-              </a:defRPr>
-            </a:lvl9pPr>
-          </a:lstStyle>
-          <a:p>
-            <a:pPr defTabSz="914400">
-              <a:defRPr/>
-            </a:pPr>
-            <a:r>
-              <a:rPr kumimoji="1" lang="en-US" altLang="ja-JP" sz="600" kern="0" dirty="0">
-                <a:solidFill>
-                  <a:sysClr val="window" lastClr="FFFFFF"/>
-                </a:solidFill>
-                <a:latin typeface="Calibri"/>
-                <a:ea typeface="ＭＳ Ｐゴシック" panose="020B0600070205080204" pitchFamily="50" charset="-128"/>
-              </a:rPr>
-              <a:t>member</a:t>
-            </a:r>
-            <a:endParaRPr kumimoji="1" lang="ja-JP" altLang="en-US" sz="500" b="0" i="0" u="none" strike="noStrike" kern="0" cap="none" spc="0" normalizeH="0" baseline="0" noProof="0" dirty="0">
-              <a:ln>
-                <a:noFill/>
-              </a:ln>
-              <a:solidFill>
-                <a:sysClr val="window" lastClr="FFFFFF"/>
-              </a:solidFill>
-              <a:effectLst/>
-              <a:uLnTx/>
-              <a:uFillTx/>
-              <a:latin typeface="Calibri"/>
-              <a:ea typeface="ＭＳ Ｐゴシック" panose="020B0600070205080204" pitchFamily="50" charset="-128"/>
-              <a:cs typeface="+mn-cs"/>
-            </a:endParaRPr>
-          </a:p>
-        </p:txBody>
-      </p:sp>
-      <p:sp>
-        <p:nvSpPr>
-          <p:cNvPr id="183" name="テキスト ボックス 182">
-            <a:extLst>
-              <a:ext uri="{FF2B5EF4-FFF2-40B4-BE49-F238E27FC236}">
-                <a16:creationId xmlns:a16="http://schemas.microsoft.com/office/drawing/2014/main" id="{8A182E09-946F-FACF-3B94-843AD1F13EF2}"/>
-              </a:ext>
-            </a:extLst>
-          </p:cNvPr>
-          <p:cNvSpPr txBox="1"/>
-          <p:nvPr/>
-        </p:nvSpPr>
-        <p:spPr>
-          <a:xfrm>
-            <a:off x="3395000" y="7687920"/>
-            <a:ext cx="260000" cy="80791"/>
-          </a:xfrm>
-          <a:prstGeom prst="rect">
-            <a:avLst/>
-          </a:prstGeom>
-          <a:noFill/>
-        </p:spPr>
-        <p:txBody>
-          <a:bodyPr wrap="square" lIns="0" tIns="0" rIns="0" bIns="0">
-            <a:spAutoFit/>
-          </a:bodyPr>
-          <a:lstStyle/>
-          <a:p>
-            <a:pPr algn="l" fontAlgn="ctr">
-              <a:lnSpc>
-                <a:spcPts val="600"/>
-              </a:lnSpc>
-              <a:buNone/>
-            </a:pPr>
-            <a:r>
-              <a:rPr lang="en-GB" altLang="ja-JP" sz="600" u="none" strike="noStrike" dirty="0">
-                <a:effectLst/>
-                <a:latin typeface="Meiryo UI" panose="020B0604030504040204" pitchFamily="50" charset="-128"/>
-                <a:ea typeface="Meiryo UI" panose="020B0604030504040204" pitchFamily="50" charset="-128"/>
-              </a:rPr>
-              <a:t>Japan</a:t>
-            </a:r>
-          </a:p>
-        </p:txBody>
-      </p:sp>
-      <p:sp>
-        <p:nvSpPr>
-          <p:cNvPr id="185" name="テキスト ボックス 184">
-            <a:extLst>
-              <a:ext uri="{FF2B5EF4-FFF2-40B4-BE49-F238E27FC236}">
-                <a16:creationId xmlns:a16="http://schemas.microsoft.com/office/drawing/2014/main" id="{271F7DAF-9800-5157-FBEC-27096AE33756}"/>
-              </a:ext>
-            </a:extLst>
-          </p:cNvPr>
-          <p:cNvSpPr txBox="1"/>
-          <p:nvPr/>
-        </p:nvSpPr>
-        <p:spPr>
-          <a:xfrm>
-            <a:off x="3655000" y="7687920"/>
-            <a:ext cx="260000" cy="80791"/>
-          </a:xfrm>
-          <a:prstGeom prst="rect">
-            <a:avLst/>
-          </a:prstGeom>
-          <a:noFill/>
-        </p:spPr>
-        <p:txBody>
-          <a:bodyPr wrap="square" lIns="0" tIns="0" rIns="0" bIns="0">
-            <a:spAutoFit/>
-          </a:bodyPr>
-          <a:lstStyle/>
-          <a:p>
-            <a:pPr algn="l" fontAlgn="ctr">
-              <a:lnSpc>
-                <a:spcPts val="600"/>
-              </a:lnSpc>
-              <a:buNone/>
-            </a:pPr>
-            <a:r>
-              <a:rPr lang="en-GB" altLang="ja-JP" sz="600" u="none" strike="noStrike" dirty="0">
-                <a:effectLst/>
-                <a:latin typeface="Meiryo UI" panose="020B0604030504040204" pitchFamily="50" charset="-128"/>
-                <a:ea typeface="Meiryo UI" panose="020B0604030504040204" pitchFamily="50" charset="-128"/>
-              </a:rPr>
-              <a:t>Japan</a:t>
-            </a:r>
-          </a:p>
-        </p:txBody>
-      </p:sp>
-      <p:sp>
-        <p:nvSpPr>
-          <p:cNvPr id="187" name="正方形/長方形 186">
-            <a:extLst>
-              <a:ext uri="{FF2B5EF4-FFF2-40B4-BE49-F238E27FC236}">
-                <a16:creationId xmlns:a16="http://schemas.microsoft.com/office/drawing/2014/main" id="{691FF50D-B26B-3AE6-972B-AB9315D96FA0}"/>
-              </a:ext>
-            </a:extLst>
-          </p:cNvPr>
-          <p:cNvSpPr/>
-          <p:nvPr/>
-        </p:nvSpPr>
-        <p:spPr>
-          <a:xfrm>
-            <a:off x="2055002" y="8007874"/>
-            <a:ext cx="436816" cy="192003"/>
-          </a:xfrm>
-          <a:prstGeom prst="rect">
-            <a:avLst/>
-          </a:prstGeom>
-          <a:solidFill>
-            <a:srgbClr val="4BACC6"/>
-          </a:solidFill>
-          <a:ln w="25400" cap="flat" cmpd="sng" algn="ctr">
-            <a:solidFill>
-              <a:sysClr val="windowText" lastClr="000000"/>
-            </a:solidFill>
-            <a:prstDash val="solid"/>
-          </a:ln>
-          <a:effectLst/>
-        </p:spPr>
-        <p:txBody>
-          <a:bodyPr lIns="0" tIns="0" rIns="0" bIns="0" rtlCol="0" anchor="ctr" anchorCtr="1"/>
-          <a:lstStyle>
-            <a:lvl1pPr marL="0" indent="0">
-              <a:defRPr sz="1100">
-                <a:solidFill>
-                  <a:schemeClr val="lt1"/>
-                </a:solidFill>
-                <a:latin typeface="+mn-lt"/>
-                <a:ea typeface="+mn-ea"/>
-                <a:cs typeface="+mn-cs"/>
-              </a:defRPr>
-            </a:lvl1pPr>
-            <a:lvl2pPr marL="457200" indent="0">
-              <a:defRPr sz="1100">
-                <a:solidFill>
-                  <a:schemeClr val="lt1"/>
-                </a:solidFill>
-                <a:latin typeface="+mn-lt"/>
-                <a:ea typeface="+mn-ea"/>
-                <a:cs typeface="+mn-cs"/>
-              </a:defRPr>
-            </a:lvl2pPr>
-            <a:lvl3pPr marL="914400" indent="0">
-              <a:defRPr sz="1100">
-                <a:solidFill>
-                  <a:schemeClr val="lt1"/>
-                </a:solidFill>
-                <a:latin typeface="+mn-lt"/>
-                <a:ea typeface="+mn-ea"/>
-                <a:cs typeface="+mn-cs"/>
-              </a:defRPr>
-            </a:lvl3pPr>
-            <a:lvl4pPr marL="1371600" indent="0">
-              <a:defRPr sz="1100">
-                <a:solidFill>
-                  <a:schemeClr val="lt1"/>
-                </a:solidFill>
-                <a:latin typeface="+mn-lt"/>
-                <a:ea typeface="+mn-ea"/>
-                <a:cs typeface="+mn-cs"/>
-              </a:defRPr>
-            </a:lvl4pPr>
-            <a:lvl5pPr marL="1828800" indent="0">
-              <a:defRPr sz="1100">
-                <a:solidFill>
-                  <a:schemeClr val="lt1"/>
-                </a:solidFill>
-                <a:latin typeface="+mn-lt"/>
-                <a:ea typeface="+mn-ea"/>
-                <a:cs typeface="+mn-cs"/>
-              </a:defRPr>
-            </a:lvl5pPr>
-            <a:lvl6pPr marL="2286000" indent="0">
-              <a:defRPr sz="1100">
-                <a:solidFill>
-                  <a:schemeClr val="lt1"/>
-                </a:solidFill>
-                <a:latin typeface="+mn-lt"/>
-                <a:ea typeface="+mn-ea"/>
-                <a:cs typeface="+mn-cs"/>
-              </a:defRPr>
-            </a:lvl6pPr>
-            <a:lvl7pPr marL="2743200" indent="0">
-              <a:defRPr sz="1100">
-                <a:solidFill>
-                  <a:schemeClr val="lt1"/>
-                </a:solidFill>
-                <a:latin typeface="+mn-lt"/>
-                <a:ea typeface="+mn-ea"/>
-                <a:cs typeface="+mn-cs"/>
-              </a:defRPr>
-            </a:lvl7pPr>
-            <a:lvl8pPr marL="3200400" indent="0">
-              <a:defRPr sz="1100">
-                <a:solidFill>
-                  <a:schemeClr val="lt1"/>
-                </a:solidFill>
-                <a:latin typeface="+mn-lt"/>
-                <a:ea typeface="+mn-ea"/>
-                <a:cs typeface="+mn-cs"/>
-              </a:defRPr>
-            </a:lvl8pPr>
-            <a:lvl9pPr marL="3657600" indent="0">
-              <a:defRPr sz="1100">
-                <a:solidFill>
-                  <a:schemeClr val="lt1"/>
-                </a:solidFill>
-                <a:latin typeface="+mn-lt"/>
-                <a:ea typeface="+mn-ea"/>
-                <a:cs typeface="+mn-cs"/>
-              </a:defRPr>
-            </a:lvl9pPr>
-          </a:lstStyle>
-          <a:p>
-            <a:pPr defTabSz="914400">
-              <a:defRPr/>
-            </a:pPr>
-            <a:r>
-              <a:rPr kumimoji="1" lang="en-US" altLang="ja-JP" sz="600" kern="0" dirty="0">
-                <a:solidFill>
-                  <a:sysClr val="window" lastClr="FFFFFF"/>
-                </a:solidFill>
-                <a:latin typeface="Calibri"/>
-                <a:ea typeface="ＭＳ Ｐゴシック" panose="020B0600070205080204" pitchFamily="50" charset="-128"/>
-              </a:rPr>
-              <a:t>resource</a:t>
-            </a:r>
-            <a:endParaRPr kumimoji="1" lang="ja-JP" altLang="en-US" sz="500" b="0" i="0" u="none" strike="noStrike" kern="0" cap="none" spc="0" normalizeH="0" baseline="0" noProof="0" dirty="0">
-              <a:ln>
-                <a:noFill/>
-              </a:ln>
-              <a:solidFill>
-                <a:sysClr val="window" lastClr="FFFFFF"/>
-              </a:solidFill>
-              <a:effectLst/>
-              <a:uLnTx/>
-              <a:uFillTx/>
-              <a:latin typeface="Calibri"/>
-              <a:ea typeface="ＭＳ Ｐゴシック" panose="020B0600070205080204" pitchFamily="50" charset="-128"/>
-              <a:cs typeface="+mn-cs"/>
-            </a:endParaRPr>
-          </a:p>
-        </p:txBody>
-      </p:sp>
-      <p:sp>
-        <p:nvSpPr>
-          <p:cNvPr id="189" name="正方形/長方形 188">
-            <a:extLst>
-              <a:ext uri="{FF2B5EF4-FFF2-40B4-BE49-F238E27FC236}">
-                <a16:creationId xmlns:a16="http://schemas.microsoft.com/office/drawing/2014/main" id="{850D3B30-7CC8-BF81-BC70-9E6AB6445636}"/>
-              </a:ext>
-            </a:extLst>
-          </p:cNvPr>
-          <p:cNvSpPr/>
-          <p:nvPr/>
-        </p:nvSpPr>
-        <p:spPr>
-          <a:xfrm>
-            <a:off x="2511926" y="8007874"/>
-            <a:ext cx="436816" cy="192003"/>
-          </a:xfrm>
-          <a:prstGeom prst="rect">
-            <a:avLst/>
-          </a:prstGeom>
-          <a:solidFill>
-            <a:srgbClr val="4BACC6"/>
-          </a:solidFill>
-          <a:ln w="25400" cap="flat" cmpd="sng" algn="ctr">
-            <a:solidFill>
-              <a:sysClr val="windowText" lastClr="000000"/>
-            </a:solidFill>
-            <a:prstDash val="solid"/>
-          </a:ln>
-          <a:effectLst/>
-        </p:spPr>
-        <p:txBody>
-          <a:bodyPr lIns="0" tIns="0" rIns="0" bIns="0" rtlCol="0" anchor="ctr" anchorCtr="1"/>
-          <a:lstStyle>
-            <a:lvl1pPr marL="0" indent="0">
-              <a:defRPr sz="1100">
-                <a:solidFill>
-                  <a:schemeClr val="lt1"/>
-                </a:solidFill>
-                <a:latin typeface="+mn-lt"/>
-                <a:ea typeface="+mn-ea"/>
-                <a:cs typeface="+mn-cs"/>
-              </a:defRPr>
-            </a:lvl1pPr>
-            <a:lvl2pPr marL="457200" indent="0">
-              <a:defRPr sz="1100">
-                <a:solidFill>
-                  <a:schemeClr val="lt1"/>
-                </a:solidFill>
-                <a:latin typeface="+mn-lt"/>
-                <a:ea typeface="+mn-ea"/>
-                <a:cs typeface="+mn-cs"/>
-              </a:defRPr>
-            </a:lvl2pPr>
-            <a:lvl3pPr marL="914400" indent="0">
-              <a:defRPr sz="1100">
-                <a:solidFill>
-                  <a:schemeClr val="lt1"/>
-                </a:solidFill>
-                <a:latin typeface="+mn-lt"/>
-                <a:ea typeface="+mn-ea"/>
-                <a:cs typeface="+mn-cs"/>
-              </a:defRPr>
-            </a:lvl3pPr>
-            <a:lvl4pPr marL="1371600" indent="0">
-              <a:defRPr sz="1100">
-                <a:solidFill>
-                  <a:schemeClr val="lt1"/>
-                </a:solidFill>
-                <a:latin typeface="+mn-lt"/>
-                <a:ea typeface="+mn-ea"/>
-                <a:cs typeface="+mn-cs"/>
-              </a:defRPr>
-            </a:lvl4pPr>
-            <a:lvl5pPr marL="1828800" indent="0">
-              <a:defRPr sz="1100">
-                <a:solidFill>
-                  <a:schemeClr val="lt1"/>
-                </a:solidFill>
-                <a:latin typeface="+mn-lt"/>
-                <a:ea typeface="+mn-ea"/>
-                <a:cs typeface="+mn-cs"/>
-              </a:defRPr>
-            </a:lvl5pPr>
-            <a:lvl6pPr marL="2286000" indent="0">
-              <a:defRPr sz="1100">
-                <a:solidFill>
-                  <a:schemeClr val="lt1"/>
-                </a:solidFill>
-                <a:latin typeface="+mn-lt"/>
-                <a:ea typeface="+mn-ea"/>
-                <a:cs typeface="+mn-cs"/>
-              </a:defRPr>
-            </a:lvl6pPr>
-            <a:lvl7pPr marL="2743200" indent="0">
-              <a:defRPr sz="1100">
-                <a:solidFill>
-                  <a:schemeClr val="lt1"/>
-                </a:solidFill>
-                <a:latin typeface="+mn-lt"/>
-                <a:ea typeface="+mn-ea"/>
-                <a:cs typeface="+mn-cs"/>
-              </a:defRPr>
-            </a:lvl7pPr>
-            <a:lvl8pPr marL="3200400" indent="0">
-              <a:defRPr sz="1100">
-                <a:solidFill>
-                  <a:schemeClr val="lt1"/>
-                </a:solidFill>
-                <a:latin typeface="+mn-lt"/>
-                <a:ea typeface="+mn-ea"/>
-                <a:cs typeface="+mn-cs"/>
-              </a:defRPr>
-            </a:lvl8pPr>
-            <a:lvl9pPr marL="3657600" indent="0">
-              <a:defRPr sz="1100">
-                <a:solidFill>
-                  <a:schemeClr val="lt1"/>
-                </a:solidFill>
-                <a:latin typeface="+mn-lt"/>
-                <a:ea typeface="+mn-ea"/>
-                <a:cs typeface="+mn-cs"/>
-              </a:defRPr>
-            </a:lvl9pPr>
-          </a:lstStyle>
-          <a:p>
-            <a:pPr defTabSz="914400">
-              <a:defRPr/>
-            </a:pPr>
-            <a:r>
-              <a:rPr kumimoji="1" lang="en-US" altLang="ja-JP" sz="600" kern="0" dirty="0">
-                <a:solidFill>
-                  <a:sysClr val="window" lastClr="FFFFFF"/>
-                </a:solidFill>
-                <a:latin typeface="Calibri"/>
-                <a:ea typeface="ＭＳ Ｐゴシック" panose="020B0600070205080204" pitchFamily="50" charset="-128"/>
-              </a:rPr>
-              <a:t>resource</a:t>
-            </a:r>
-            <a:endParaRPr kumimoji="1" lang="ja-JP" altLang="en-US" sz="500" b="0" i="0" u="none" strike="noStrike" kern="0" cap="none" spc="0" normalizeH="0" baseline="0" noProof="0" dirty="0">
-              <a:ln>
-                <a:noFill/>
-              </a:ln>
-              <a:solidFill>
-                <a:sysClr val="window" lastClr="FFFFFF"/>
-              </a:solidFill>
-              <a:effectLst/>
-              <a:uLnTx/>
-              <a:uFillTx/>
-              <a:latin typeface="Calibri"/>
-              <a:ea typeface="ＭＳ Ｐゴシック" panose="020B0600070205080204" pitchFamily="50" charset="-128"/>
-              <a:cs typeface="+mn-cs"/>
-            </a:endParaRPr>
-          </a:p>
-        </p:txBody>
-      </p:sp>
-      <p:sp>
-        <p:nvSpPr>
-          <p:cNvPr id="191" name="正方形/長方形 190">
-            <a:extLst>
-              <a:ext uri="{FF2B5EF4-FFF2-40B4-BE49-F238E27FC236}">
-                <a16:creationId xmlns:a16="http://schemas.microsoft.com/office/drawing/2014/main" id="{2B7BC6FF-3A7E-2B26-F43F-C74B22D9AF96}"/>
-              </a:ext>
-            </a:extLst>
-          </p:cNvPr>
-          <p:cNvSpPr/>
-          <p:nvPr/>
-        </p:nvSpPr>
-        <p:spPr>
-          <a:xfrm>
-            <a:off x="2968850" y="8007874"/>
-            <a:ext cx="436816" cy="192003"/>
-          </a:xfrm>
-          <a:prstGeom prst="rect">
-            <a:avLst/>
-          </a:prstGeom>
-          <a:solidFill>
-            <a:srgbClr val="4BACC6"/>
-          </a:solidFill>
-          <a:ln w="25400" cap="flat" cmpd="sng" algn="ctr">
-            <a:solidFill>
-              <a:sysClr val="windowText" lastClr="000000"/>
-            </a:solidFill>
-            <a:prstDash val="solid"/>
-          </a:ln>
-          <a:effectLst/>
-        </p:spPr>
-        <p:txBody>
-          <a:bodyPr lIns="0" tIns="0" rIns="0" bIns="0" rtlCol="0" anchor="ctr" anchorCtr="1"/>
-          <a:lstStyle>
-            <a:lvl1pPr marL="0" indent="0">
-              <a:defRPr sz="1100">
-                <a:solidFill>
-                  <a:schemeClr val="lt1"/>
-                </a:solidFill>
-                <a:latin typeface="+mn-lt"/>
-                <a:ea typeface="+mn-ea"/>
-                <a:cs typeface="+mn-cs"/>
-              </a:defRPr>
-            </a:lvl1pPr>
-            <a:lvl2pPr marL="457200" indent="0">
-              <a:defRPr sz="1100">
-                <a:solidFill>
-                  <a:schemeClr val="lt1"/>
-                </a:solidFill>
-                <a:latin typeface="+mn-lt"/>
-                <a:ea typeface="+mn-ea"/>
-                <a:cs typeface="+mn-cs"/>
-              </a:defRPr>
-            </a:lvl2pPr>
-            <a:lvl3pPr marL="914400" indent="0">
-              <a:defRPr sz="1100">
-                <a:solidFill>
-                  <a:schemeClr val="lt1"/>
-                </a:solidFill>
-                <a:latin typeface="+mn-lt"/>
-                <a:ea typeface="+mn-ea"/>
-                <a:cs typeface="+mn-cs"/>
-              </a:defRPr>
-            </a:lvl3pPr>
-            <a:lvl4pPr marL="1371600" indent="0">
-              <a:defRPr sz="1100">
-                <a:solidFill>
-                  <a:schemeClr val="lt1"/>
-                </a:solidFill>
-                <a:latin typeface="+mn-lt"/>
-                <a:ea typeface="+mn-ea"/>
-                <a:cs typeface="+mn-cs"/>
-              </a:defRPr>
-            </a:lvl4pPr>
-            <a:lvl5pPr marL="1828800" indent="0">
-              <a:defRPr sz="1100">
-                <a:solidFill>
-                  <a:schemeClr val="lt1"/>
-                </a:solidFill>
-                <a:latin typeface="+mn-lt"/>
-                <a:ea typeface="+mn-ea"/>
-                <a:cs typeface="+mn-cs"/>
-              </a:defRPr>
-            </a:lvl5pPr>
-            <a:lvl6pPr marL="2286000" indent="0">
-              <a:defRPr sz="1100">
-                <a:solidFill>
-                  <a:schemeClr val="lt1"/>
-                </a:solidFill>
-                <a:latin typeface="+mn-lt"/>
-                <a:ea typeface="+mn-ea"/>
-                <a:cs typeface="+mn-cs"/>
-              </a:defRPr>
-            </a:lvl6pPr>
-            <a:lvl7pPr marL="2743200" indent="0">
-              <a:defRPr sz="1100">
-                <a:solidFill>
-                  <a:schemeClr val="lt1"/>
-                </a:solidFill>
-                <a:latin typeface="+mn-lt"/>
-                <a:ea typeface="+mn-ea"/>
-                <a:cs typeface="+mn-cs"/>
-              </a:defRPr>
-            </a:lvl7pPr>
-            <a:lvl8pPr marL="3200400" indent="0">
-              <a:defRPr sz="1100">
-                <a:solidFill>
-                  <a:schemeClr val="lt1"/>
-                </a:solidFill>
-                <a:latin typeface="+mn-lt"/>
-                <a:ea typeface="+mn-ea"/>
-                <a:cs typeface="+mn-cs"/>
-              </a:defRPr>
-            </a:lvl8pPr>
-            <a:lvl9pPr marL="3657600" indent="0">
-              <a:defRPr sz="1100">
-                <a:solidFill>
-                  <a:schemeClr val="lt1"/>
-                </a:solidFill>
-                <a:latin typeface="+mn-lt"/>
-                <a:ea typeface="+mn-ea"/>
-                <a:cs typeface="+mn-cs"/>
-              </a:defRPr>
-            </a:lvl9pPr>
-          </a:lstStyle>
-          <a:p>
-            <a:pPr defTabSz="914400">
-              <a:defRPr/>
-            </a:pPr>
-            <a:r>
-              <a:rPr kumimoji="1" lang="en-US" altLang="ja-JP" sz="600" kern="0" dirty="0">
-                <a:solidFill>
-                  <a:sysClr val="window" lastClr="FFFFFF"/>
-                </a:solidFill>
-                <a:latin typeface="Calibri"/>
-                <a:ea typeface="ＭＳ Ｐゴシック" panose="020B0600070205080204" pitchFamily="50" charset="-128"/>
-              </a:rPr>
-              <a:t>resource</a:t>
-            </a:r>
-            <a:endParaRPr kumimoji="1" lang="ja-JP" altLang="en-US" sz="500" b="0" i="0" u="none" strike="noStrike" kern="0" cap="none" spc="0" normalizeH="0" baseline="0" noProof="0" dirty="0">
-              <a:ln>
-                <a:noFill/>
-              </a:ln>
-              <a:solidFill>
-                <a:sysClr val="window" lastClr="FFFFFF"/>
-              </a:solidFill>
-              <a:effectLst/>
-              <a:uLnTx/>
-              <a:uFillTx/>
-              <a:latin typeface="Calibri"/>
-              <a:ea typeface="ＭＳ Ｐゴシック" panose="020B0600070205080204" pitchFamily="50" charset="-128"/>
-              <a:cs typeface="+mn-cs"/>
-            </a:endParaRPr>
-          </a:p>
-        </p:txBody>
-      </p:sp>
-      <p:sp>
-        <p:nvSpPr>
-          <p:cNvPr id="193" name="正方形/長方形 192">
-            <a:extLst>
-              <a:ext uri="{FF2B5EF4-FFF2-40B4-BE49-F238E27FC236}">
-                <a16:creationId xmlns:a16="http://schemas.microsoft.com/office/drawing/2014/main" id="{5CC4A228-6FFA-04E1-127D-7EAC917168BB}"/>
-              </a:ext>
-            </a:extLst>
-          </p:cNvPr>
-          <p:cNvSpPr/>
-          <p:nvPr/>
-        </p:nvSpPr>
-        <p:spPr>
-          <a:xfrm>
-            <a:off x="3426151" y="8008030"/>
-            <a:ext cx="436816" cy="192003"/>
-          </a:xfrm>
-          <a:prstGeom prst="rect">
-            <a:avLst/>
-          </a:prstGeom>
-          <a:solidFill>
-            <a:srgbClr val="4BACC6"/>
-          </a:solidFill>
-          <a:ln w="25400" cap="flat" cmpd="sng" algn="ctr">
-            <a:solidFill>
-              <a:sysClr val="windowText" lastClr="000000"/>
-            </a:solidFill>
-            <a:prstDash val="solid"/>
-          </a:ln>
-          <a:effectLst/>
-        </p:spPr>
-        <p:txBody>
-          <a:bodyPr lIns="0" tIns="0" rIns="0" bIns="0" rtlCol="0" anchor="ctr" anchorCtr="1"/>
-          <a:lstStyle>
-            <a:lvl1pPr marL="0" indent="0">
-              <a:defRPr sz="1100">
-                <a:solidFill>
-                  <a:schemeClr val="lt1"/>
-                </a:solidFill>
-                <a:latin typeface="+mn-lt"/>
-                <a:ea typeface="+mn-ea"/>
-                <a:cs typeface="+mn-cs"/>
-              </a:defRPr>
-            </a:lvl1pPr>
-            <a:lvl2pPr marL="457200" indent="0">
-              <a:defRPr sz="1100">
-                <a:solidFill>
-                  <a:schemeClr val="lt1"/>
-                </a:solidFill>
-                <a:latin typeface="+mn-lt"/>
-                <a:ea typeface="+mn-ea"/>
-                <a:cs typeface="+mn-cs"/>
-              </a:defRPr>
-            </a:lvl2pPr>
-            <a:lvl3pPr marL="914400" indent="0">
-              <a:defRPr sz="1100">
-                <a:solidFill>
-                  <a:schemeClr val="lt1"/>
-                </a:solidFill>
-                <a:latin typeface="+mn-lt"/>
-                <a:ea typeface="+mn-ea"/>
-                <a:cs typeface="+mn-cs"/>
-              </a:defRPr>
-            </a:lvl3pPr>
-            <a:lvl4pPr marL="1371600" indent="0">
-              <a:defRPr sz="1100">
-                <a:solidFill>
-                  <a:schemeClr val="lt1"/>
-                </a:solidFill>
-                <a:latin typeface="+mn-lt"/>
-                <a:ea typeface="+mn-ea"/>
-                <a:cs typeface="+mn-cs"/>
-              </a:defRPr>
-            </a:lvl4pPr>
-            <a:lvl5pPr marL="1828800" indent="0">
-              <a:defRPr sz="1100">
-                <a:solidFill>
-                  <a:schemeClr val="lt1"/>
-                </a:solidFill>
-                <a:latin typeface="+mn-lt"/>
-                <a:ea typeface="+mn-ea"/>
-                <a:cs typeface="+mn-cs"/>
-              </a:defRPr>
-            </a:lvl5pPr>
-            <a:lvl6pPr marL="2286000" indent="0">
-              <a:defRPr sz="1100">
-                <a:solidFill>
-                  <a:schemeClr val="lt1"/>
-                </a:solidFill>
-                <a:latin typeface="+mn-lt"/>
-                <a:ea typeface="+mn-ea"/>
-                <a:cs typeface="+mn-cs"/>
-              </a:defRPr>
-            </a:lvl6pPr>
-            <a:lvl7pPr marL="2743200" indent="0">
-              <a:defRPr sz="1100">
-                <a:solidFill>
-                  <a:schemeClr val="lt1"/>
-                </a:solidFill>
-                <a:latin typeface="+mn-lt"/>
-                <a:ea typeface="+mn-ea"/>
-                <a:cs typeface="+mn-cs"/>
-              </a:defRPr>
-            </a:lvl7pPr>
-            <a:lvl8pPr marL="3200400" indent="0">
-              <a:defRPr sz="1100">
-                <a:solidFill>
-                  <a:schemeClr val="lt1"/>
-                </a:solidFill>
-                <a:latin typeface="+mn-lt"/>
-                <a:ea typeface="+mn-ea"/>
-                <a:cs typeface="+mn-cs"/>
-              </a:defRPr>
-            </a:lvl8pPr>
-            <a:lvl9pPr marL="3657600" indent="0">
-              <a:defRPr sz="1100">
-                <a:solidFill>
-                  <a:schemeClr val="lt1"/>
-                </a:solidFill>
-                <a:latin typeface="+mn-lt"/>
-                <a:ea typeface="+mn-ea"/>
-                <a:cs typeface="+mn-cs"/>
-              </a:defRPr>
-            </a:lvl9pPr>
-          </a:lstStyle>
-          <a:p>
-            <a:pPr defTabSz="914400">
-              <a:defRPr/>
-            </a:pPr>
-            <a:r>
-              <a:rPr kumimoji="1" lang="en-US" altLang="ja-JP" sz="600" kern="0" dirty="0">
-                <a:solidFill>
-                  <a:sysClr val="window" lastClr="FFFFFF"/>
-                </a:solidFill>
-                <a:latin typeface="Calibri"/>
-                <a:ea typeface="ＭＳ Ｐゴシック" panose="020B0600070205080204" pitchFamily="50" charset="-128"/>
-              </a:rPr>
-              <a:t>resource</a:t>
-            </a:r>
-            <a:endParaRPr kumimoji="1" lang="ja-JP" altLang="en-US" sz="500" b="0" i="0" u="none" strike="noStrike" kern="0" cap="none" spc="0" normalizeH="0" baseline="0" noProof="0" dirty="0">
-              <a:ln>
-                <a:noFill/>
-              </a:ln>
-              <a:solidFill>
-                <a:sysClr val="window" lastClr="FFFFFF"/>
-              </a:solidFill>
-              <a:effectLst/>
-              <a:uLnTx/>
-              <a:uFillTx/>
-              <a:latin typeface="Calibri"/>
-              <a:ea typeface="ＭＳ Ｐゴシック" panose="020B0600070205080204" pitchFamily="50" charset="-128"/>
-              <a:cs typeface="+mn-cs"/>
-            </a:endParaRPr>
-          </a:p>
-        </p:txBody>
-      </p:sp>
-      <p:sp>
-        <p:nvSpPr>
           <p:cNvPr id="195" name="正方形/長方形 194">
             <a:extLst>
               <a:ext uri="{FF2B5EF4-FFF2-40B4-BE49-F238E27FC236}">
@@ -13178,7 +11413,7 @@
         </p:nvSpPr>
         <p:spPr>
           <a:xfrm>
-            <a:off x="3882190" y="7435552"/>
+            <a:off x="1843944" y="7435396"/>
             <a:ext cx="436816" cy="192003"/>
           </a:xfrm>
           <a:prstGeom prst="rect">
@@ -13322,14 +11557,4203 @@
       </p:sp>
       <p:sp>
         <p:nvSpPr>
-          <p:cNvPr id="197" name="TextBox 196"/>
+          <p:cNvPr id="197" name="テキスト ボックス 144">
+            <a:extLst>
+              <a:ext uri="{FF2B5EF4-FFF2-40B4-BE49-F238E27FC236}">
+                <a16:creationId xmlns:a16="http://schemas.microsoft.com/office/drawing/2014/main" id="{6451F370-7251-CA17-6373-FA7B8E90DF8F}"/>
+              </a:ext>
+            </a:extLst>
+          </p:cNvPr>
           <p:cNvSpPr txBox="1"/>
           <p:nvPr/>
         </p:nvSpPr>
         <p:spPr>
           <a:xfrm>
-            <a:off x="1500000" y="8330000"/>
-            <a:ext cx="4700000" cy="1300000"/>
+            <a:off x="1828944" y="7650396"/>
+            <a:ext cx="380000" cy="80791"/>
+          </a:xfrm>
+          <a:prstGeom prst="rect">
+            <a:avLst/>
+          </a:prstGeom>
+          <a:noFill/>
+        </p:spPr>
+        <p:txBody>
+          <a:bodyPr wrap="none" lIns="0" tIns="0" rIns="0" bIns="0">
+            <a:spAutoFit/>
+          </a:bodyPr>
+          <a:lstStyle/>
+          <a:p>
+            <a:pPr algn="l" fontAlgn="ctr">
+              <a:lnSpc>
+                <a:spcPts val="600"/>
+              </a:lnSpc>
+              <a:buNone/>
+            </a:pPr>
+            <a:r>
+              <a:rPr lang="en-GB" altLang="ja-JP" sz="600" u="none" strike="noStrike" dirty="0">
+                <a:effectLst/>
+                <a:latin typeface="Meiryo UI" panose="020B0604030504040204" pitchFamily="50" charset="-128"/>
+                <a:ea typeface="Meiryo UI" panose="020B0604030504040204" pitchFamily="50" charset="-128"/>
+              </a:rPr>
+              <a:t>PNG</a:t>
+            </a:r>
+          </a:p>
+        </p:txBody>
+      </p:sp>
+      <p:sp>
+        <p:nvSpPr>
+          <p:cNvPr id="198" name="テキスト ボックス 144">
+            <a:extLst>
+              <a:ext uri="{FF2B5EF4-FFF2-40B4-BE49-F238E27FC236}">
+                <a16:creationId xmlns:a16="http://schemas.microsoft.com/office/drawing/2014/main" id="{6451F370-7251-CA17-6373-FA7B8E90DF8F}"/>
+              </a:ext>
+            </a:extLst>
+          </p:cNvPr>
+          <p:cNvSpPr txBox="1"/>
+          <p:nvPr/>
+        </p:nvSpPr>
+        <p:spPr>
+          <a:xfrm>
+            <a:off x="2047352" y="7730396"/>
+            <a:ext cx="380000" cy="80791"/>
+          </a:xfrm>
+          <a:prstGeom prst="rect">
+            <a:avLst/>
+          </a:prstGeom>
+          <a:noFill/>
+        </p:spPr>
+        <p:txBody>
+          <a:bodyPr wrap="none" lIns="0" tIns="0" rIns="0" bIns="0">
+            <a:spAutoFit/>
+          </a:bodyPr>
+          <a:lstStyle/>
+          <a:p>
+            <a:pPr algn="l" fontAlgn="ctr">
+              <a:lnSpc>
+                <a:spcPts val="600"/>
+              </a:lnSpc>
+              <a:buNone/>
+            </a:pPr>
+            <a:r>
+              <a:rPr lang="en-GB" altLang="ja-JP" sz="600" u="none" strike="noStrike" dirty="0">
+                <a:effectLst/>
+                <a:latin typeface="Meiryo UI" panose="020B0604030504040204" pitchFamily="50" charset="-128"/>
+                <a:ea typeface="Meiryo UI" panose="020B0604030504040204" pitchFamily="50" charset="-128"/>
+              </a:rPr>
+              <a:t>Pakistan</a:t>
+            </a:r>
+          </a:p>
+        </p:txBody>
+      </p:sp>
+      <p:sp>
+        <p:nvSpPr>
+          <p:cNvPr id="199" name="正方形/長方形 176">
+            <a:extLst>
+              <a:ext uri="{FF2B5EF4-FFF2-40B4-BE49-F238E27FC236}">
+                <a16:creationId xmlns:a16="http://schemas.microsoft.com/office/drawing/2014/main" id="{05B579E1-AA55-878D-A7FE-D0AF2F6EF8F3}"/>
+              </a:ext>
+            </a:extLst>
+          </p:cNvPr>
+          <p:cNvSpPr/>
+          <p:nvPr/>
+        </p:nvSpPr>
+        <p:spPr>
+          <a:xfrm>
+            <a:off x="2300760" y="7435396"/>
+            <a:ext cx="436816" cy="192003"/>
+          </a:xfrm>
+          <a:prstGeom prst="rect">
+            <a:avLst/>
+          </a:prstGeom>
+          <a:solidFill>
+            <a:srgbClr val="4BACC6"/>
+          </a:solidFill>
+          <a:ln w="25400" cap="flat" cmpd="sng" algn="ctr">
+            <a:solidFill>
+              <a:sysClr val="windowText" lastClr="000000"/>
+            </a:solidFill>
+            <a:prstDash val="solid"/>
+          </a:ln>
+          <a:effectLst/>
+        </p:spPr>
+        <p:txBody>
+          <a:bodyPr lIns="0" tIns="0" rIns="0" bIns="0" rtlCol="0" anchor="ctr" anchorCtr="1"/>
+          <a:lstStyle>
+            <a:lvl1pPr marL="0" indent="0">
+              <a:defRPr sz="1100">
+                <a:solidFill>
+                  <a:schemeClr val="lt1"/>
+                </a:solidFill>
+                <a:latin typeface="+mn-lt"/>
+                <a:ea typeface="+mn-ea"/>
+                <a:cs typeface="+mn-cs"/>
+              </a:defRPr>
+            </a:lvl1pPr>
+            <a:lvl2pPr marL="457200" indent="0">
+              <a:defRPr sz="1100">
+                <a:solidFill>
+                  <a:schemeClr val="lt1"/>
+                </a:solidFill>
+                <a:latin typeface="+mn-lt"/>
+                <a:ea typeface="+mn-ea"/>
+                <a:cs typeface="+mn-cs"/>
+              </a:defRPr>
+            </a:lvl2pPr>
+            <a:lvl3pPr marL="914400" indent="0">
+              <a:defRPr sz="1100">
+                <a:solidFill>
+                  <a:schemeClr val="lt1"/>
+                </a:solidFill>
+                <a:latin typeface="+mn-lt"/>
+                <a:ea typeface="+mn-ea"/>
+                <a:cs typeface="+mn-cs"/>
+              </a:defRPr>
+            </a:lvl3pPr>
+            <a:lvl4pPr marL="1371600" indent="0">
+              <a:defRPr sz="1100">
+                <a:solidFill>
+                  <a:schemeClr val="lt1"/>
+                </a:solidFill>
+                <a:latin typeface="+mn-lt"/>
+                <a:ea typeface="+mn-ea"/>
+                <a:cs typeface="+mn-cs"/>
+              </a:defRPr>
+            </a:lvl4pPr>
+            <a:lvl5pPr marL="1828800" indent="0">
+              <a:defRPr sz="1100">
+                <a:solidFill>
+                  <a:schemeClr val="lt1"/>
+                </a:solidFill>
+                <a:latin typeface="+mn-lt"/>
+                <a:ea typeface="+mn-ea"/>
+                <a:cs typeface="+mn-cs"/>
+              </a:defRPr>
+            </a:lvl5pPr>
+            <a:lvl6pPr marL="2286000" indent="0">
+              <a:defRPr sz="1100">
+                <a:solidFill>
+                  <a:schemeClr val="lt1"/>
+                </a:solidFill>
+                <a:latin typeface="+mn-lt"/>
+                <a:ea typeface="+mn-ea"/>
+                <a:cs typeface="+mn-cs"/>
+              </a:defRPr>
+            </a:lvl6pPr>
+            <a:lvl7pPr marL="2743200" indent="0">
+              <a:defRPr sz="1100">
+                <a:solidFill>
+                  <a:schemeClr val="lt1"/>
+                </a:solidFill>
+                <a:latin typeface="+mn-lt"/>
+                <a:ea typeface="+mn-ea"/>
+                <a:cs typeface="+mn-cs"/>
+              </a:defRPr>
+            </a:lvl7pPr>
+            <a:lvl8pPr marL="3200400" indent="0">
+              <a:defRPr sz="1100">
+                <a:solidFill>
+                  <a:schemeClr val="lt1"/>
+                </a:solidFill>
+                <a:latin typeface="+mn-lt"/>
+                <a:ea typeface="+mn-ea"/>
+                <a:cs typeface="+mn-cs"/>
+              </a:defRPr>
+            </a:lvl8pPr>
+            <a:lvl9pPr marL="3657600" indent="0">
+              <a:defRPr sz="1100">
+                <a:solidFill>
+                  <a:schemeClr val="lt1"/>
+                </a:solidFill>
+                <a:latin typeface="+mn-lt"/>
+                <a:ea typeface="+mn-ea"/>
+                <a:cs typeface="+mn-cs"/>
+              </a:defRPr>
+            </a:lvl9pPr>
+          </a:lstStyle>
+          <a:p>
+            <a:pPr defTabSz="914400">
+              <a:defRPr/>
+            </a:pPr>
+            <a:r>
+              <a:rPr kumimoji="1" lang="en-US" altLang="ja-JP" sz="600" kern="0" dirty="0">
+                <a:solidFill>
+                  <a:sysClr val="window" lastClr="FFFFFF"/>
+                </a:solidFill>
+                <a:latin typeface="Calibri"/>
+                <a:ea typeface="ＭＳ Ｐゴシック" panose="020B0600070205080204" pitchFamily="50" charset="-128"/>
+              </a:rPr>
+              <a:t>partner</a:t>
+            </a:r>
+            <a:endParaRPr kumimoji="1" lang="ja-JP" altLang="en-US" sz="500" b="0" i="0" u="none" strike="noStrike" kern="0" cap="none" spc="0" normalizeH="0" baseline="0" noProof="0" dirty="0">
+              <a:ln>
+                <a:noFill/>
+              </a:ln>
+              <a:solidFill>
+                <a:sysClr val="window" lastClr="FFFFFF"/>
+              </a:solidFill>
+              <a:effectLst/>
+              <a:uLnTx/>
+              <a:uFillTx/>
+              <a:latin typeface="Calibri"/>
+              <a:ea typeface="ＭＳ Ｐゴシック" panose="020B0600070205080204" pitchFamily="50" charset="-128"/>
+              <a:cs typeface="+mn-cs"/>
+            </a:endParaRPr>
+          </a:p>
+        </p:txBody>
+      </p:sp>
+      <p:sp>
+        <p:nvSpPr>
+          <p:cNvPr id="200" name="テキスト ボックス 166">
+            <a:extLst>
+              <a:ext uri="{FF2B5EF4-FFF2-40B4-BE49-F238E27FC236}">
+                <a16:creationId xmlns:a16="http://schemas.microsoft.com/office/drawing/2014/main" id="{EDBECD81-6FB8-2D33-08E5-262BE06B316D}"/>
+              </a:ext>
+            </a:extLst>
+          </p:cNvPr>
+          <p:cNvSpPr txBox="1"/>
+          <p:nvPr/>
+        </p:nvSpPr>
+        <p:spPr>
+          <a:xfrm>
+            <a:off x="2285760" y="7650396"/>
+            <a:ext cx="380000" cy="80791"/>
+          </a:xfrm>
+          <a:prstGeom prst="rect">
+            <a:avLst/>
+          </a:prstGeom>
+          <a:solidFill>
+            <a:schemeClr val="accent6">
+              <a:lumMod val="20000"/>
+              <a:lumOff val="80000"/>
+            </a:schemeClr>
+          </a:solidFill>
+        </p:spPr>
+        <p:txBody>
+          <a:bodyPr wrap="none" lIns="0" tIns="0" rIns="0" bIns="0">
+            <a:spAutoFit/>
+          </a:bodyPr>
+          <a:lstStyle/>
+          <a:p>
+            <a:pPr algn="ctr" fontAlgn="ctr">
+              <a:lnSpc>
+                <a:spcPts val="600"/>
+              </a:lnSpc>
+              <a:buNone/>
+            </a:pPr>
+            <a:r>
+              <a:rPr lang="en-GB" altLang="ja-JP" sz="600" u="none" strike="noStrike" dirty="0">
+                <a:effectLst/>
+                <a:latin typeface="Meiryo UI" panose="020B0604030504040204" pitchFamily="50" charset="-128"/>
+                <a:ea typeface="Meiryo UI" panose="020B0604030504040204" pitchFamily="50" charset="-128"/>
+              </a:rPr>
+              <a:t>AHA Centre</a:t>
+            </a:r>
+          </a:p>
+        </p:txBody>
+      </p:sp>
+      <p:sp>
+        <p:nvSpPr>
+          <p:cNvPr id="201" name="テキスト ボックス 166">
+            <a:extLst>
+              <a:ext uri="{FF2B5EF4-FFF2-40B4-BE49-F238E27FC236}">
+                <a16:creationId xmlns:a16="http://schemas.microsoft.com/office/drawing/2014/main" id="{EDBECD81-6FB8-2D33-08E5-262BE06B316D}"/>
+              </a:ext>
+            </a:extLst>
+          </p:cNvPr>
+          <p:cNvSpPr txBox="1"/>
+          <p:nvPr/>
+        </p:nvSpPr>
+        <p:spPr>
+          <a:xfrm>
+            <a:off x="2504168" y="7730396"/>
+            <a:ext cx="380000" cy="80791"/>
+          </a:xfrm>
+          <a:prstGeom prst="rect">
+            <a:avLst/>
+          </a:prstGeom>
+          <a:solidFill>
+            <a:schemeClr val="accent6">
+              <a:lumMod val="20000"/>
+              <a:lumOff val="80000"/>
+            </a:schemeClr>
+          </a:solidFill>
+        </p:spPr>
+        <p:txBody>
+          <a:bodyPr wrap="none" lIns="0" tIns="0" rIns="0" bIns="0">
+            <a:spAutoFit/>
+          </a:bodyPr>
+          <a:lstStyle/>
+          <a:p>
+            <a:pPr algn="ctr" fontAlgn="ctr">
+              <a:lnSpc>
+                <a:spcPts val="600"/>
+              </a:lnSpc>
+              <a:buNone/>
+            </a:pPr>
+            <a:r>
+              <a:rPr lang="en-GB" altLang="ja-JP" sz="600" u="none" strike="noStrike" dirty="0">
+                <a:effectLst/>
+                <a:latin typeface="Meiryo UI" panose="020B0604030504040204" pitchFamily="50" charset="-128"/>
+                <a:ea typeface="Meiryo UI" panose="020B0604030504040204" pitchFamily="50" charset="-128"/>
+              </a:rPr>
+              <a:t>ADPC</a:t>
+            </a:r>
+          </a:p>
+        </p:txBody>
+      </p:sp>
+      <p:sp>
+        <p:nvSpPr>
+          <p:cNvPr id="202" name="正方形/長方形 186">
+            <a:extLst>
+              <a:ext uri="{FF2B5EF4-FFF2-40B4-BE49-F238E27FC236}">
+                <a16:creationId xmlns:a16="http://schemas.microsoft.com/office/drawing/2014/main" id="{691FF50D-B26B-3AE6-972B-AB9315D96FA0}"/>
+              </a:ext>
+            </a:extLst>
+          </p:cNvPr>
+          <p:cNvSpPr/>
+          <p:nvPr/>
+        </p:nvSpPr>
+        <p:spPr>
+          <a:xfrm>
+            <a:off x="2757576" y="7435396"/>
+            <a:ext cx="436816" cy="192003"/>
+          </a:xfrm>
+          <a:prstGeom prst="rect">
+            <a:avLst/>
+          </a:prstGeom>
+          <a:solidFill>
+            <a:srgbClr val="4BACC6"/>
+          </a:solidFill>
+          <a:ln w="25400" cap="flat" cmpd="sng" algn="ctr">
+            <a:solidFill>
+              <a:sysClr val="windowText" lastClr="000000"/>
+            </a:solidFill>
+            <a:prstDash val="solid"/>
+          </a:ln>
+          <a:effectLst/>
+        </p:spPr>
+        <p:txBody>
+          <a:bodyPr lIns="0" tIns="0" rIns="0" bIns="0" rtlCol="0" anchor="ctr" anchorCtr="1"/>
+          <a:lstStyle>
+            <a:lvl1pPr marL="0" indent="0">
+              <a:defRPr sz="1100">
+                <a:solidFill>
+                  <a:schemeClr val="lt1"/>
+                </a:solidFill>
+                <a:latin typeface="+mn-lt"/>
+                <a:ea typeface="+mn-ea"/>
+                <a:cs typeface="+mn-cs"/>
+              </a:defRPr>
+            </a:lvl1pPr>
+            <a:lvl2pPr marL="457200" indent="0">
+              <a:defRPr sz="1100">
+                <a:solidFill>
+                  <a:schemeClr val="lt1"/>
+                </a:solidFill>
+                <a:latin typeface="+mn-lt"/>
+                <a:ea typeface="+mn-ea"/>
+                <a:cs typeface="+mn-cs"/>
+              </a:defRPr>
+            </a:lvl2pPr>
+            <a:lvl3pPr marL="914400" indent="0">
+              <a:defRPr sz="1100">
+                <a:solidFill>
+                  <a:schemeClr val="lt1"/>
+                </a:solidFill>
+                <a:latin typeface="+mn-lt"/>
+                <a:ea typeface="+mn-ea"/>
+                <a:cs typeface="+mn-cs"/>
+              </a:defRPr>
+            </a:lvl3pPr>
+            <a:lvl4pPr marL="1371600" indent="0">
+              <a:defRPr sz="1100">
+                <a:solidFill>
+                  <a:schemeClr val="lt1"/>
+                </a:solidFill>
+                <a:latin typeface="+mn-lt"/>
+                <a:ea typeface="+mn-ea"/>
+                <a:cs typeface="+mn-cs"/>
+              </a:defRPr>
+            </a:lvl4pPr>
+            <a:lvl5pPr marL="1828800" indent="0">
+              <a:defRPr sz="1100">
+                <a:solidFill>
+                  <a:schemeClr val="lt1"/>
+                </a:solidFill>
+                <a:latin typeface="+mn-lt"/>
+                <a:ea typeface="+mn-ea"/>
+                <a:cs typeface="+mn-cs"/>
+              </a:defRPr>
+            </a:lvl5pPr>
+            <a:lvl6pPr marL="2286000" indent="0">
+              <a:defRPr sz="1100">
+                <a:solidFill>
+                  <a:schemeClr val="lt1"/>
+                </a:solidFill>
+                <a:latin typeface="+mn-lt"/>
+                <a:ea typeface="+mn-ea"/>
+                <a:cs typeface="+mn-cs"/>
+              </a:defRPr>
+            </a:lvl6pPr>
+            <a:lvl7pPr marL="2743200" indent="0">
+              <a:defRPr sz="1100">
+                <a:solidFill>
+                  <a:schemeClr val="lt1"/>
+                </a:solidFill>
+                <a:latin typeface="+mn-lt"/>
+                <a:ea typeface="+mn-ea"/>
+                <a:cs typeface="+mn-cs"/>
+              </a:defRPr>
+            </a:lvl7pPr>
+            <a:lvl8pPr marL="3200400" indent="0">
+              <a:defRPr sz="1100">
+                <a:solidFill>
+                  <a:schemeClr val="lt1"/>
+                </a:solidFill>
+                <a:latin typeface="+mn-lt"/>
+                <a:ea typeface="+mn-ea"/>
+                <a:cs typeface="+mn-cs"/>
+              </a:defRPr>
+            </a:lvl8pPr>
+            <a:lvl9pPr marL="3657600" indent="0">
+              <a:defRPr sz="1100">
+                <a:solidFill>
+                  <a:schemeClr val="lt1"/>
+                </a:solidFill>
+                <a:latin typeface="+mn-lt"/>
+                <a:ea typeface="+mn-ea"/>
+                <a:cs typeface="+mn-cs"/>
+              </a:defRPr>
+            </a:lvl9pPr>
+          </a:lstStyle>
+          <a:p>
+            <a:pPr defTabSz="914400">
+              <a:defRPr/>
+            </a:pPr>
+            <a:r>
+              <a:rPr kumimoji="1" lang="en-US" altLang="ja-JP" sz="600" kern="0" dirty="0">
+                <a:solidFill>
+                  <a:sysClr val="window" lastClr="FFFFFF"/>
+                </a:solidFill>
+                <a:latin typeface="Calibri"/>
+                <a:ea typeface="ＭＳ Ｐゴシック" panose="020B0600070205080204" pitchFamily="50" charset="-128"/>
+              </a:rPr>
+              <a:t>resource</a:t>
+            </a:r>
+            <a:endParaRPr kumimoji="1" lang="ja-JP" altLang="en-US" sz="500" b="0" i="0" u="none" strike="noStrike" kern="0" cap="none" spc="0" normalizeH="0" baseline="0" noProof="0" dirty="0">
+              <a:ln>
+                <a:noFill/>
+              </a:ln>
+              <a:solidFill>
+                <a:sysClr val="window" lastClr="FFFFFF"/>
+              </a:solidFill>
+              <a:effectLst/>
+              <a:uLnTx/>
+              <a:uFillTx/>
+              <a:latin typeface="Calibri"/>
+              <a:ea typeface="ＭＳ Ｐゴシック" panose="020B0600070205080204" pitchFamily="50" charset="-128"/>
+              <a:cs typeface="+mn-cs"/>
+            </a:endParaRPr>
+          </a:p>
+        </p:txBody>
+      </p:sp>
+      <p:sp>
+        <p:nvSpPr>
+          <p:cNvPr id="203" name="テキスト ボックス 144">
+            <a:extLst>
+              <a:ext uri="{FF2B5EF4-FFF2-40B4-BE49-F238E27FC236}">
+                <a16:creationId xmlns:a16="http://schemas.microsoft.com/office/drawing/2014/main" id="{6451F370-7251-CA17-6373-FA7B8E90DF8F}"/>
+              </a:ext>
+            </a:extLst>
+          </p:cNvPr>
+          <p:cNvSpPr txBox="1"/>
+          <p:nvPr/>
+        </p:nvSpPr>
+        <p:spPr>
+          <a:xfrm>
+            <a:off x="2742576" y="7650396"/>
+            <a:ext cx="380000" cy="80791"/>
+          </a:xfrm>
+          <a:prstGeom prst="rect">
+            <a:avLst/>
+          </a:prstGeom>
+          <a:noFill/>
+        </p:spPr>
+        <p:txBody>
+          <a:bodyPr wrap="none" lIns="0" tIns="0" rIns="0" bIns="0">
+            <a:spAutoFit/>
+          </a:bodyPr>
+          <a:lstStyle/>
+          <a:p>
+            <a:pPr algn="l" fontAlgn="ctr">
+              <a:lnSpc>
+                <a:spcPts val="600"/>
+              </a:lnSpc>
+              <a:buNone/>
+            </a:pPr>
+            <a:r>
+              <a:rPr lang="en-GB" altLang="ja-JP" sz="600" u="none" strike="noStrike" dirty="0" b="1">
+                <a:solidFill>
+                  <a:srgbClr val="C00000"/>
+                </a:solidFill>
+                <a:effectLst/>
+                <a:latin typeface="Meiryo UI" panose="020B0604030504040204" pitchFamily="50" charset="-128"/>
+                <a:ea typeface="Meiryo UI" panose="020B0604030504040204" pitchFamily="50" charset="-128"/>
+              </a:rPr>
+              <a:t>Google *</a:t>
+            </a:r>
+          </a:p>
+        </p:txBody>
+      </p:sp>
+      <p:sp>
+        <p:nvSpPr>
+          <p:cNvPr id="204" name="テキスト ボックス 144">
+            <a:extLst>
+              <a:ext uri="{FF2B5EF4-FFF2-40B4-BE49-F238E27FC236}">
+                <a16:creationId xmlns:a16="http://schemas.microsoft.com/office/drawing/2014/main" id="{6451F370-7251-CA17-6373-FA7B8E90DF8F}"/>
+              </a:ext>
+            </a:extLst>
+          </p:cNvPr>
+          <p:cNvSpPr txBox="1"/>
+          <p:nvPr/>
+        </p:nvSpPr>
+        <p:spPr>
+          <a:xfrm>
+            <a:off x="2960984" y="7730396"/>
+            <a:ext cx="380000" cy="80791"/>
+          </a:xfrm>
+          <a:prstGeom prst="rect">
+            <a:avLst/>
+          </a:prstGeom>
+          <a:noFill/>
+        </p:spPr>
+        <p:txBody>
+          <a:bodyPr wrap="none" lIns="0" tIns="0" rIns="0" bIns="0">
+            <a:spAutoFit/>
+          </a:bodyPr>
+          <a:lstStyle/>
+          <a:p>
+            <a:pPr algn="l" fontAlgn="ctr">
+              <a:lnSpc>
+                <a:spcPts val="600"/>
+              </a:lnSpc>
+              <a:buNone/>
+            </a:pPr>
+            <a:r>
+              <a:rPr lang="en-GB" altLang="ja-JP" sz="600" u="none" strike="noStrike" dirty="0">
+                <a:effectLst/>
+                <a:latin typeface="Meiryo UI" panose="020B0604030504040204" pitchFamily="50" charset="-128"/>
+                <a:ea typeface="Meiryo UI" panose="020B0604030504040204" pitchFamily="50" charset="-128"/>
+              </a:rPr>
+              <a:t>ADB</a:t>
+            </a:r>
+          </a:p>
+        </p:txBody>
+      </p:sp>
+      <p:sp>
+        <p:nvSpPr>
+          <p:cNvPr id="205" name="正方形/長方形 180">
+            <a:extLst>
+              <a:ext uri="{FF2B5EF4-FFF2-40B4-BE49-F238E27FC236}">
+                <a16:creationId xmlns:a16="http://schemas.microsoft.com/office/drawing/2014/main" id="{DCFFE979-6827-DEBF-E7A3-737DB0B82105}"/>
+              </a:ext>
+            </a:extLst>
+          </p:cNvPr>
+          <p:cNvSpPr/>
+          <p:nvPr/>
+        </p:nvSpPr>
+        <p:spPr>
+          <a:xfrm>
+            <a:off x="3214392" y="7435396"/>
+            <a:ext cx="436816" cy="192003"/>
+          </a:xfrm>
+          <a:prstGeom prst="rect">
+            <a:avLst/>
+          </a:prstGeom>
+          <a:solidFill>
+            <a:srgbClr val="4BACC6"/>
+          </a:solidFill>
+          <a:ln w="25400" cap="flat" cmpd="sng" algn="ctr">
+            <a:solidFill>
+              <a:sysClr val="windowText" lastClr="000000"/>
+            </a:solidFill>
+            <a:prstDash val="solid"/>
+          </a:ln>
+          <a:effectLst/>
+        </p:spPr>
+        <p:txBody>
+          <a:bodyPr lIns="0" tIns="0" rIns="0" bIns="0" rtlCol="0" anchor="ctr" anchorCtr="1"/>
+          <a:lstStyle>
+            <a:lvl1pPr marL="0" indent="0">
+              <a:defRPr sz="1100">
+                <a:solidFill>
+                  <a:schemeClr val="lt1"/>
+                </a:solidFill>
+                <a:latin typeface="+mn-lt"/>
+                <a:ea typeface="+mn-ea"/>
+                <a:cs typeface="+mn-cs"/>
+              </a:defRPr>
+            </a:lvl1pPr>
+            <a:lvl2pPr marL="457200" indent="0">
+              <a:defRPr sz="1100">
+                <a:solidFill>
+                  <a:schemeClr val="lt1"/>
+                </a:solidFill>
+                <a:latin typeface="+mn-lt"/>
+                <a:ea typeface="+mn-ea"/>
+                <a:cs typeface="+mn-cs"/>
+              </a:defRPr>
+            </a:lvl2pPr>
+            <a:lvl3pPr marL="914400" indent="0">
+              <a:defRPr sz="1100">
+                <a:solidFill>
+                  <a:schemeClr val="lt1"/>
+                </a:solidFill>
+                <a:latin typeface="+mn-lt"/>
+                <a:ea typeface="+mn-ea"/>
+                <a:cs typeface="+mn-cs"/>
+              </a:defRPr>
+            </a:lvl3pPr>
+            <a:lvl4pPr marL="1371600" indent="0">
+              <a:defRPr sz="1100">
+                <a:solidFill>
+                  <a:schemeClr val="lt1"/>
+                </a:solidFill>
+                <a:latin typeface="+mn-lt"/>
+                <a:ea typeface="+mn-ea"/>
+                <a:cs typeface="+mn-cs"/>
+              </a:defRPr>
+            </a:lvl4pPr>
+            <a:lvl5pPr marL="1828800" indent="0">
+              <a:defRPr sz="1100">
+                <a:solidFill>
+                  <a:schemeClr val="lt1"/>
+                </a:solidFill>
+                <a:latin typeface="+mn-lt"/>
+                <a:ea typeface="+mn-ea"/>
+                <a:cs typeface="+mn-cs"/>
+              </a:defRPr>
+            </a:lvl5pPr>
+            <a:lvl6pPr marL="2286000" indent="0">
+              <a:defRPr sz="1100">
+                <a:solidFill>
+                  <a:schemeClr val="lt1"/>
+                </a:solidFill>
+                <a:latin typeface="+mn-lt"/>
+                <a:ea typeface="+mn-ea"/>
+                <a:cs typeface="+mn-cs"/>
+              </a:defRPr>
+            </a:lvl6pPr>
+            <a:lvl7pPr marL="2743200" indent="0">
+              <a:defRPr sz="1100">
+                <a:solidFill>
+                  <a:schemeClr val="lt1"/>
+                </a:solidFill>
+                <a:latin typeface="+mn-lt"/>
+                <a:ea typeface="+mn-ea"/>
+                <a:cs typeface="+mn-cs"/>
+              </a:defRPr>
+            </a:lvl7pPr>
+            <a:lvl8pPr marL="3200400" indent="0">
+              <a:defRPr sz="1100">
+                <a:solidFill>
+                  <a:schemeClr val="lt1"/>
+                </a:solidFill>
+                <a:latin typeface="+mn-lt"/>
+                <a:ea typeface="+mn-ea"/>
+                <a:cs typeface="+mn-cs"/>
+              </a:defRPr>
+            </a:lvl8pPr>
+            <a:lvl9pPr marL="3657600" indent="0">
+              <a:defRPr sz="1100">
+                <a:solidFill>
+                  <a:schemeClr val="lt1"/>
+                </a:solidFill>
+                <a:latin typeface="+mn-lt"/>
+                <a:ea typeface="+mn-ea"/>
+                <a:cs typeface="+mn-cs"/>
+              </a:defRPr>
+            </a:lvl9pPr>
+          </a:lstStyle>
+          <a:p>
+            <a:pPr defTabSz="914400">
+              <a:defRPr/>
+            </a:pPr>
+            <a:r>
+              <a:rPr kumimoji="1" lang="en-US" altLang="ja-JP" sz="600" kern="0" dirty="0">
+                <a:solidFill>
+                  <a:sysClr val="window" lastClr="FFFFFF"/>
+                </a:solidFill>
+                <a:latin typeface="Calibri"/>
+                <a:ea typeface="ＭＳ Ｐゴシック" panose="020B0600070205080204" pitchFamily="50" charset="-128"/>
+              </a:rPr>
+              <a:t>member</a:t>
+            </a:r>
+            <a:endParaRPr kumimoji="1" lang="ja-JP" altLang="en-US" sz="500" b="0" i="0" u="none" strike="noStrike" kern="0" cap="none" spc="0" normalizeH="0" baseline="0" noProof="0" dirty="0">
+              <a:ln>
+                <a:noFill/>
+              </a:ln>
+              <a:solidFill>
+                <a:sysClr val="window" lastClr="FFFFFF"/>
+              </a:solidFill>
+              <a:effectLst/>
+              <a:uLnTx/>
+              <a:uFillTx/>
+              <a:latin typeface="Calibri"/>
+              <a:ea typeface="ＭＳ Ｐゴシック" panose="020B0600070205080204" pitchFamily="50" charset="-128"/>
+              <a:cs typeface="+mn-cs"/>
+            </a:endParaRPr>
+          </a:p>
+        </p:txBody>
+      </p:sp>
+      <p:sp>
+        <p:nvSpPr>
+          <p:cNvPr id="206" name="テキスト ボックス 144">
+            <a:extLst>
+              <a:ext uri="{FF2B5EF4-FFF2-40B4-BE49-F238E27FC236}">
+                <a16:creationId xmlns:a16="http://schemas.microsoft.com/office/drawing/2014/main" id="{6451F370-7251-CA17-6373-FA7B8E90DF8F}"/>
+              </a:ext>
+            </a:extLst>
+          </p:cNvPr>
+          <p:cNvSpPr txBox="1"/>
+          <p:nvPr/>
+        </p:nvSpPr>
+        <p:spPr>
+          <a:xfrm>
+            <a:off x="3199392" y="7650396"/>
+            <a:ext cx="380000" cy="80791"/>
+          </a:xfrm>
+          <a:prstGeom prst="rect">
+            <a:avLst/>
+          </a:prstGeom>
+          <a:noFill/>
+        </p:spPr>
+        <p:txBody>
+          <a:bodyPr wrap="none" lIns="0" tIns="0" rIns="0" bIns="0">
+            <a:spAutoFit/>
+          </a:bodyPr>
+          <a:lstStyle/>
+          <a:p>
+            <a:pPr algn="l" fontAlgn="ctr">
+              <a:lnSpc>
+                <a:spcPts val="600"/>
+              </a:lnSpc>
+              <a:buNone/>
+            </a:pPr>
+            <a:r>
+              <a:rPr lang="en-GB" altLang="ja-JP" sz="600" u="none" strike="noStrike" dirty="0" b="1">
+                <a:solidFill>
+                  <a:srgbClr val="C00000"/>
+                </a:solidFill>
+                <a:effectLst/>
+                <a:latin typeface="Meiryo UI" panose="020B0604030504040204" pitchFamily="50" charset="-128"/>
+                <a:ea typeface="Meiryo UI" panose="020B0604030504040204" pitchFamily="50" charset="-128"/>
+              </a:rPr>
+              <a:t>Sendai VM *</a:t>
+            </a:r>
+          </a:p>
+        </p:txBody>
+      </p:sp>
+      <p:sp>
+        <p:nvSpPr>
+          <p:cNvPr id="207" name="テキスト ボックス 144">
+            <a:extLst>
+              <a:ext uri="{FF2B5EF4-FFF2-40B4-BE49-F238E27FC236}">
+                <a16:creationId xmlns:a16="http://schemas.microsoft.com/office/drawing/2014/main" id="{6451F370-7251-CA17-6373-FA7B8E90DF8F}"/>
+              </a:ext>
+            </a:extLst>
+          </p:cNvPr>
+          <p:cNvSpPr txBox="1"/>
+          <p:nvPr/>
+        </p:nvSpPr>
+        <p:spPr>
+          <a:xfrm>
+            <a:off x="3417800" y="7730396"/>
+            <a:ext cx="380000" cy="80791"/>
+          </a:xfrm>
+          <a:prstGeom prst="rect">
+            <a:avLst/>
+          </a:prstGeom>
+          <a:noFill/>
+        </p:spPr>
+        <p:txBody>
+          <a:bodyPr wrap="none" lIns="0" tIns="0" rIns="0" bIns="0">
+            <a:spAutoFit/>
+          </a:bodyPr>
+          <a:lstStyle/>
+          <a:p>
+            <a:pPr algn="l" fontAlgn="ctr">
+              <a:lnSpc>
+                <a:spcPts val="600"/>
+              </a:lnSpc>
+              <a:buNone/>
+            </a:pPr>
+            <a:r>
+              <a:rPr lang="en-GB" altLang="ja-JP" sz="600" u="none" strike="noStrike" dirty="0">
+                <a:effectLst/>
+                <a:latin typeface="Meiryo UI" panose="020B0604030504040204" pitchFamily="50" charset="-128"/>
+                <a:ea typeface="Meiryo UI" panose="020B0604030504040204" pitchFamily="50" charset="-128"/>
+              </a:rPr>
+              <a:t>Sendai</a:t>
+            </a:r>
+          </a:p>
+        </p:txBody>
+      </p:sp>
+      <p:sp>
+        <p:nvSpPr>
+          <p:cNvPr id="208" name="正方形/長方形 180">
+            <a:extLst>
+              <a:ext uri="{FF2B5EF4-FFF2-40B4-BE49-F238E27FC236}">
+                <a16:creationId xmlns:a16="http://schemas.microsoft.com/office/drawing/2014/main" id="{DCFFE979-6827-DEBF-E7A3-737DB0B82105}"/>
+              </a:ext>
+            </a:extLst>
+          </p:cNvPr>
+          <p:cNvSpPr/>
+          <p:nvPr/>
+        </p:nvSpPr>
+        <p:spPr>
+          <a:xfrm>
+            <a:off x="3671208" y="7435396"/>
+            <a:ext cx="436816" cy="192003"/>
+          </a:xfrm>
+          <a:prstGeom prst="rect">
+            <a:avLst/>
+          </a:prstGeom>
+          <a:solidFill>
+            <a:srgbClr val="4BACC6"/>
+          </a:solidFill>
+          <a:ln w="25400" cap="flat" cmpd="sng" algn="ctr">
+            <a:solidFill>
+              <a:sysClr val="windowText" lastClr="000000"/>
+            </a:solidFill>
+            <a:prstDash val="solid"/>
+          </a:ln>
+          <a:effectLst/>
+        </p:spPr>
+        <p:txBody>
+          <a:bodyPr lIns="0" tIns="0" rIns="0" bIns="0" rtlCol="0" anchor="ctr" anchorCtr="1"/>
+          <a:lstStyle>
+            <a:lvl1pPr marL="0" indent="0">
+              <a:defRPr sz="1100">
+                <a:solidFill>
+                  <a:schemeClr val="lt1"/>
+                </a:solidFill>
+                <a:latin typeface="+mn-lt"/>
+                <a:ea typeface="+mn-ea"/>
+                <a:cs typeface="+mn-cs"/>
+              </a:defRPr>
+            </a:lvl1pPr>
+            <a:lvl2pPr marL="457200" indent="0">
+              <a:defRPr sz="1100">
+                <a:solidFill>
+                  <a:schemeClr val="lt1"/>
+                </a:solidFill>
+                <a:latin typeface="+mn-lt"/>
+                <a:ea typeface="+mn-ea"/>
+                <a:cs typeface="+mn-cs"/>
+              </a:defRPr>
+            </a:lvl2pPr>
+            <a:lvl3pPr marL="914400" indent="0">
+              <a:defRPr sz="1100">
+                <a:solidFill>
+                  <a:schemeClr val="lt1"/>
+                </a:solidFill>
+                <a:latin typeface="+mn-lt"/>
+                <a:ea typeface="+mn-ea"/>
+                <a:cs typeface="+mn-cs"/>
+              </a:defRPr>
+            </a:lvl3pPr>
+            <a:lvl4pPr marL="1371600" indent="0">
+              <a:defRPr sz="1100">
+                <a:solidFill>
+                  <a:schemeClr val="lt1"/>
+                </a:solidFill>
+                <a:latin typeface="+mn-lt"/>
+                <a:ea typeface="+mn-ea"/>
+                <a:cs typeface="+mn-cs"/>
+              </a:defRPr>
+            </a:lvl4pPr>
+            <a:lvl5pPr marL="1828800" indent="0">
+              <a:defRPr sz="1100">
+                <a:solidFill>
+                  <a:schemeClr val="lt1"/>
+                </a:solidFill>
+                <a:latin typeface="+mn-lt"/>
+                <a:ea typeface="+mn-ea"/>
+                <a:cs typeface="+mn-cs"/>
+              </a:defRPr>
+            </a:lvl5pPr>
+            <a:lvl6pPr marL="2286000" indent="0">
+              <a:defRPr sz="1100">
+                <a:solidFill>
+                  <a:schemeClr val="lt1"/>
+                </a:solidFill>
+                <a:latin typeface="+mn-lt"/>
+                <a:ea typeface="+mn-ea"/>
+                <a:cs typeface="+mn-cs"/>
+              </a:defRPr>
+            </a:lvl6pPr>
+            <a:lvl7pPr marL="2743200" indent="0">
+              <a:defRPr sz="1100">
+                <a:solidFill>
+                  <a:schemeClr val="lt1"/>
+                </a:solidFill>
+                <a:latin typeface="+mn-lt"/>
+                <a:ea typeface="+mn-ea"/>
+                <a:cs typeface="+mn-cs"/>
+              </a:defRPr>
+            </a:lvl7pPr>
+            <a:lvl8pPr marL="3200400" indent="0">
+              <a:defRPr sz="1100">
+                <a:solidFill>
+                  <a:schemeClr val="lt1"/>
+                </a:solidFill>
+                <a:latin typeface="+mn-lt"/>
+                <a:ea typeface="+mn-ea"/>
+                <a:cs typeface="+mn-cs"/>
+              </a:defRPr>
+            </a:lvl8pPr>
+            <a:lvl9pPr marL="3657600" indent="0">
+              <a:defRPr sz="1100">
+                <a:solidFill>
+                  <a:schemeClr val="lt1"/>
+                </a:solidFill>
+                <a:latin typeface="+mn-lt"/>
+                <a:ea typeface="+mn-ea"/>
+                <a:cs typeface="+mn-cs"/>
+              </a:defRPr>
+            </a:lvl9pPr>
+          </a:lstStyle>
+          <a:p>
+            <a:pPr defTabSz="914400">
+              <a:defRPr/>
+            </a:pPr>
+            <a:r>
+              <a:rPr kumimoji="1" lang="en-US" altLang="ja-JP" sz="600" kern="0" dirty="0">
+                <a:solidFill>
+                  <a:sysClr val="window" lastClr="FFFFFF"/>
+                </a:solidFill>
+                <a:latin typeface="Calibri"/>
+                <a:ea typeface="ＭＳ Ｐゴシック" panose="020B0600070205080204" pitchFamily="50" charset="-128"/>
+              </a:rPr>
+              <a:t>member</a:t>
+            </a:r>
+            <a:endParaRPr kumimoji="1" lang="ja-JP" altLang="en-US" sz="500" b="0" i="0" u="none" strike="noStrike" kern="0" cap="none" spc="0" normalizeH="0" baseline="0" noProof="0" dirty="0">
+              <a:ln>
+                <a:noFill/>
+              </a:ln>
+              <a:solidFill>
+                <a:sysClr val="window" lastClr="FFFFFF"/>
+              </a:solidFill>
+              <a:effectLst/>
+              <a:uLnTx/>
+              <a:uFillTx/>
+              <a:latin typeface="Calibri"/>
+              <a:ea typeface="ＭＳ Ｐゴシック" panose="020B0600070205080204" pitchFamily="50" charset="-128"/>
+              <a:cs typeface="+mn-cs"/>
+            </a:endParaRPr>
+          </a:p>
+        </p:txBody>
+      </p:sp>
+      <p:sp>
+        <p:nvSpPr>
+          <p:cNvPr id="209" name="テキスト ボックス 144">
+            <a:extLst>
+              <a:ext uri="{FF2B5EF4-FFF2-40B4-BE49-F238E27FC236}">
+                <a16:creationId xmlns:a16="http://schemas.microsoft.com/office/drawing/2014/main" id="{6451F370-7251-CA17-6373-FA7B8E90DF8F}"/>
+              </a:ext>
+            </a:extLst>
+          </p:cNvPr>
+          <p:cNvSpPr txBox="1"/>
+          <p:nvPr/>
+        </p:nvSpPr>
+        <p:spPr>
+          <a:xfrm>
+            <a:off x="3656208" y="7650396"/>
+            <a:ext cx="380000" cy="80791"/>
+          </a:xfrm>
+          <a:prstGeom prst="rect">
+            <a:avLst/>
+          </a:prstGeom>
+          <a:noFill/>
+        </p:spPr>
+        <p:txBody>
+          <a:bodyPr wrap="none" lIns="0" tIns="0" rIns="0" bIns="0">
+            <a:spAutoFit/>
+          </a:bodyPr>
+          <a:lstStyle/>
+          <a:p>
+            <a:pPr algn="l" fontAlgn="ctr">
+              <a:lnSpc>
+                <a:spcPts val="600"/>
+              </a:lnSpc>
+              <a:buNone/>
+            </a:pPr>
+            <a:r>
+              <a:rPr lang="en-GB" altLang="ja-JP" sz="600" u="none" strike="noStrike" dirty="0">
+                <a:effectLst/>
+                <a:latin typeface="Meiryo UI" panose="020B0604030504040204" pitchFamily="50" charset="-128"/>
+                <a:ea typeface="Meiryo UI" panose="020B0604030504040204" pitchFamily="50" charset="-128"/>
+              </a:rPr>
+              <a:t>Sendai</a:t>
+            </a:r>
+          </a:p>
+        </p:txBody>
+      </p:sp>
+      <p:sp>
+        <p:nvSpPr>
+          <p:cNvPr id="210" name="テキスト ボックス 144">
+            <a:extLst>
+              <a:ext uri="{FF2B5EF4-FFF2-40B4-BE49-F238E27FC236}">
+                <a16:creationId xmlns:a16="http://schemas.microsoft.com/office/drawing/2014/main" id="{6451F370-7251-CA17-6373-FA7B8E90DF8F}"/>
+              </a:ext>
+            </a:extLst>
+          </p:cNvPr>
+          <p:cNvSpPr txBox="1"/>
+          <p:nvPr/>
+        </p:nvSpPr>
+        <p:spPr>
+          <a:xfrm>
+            <a:off x="3874616" y="7730396"/>
+            <a:ext cx="380000" cy="80791"/>
+          </a:xfrm>
+          <a:prstGeom prst="rect">
+            <a:avLst/>
+          </a:prstGeom>
+          <a:noFill/>
+        </p:spPr>
+        <p:txBody>
+          <a:bodyPr wrap="none" lIns="0" tIns="0" rIns="0" bIns="0">
+            <a:spAutoFit/>
+          </a:bodyPr>
+          <a:lstStyle/>
+          <a:p>
+            <a:pPr algn="l" fontAlgn="ctr">
+              <a:lnSpc>
+                <a:spcPts val="600"/>
+              </a:lnSpc>
+              <a:buNone/>
+            </a:pPr>
+            <a:r>
+              <a:rPr lang="en-GB" altLang="ja-JP" sz="600" u="none" strike="noStrike" dirty="0">
+                <a:effectLst/>
+                <a:latin typeface="Meiryo UI" panose="020B0604030504040204" pitchFamily="50" charset="-128"/>
+                <a:ea typeface="Meiryo UI" panose="020B0604030504040204" pitchFamily="50" charset="-128"/>
+              </a:rPr>
+              <a:t>Sendai</a:t>
+            </a:r>
+          </a:p>
+        </p:txBody>
+      </p:sp>
+      <p:sp>
+        <p:nvSpPr>
+          <p:cNvPr id="211" name="正方形/長方形 180">
+            <a:extLst>
+              <a:ext uri="{FF2B5EF4-FFF2-40B4-BE49-F238E27FC236}">
+                <a16:creationId xmlns:a16="http://schemas.microsoft.com/office/drawing/2014/main" id="{DCFFE979-6827-DEBF-E7A3-737DB0B82105}"/>
+              </a:ext>
+            </a:extLst>
+          </p:cNvPr>
+          <p:cNvSpPr/>
+          <p:nvPr/>
+        </p:nvSpPr>
+        <p:spPr>
+          <a:xfrm>
+            <a:off x="1843944" y="7835396"/>
+            <a:ext cx="436816" cy="192003"/>
+          </a:xfrm>
+          <a:prstGeom prst="rect">
+            <a:avLst/>
+          </a:prstGeom>
+          <a:solidFill>
+            <a:srgbClr val="4BACC6"/>
+          </a:solidFill>
+          <a:ln w="25400" cap="flat" cmpd="sng" algn="ctr">
+            <a:solidFill>
+              <a:sysClr val="windowText" lastClr="000000"/>
+            </a:solidFill>
+            <a:prstDash val="solid"/>
+          </a:ln>
+          <a:effectLst/>
+        </p:spPr>
+        <p:txBody>
+          <a:bodyPr lIns="0" tIns="0" rIns="0" bIns="0" rtlCol="0" anchor="ctr" anchorCtr="1"/>
+          <a:lstStyle>
+            <a:lvl1pPr marL="0" indent="0">
+              <a:defRPr sz="1100">
+                <a:solidFill>
+                  <a:schemeClr val="lt1"/>
+                </a:solidFill>
+                <a:latin typeface="+mn-lt"/>
+                <a:ea typeface="+mn-ea"/>
+                <a:cs typeface="+mn-cs"/>
+              </a:defRPr>
+            </a:lvl1pPr>
+            <a:lvl2pPr marL="457200" indent="0">
+              <a:defRPr sz="1100">
+                <a:solidFill>
+                  <a:schemeClr val="lt1"/>
+                </a:solidFill>
+                <a:latin typeface="+mn-lt"/>
+                <a:ea typeface="+mn-ea"/>
+                <a:cs typeface="+mn-cs"/>
+              </a:defRPr>
+            </a:lvl2pPr>
+            <a:lvl3pPr marL="914400" indent="0">
+              <a:defRPr sz="1100">
+                <a:solidFill>
+                  <a:schemeClr val="lt1"/>
+                </a:solidFill>
+                <a:latin typeface="+mn-lt"/>
+                <a:ea typeface="+mn-ea"/>
+                <a:cs typeface="+mn-cs"/>
+              </a:defRPr>
+            </a:lvl3pPr>
+            <a:lvl4pPr marL="1371600" indent="0">
+              <a:defRPr sz="1100">
+                <a:solidFill>
+                  <a:schemeClr val="lt1"/>
+                </a:solidFill>
+                <a:latin typeface="+mn-lt"/>
+                <a:ea typeface="+mn-ea"/>
+                <a:cs typeface="+mn-cs"/>
+              </a:defRPr>
+            </a:lvl4pPr>
+            <a:lvl5pPr marL="1828800" indent="0">
+              <a:defRPr sz="1100">
+                <a:solidFill>
+                  <a:schemeClr val="lt1"/>
+                </a:solidFill>
+                <a:latin typeface="+mn-lt"/>
+                <a:ea typeface="+mn-ea"/>
+                <a:cs typeface="+mn-cs"/>
+              </a:defRPr>
+            </a:lvl5pPr>
+            <a:lvl6pPr marL="2286000" indent="0">
+              <a:defRPr sz="1100">
+                <a:solidFill>
+                  <a:schemeClr val="lt1"/>
+                </a:solidFill>
+                <a:latin typeface="+mn-lt"/>
+                <a:ea typeface="+mn-ea"/>
+                <a:cs typeface="+mn-cs"/>
+              </a:defRPr>
+            </a:lvl6pPr>
+            <a:lvl7pPr marL="2743200" indent="0">
+              <a:defRPr sz="1100">
+                <a:solidFill>
+                  <a:schemeClr val="lt1"/>
+                </a:solidFill>
+                <a:latin typeface="+mn-lt"/>
+                <a:ea typeface="+mn-ea"/>
+                <a:cs typeface="+mn-cs"/>
+              </a:defRPr>
+            </a:lvl7pPr>
+            <a:lvl8pPr marL="3200400" indent="0">
+              <a:defRPr sz="1100">
+                <a:solidFill>
+                  <a:schemeClr val="lt1"/>
+                </a:solidFill>
+                <a:latin typeface="+mn-lt"/>
+                <a:ea typeface="+mn-ea"/>
+                <a:cs typeface="+mn-cs"/>
+              </a:defRPr>
+            </a:lvl8pPr>
+            <a:lvl9pPr marL="3657600" indent="0">
+              <a:defRPr sz="1100">
+                <a:solidFill>
+                  <a:schemeClr val="lt1"/>
+                </a:solidFill>
+                <a:latin typeface="+mn-lt"/>
+                <a:ea typeface="+mn-ea"/>
+                <a:cs typeface="+mn-cs"/>
+              </a:defRPr>
+            </a:lvl9pPr>
+          </a:lstStyle>
+          <a:p>
+            <a:pPr defTabSz="914400">
+              <a:defRPr/>
+            </a:pPr>
+            <a:r>
+              <a:rPr kumimoji="1" lang="en-US" altLang="ja-JP" sz="600" kern="0" dirty="0">
+                <a:solidFill>
+                  <a:sysClr val="window" lastClr="FFFFFF"/>
+                </a:solidFill>
+                <a:latin typeface="Calibri"/>
+                <a:ea typeface="ＭＳ Ｐゴシック" panose="020B0600070205080204" pitchFamily="50" charset="-128"/>
+              </a:rPr>
+              <a:t>member</a:t>
+            </a:r>
+            <a:endParaRPr kumimoji="1" lang="ja-JP" altLang="en-US" sz="500" b="0" i="0" u="none" strike="noStrike" kern="0" cap="none" spc="0" normalizeH="0" baseline="0" noProof="0" dirty="0">
+              <a:ln>
+                <a:noFill/>
+              </a:ln>
+              <a:solidFill>
+                <a:sysClr val="window" lastClr="FFFFFF"/>
+              </a:solidFill>
+              <a:effectLst/>
+              <a:uLnTx/>
+              <a:uFillTx/>
+              <a:latin typeface="Calibri"/>
+              <a:ea typeface="ＭＳ Ｐゴシック" panose="020B0600070205080204" pitchFamily="50" charset="-128"/>
+              <a:cs typeface="+mn-cs"/>
+            </a:endParaRPr>
+          </a:p>
+        </p:txBody>
+      </p:sp>
+      <p:sp>
+        <p:nvSpPr>
+          <p:cNvPr id="212" name="テキスト ボックス 144">
+            <a:extLst>
+              <a:ext uri="{FF2B5EF4-FFF2-40B4-BE49-F238E27FC236}">
+                <a16:creationId xmlns:a16="http://schemas.microsoft.com/office/drawing/2014/main" id="{6451F370-7251-CA17-6373-FA7B8E90DF8F}"/>
+              </a:ext>
+            </a:extLst>
+          </p:cNvPr>
+          <p:cNvSpPr txBox="1"/>
+          <p:nvPr/>
+        </p:nvSpPr>
+        <p:spPr>
+          <a:xfrm>
+            <a:off x="1828944" y="8050396"/>
+            <a:ext cx="380000" cy="80791"/>
+          </a:xfrm>
+          <a:prstGeom prst="rect">
+            <a:avLst/>
+          </a:prstGeom>
+          <a:noFill/>
+        </p:spPr>
+        <p:txBody>
+          <a:bodyPr wrap="none" lIns="0" tIns="0" rIns="0" bIns="0">
+            <a:spAutoFit/>
+          </a:bodyPr>
+          <a:lstStyle/>
+          <a:p>
+            <a:pPr algn="l" fontAlgn="ctr">
+              <a:lnSpc>
+                <a:spcPts val="600"/>
+              </a:lnSpc>
+              <a:buNone/>
+            </a:pPr>
+            <a:r>
+              <a:rPr lang="en-GB" altLang="ja-JP" sz="600" u="none" strike="noStrike" dirty="0">
+                <a:effectLst/>
+                <a:latin typeface="Meiryo UI" panose="020B0604030504040204" pitchFamily="50" charset="-128"/>
+                <a:ea typeface="Meiryo UI" panose="020B0604030504040204" pitchFamily="50" charset="-128"/>
+              </a:rPr>
+              <a:t>ROK</a:t>
+            </a:r>
+          </a:p>
+        </p:txBody>
+      </p:sp>
+      <p:sp>
+        <p:nvSpPr>
+          <p:cNvPr id="213" name="テキスト ボックス 144">
+            <a:extLst>
+              <a:ext uri="{FF2B5EF4-FFF2-40B4-BE49-F238E27FC236}">
+                <a16:creationId xmlns:a16="http://schemas.microsoft.com/office/drawing/2014/main" id="{6451F370-7251-CA17-6373-FA7B8E90DF8F}"/>
+              </a:ext>
+            </a:extLst>
+          </p:cNvPr>
+          <p:cNvSpPr txBox="1"/>
+          <p:nvPr/>
+        </p:nvSpPr>
+        <p:spPr>
+          <a:xfrm>
+            <a:off x="2047352" y="8130396"/>
+            <a:ext cx="380000" cy="80791"/>
+          </a:xfrm>
+          <a:prstGeom prst="rect">
+            <a:avLst/>
+          </a:prstGeom>
+          <a:noFill/>
+        </p:spPr>
+        <p:txBody>
+          <a:bodyPr wrap="none" lIns="0" tIns="0" rIns="0" bIns="0">
+            <a:spAutoFit/>
+          </a:bodyPr>
+          <a:lstStyle/>
+          <a:p>
+            <a:pPr algn="l" fontAlgn="ctr">
+              <a:lnSpc>
+                <a:spcPts val="600"/>
+              </a:lnSpc>
+              <a:buNone/>
+            </a:pPr>
+            <a:r>
+              <a:rPr lang="en-GB" altLang="ja-JP" sz="600" u="none" strike="noStrike" dirty="0">
+                <a:effectLst/>
+                <a:latin typeface="Meiryo UI" panose="020B0604030504040204" pitchFamily="50" charset="-128"/>
+                <a:ea typeface="Meiryo UI" panose="020B0604030504040204" pitchFamily="50" charset="-128"/>
+              </a:rPr>
+              <a:t>ROK</a:t>
+            </a:r>
+          </a:p>
+        </p:txBody>
+      </p:sp>
+      <p:sp>
+        <p:nvSpPr>
+          <p:cNvPr id="214" name="正方形/長方形 180">
+            <a:extLst>
+              <a:ext uri="{FF2B5EF4-FFF2-40B4-BE49-F238E27FC236}">
+                <a16:creationId xmlns:a16="http://schemas.microsoft.com/office/drawing/2014/main" id="{DCFFE979-6827-DEBF-E7A3-737DB0B82105}"/>
+              </a:ext>
+            </a:extLst>
+          </p:cNvPr>
+          <p:cNvSpPr/>
+          <p:nvPr/>
+        </p:nvSpPr>
+        <p:spPr>
+          <a:xfrm>
+            <a:off x="2300760" y="7835396"/>
+            <a:ext cx="436816" cy="192003"/>
+          </a:xfrm>
+          <a:prstGeom prst="rect">
+            <a:avLst/>
+          </a:prstGeom>
+          <a:solidFill>
+            <a:srgbClr val="4BACC6"/>
+          </a:solidFill>
+          <a:ln w="25400" cap="flat" cmpd="sng" algn="ctr">
+            <a:solidFill>
+              <a:sysClr val="windowText" lastClr="000000"/>
+            </a:solidFill>
+            <a:prstDash val="solid"/>
+          </a:ln>
+          <a:effectLst/>
+        </p:spPr>
+        <p:txBody>
+          <a:bodyPr lIns="0" tIns="0" rIns="0" bIns="0" rtlCol="0" anchor="ctr" anchorCtr="1"/>
+          <a:lstStyle>
+            <a:lvl1pPr marL="0" indent="0">
+              <a:defRPr sz="1100">
+                <a:solidFill>
+                  <a:schemeClr val="lt1"/>
+                </a:solidFill>
+                <a:latin typeface="+mn-lt"/>
+                <a:ea typeface="+mn-ea"/>
+                <a:cs typeface="+mn-cs"/>
+              </a:defRPr>
+            </a:lvl1pPr>
+            <a:lvl2pPr marL="457200" indent="0">
+              <a:defRPr sz="1100">
+                <a:solidFill>
+                  <a:schemeClr val="lt1"/>
+                </a:solidFill>
+                <a:latin typeface="+mn-lt"/>
+                <a:ea typeface="+mn-ea"/>
+                <a:cs typeface="+mn-cs"/>
+              </a:defRPr>
+            </a:lvl2pPr>
+            <a:lvl3pPr marL="914400" indent="0">
+              <a:defRPr sz="1100">
+                <a:solidFill>
+                  <a:schemeClr val="lt1"/>
+                </a:solidFill>
+                <a:latin typeface="+mn-lt"/>
+                <a:ea typeface="+mn-ea"/>
+                <a:cs typeface="+mn-cs"/>
+              </a:defRPr>
+            </a:lvl3pPr>
+            <a:lvl4pPr marL="1371600" indent="0">
+              <a:defRPr sz="1100">
+                <a:solidFill>
+                  <a:schemeClr val="lt1"/>
+                </a:solidFill>
+                <a:latin typeface="+mn-lt"/>
+                <a:ea typeface="+mn-ea"/>
+                <a:cs typeface="+mn-cs"/>
+              </a:defRPr>
+            </a:lvl4pPr>
+            <a:lvl5pPr marL="1828800" indent="0">
+              <a:defRPr sz="1100">
+                <a:solidFill>
+                  <a:schemeClr val="lt1"/>
+                </a:solidFill>
+                <a:latin typeface="+mn-lt"/>
+                <a:ea typeface="+mn-ea"/>
+                <a:cs typeface="+mn-cs"/>
+              </a:defRPr>
+            </a:lvl5pPr>
+            <a:lvl6pPr marL="2286000" indent="0">
+              <a:defRPr sz="1100">
+                <a:solidFill>
+                  <a:schemeClr val="lt1"/>
+                </a:solidFill>
+                <a:latin typeface="+mn-lt"/>
+                <a:ea typeface="+mn-ea"/>
+                <a:cs typeface="+mn-cs"/>
+              </a:defRPr>
+            </a:lvl6pPr>
+            <a:lvl7pPr marL="2743200" indent="0">
+              <a:defRPr sz="1100">
+                <a:solidFill>
+                  <a:schemeClr val="lt1"/>
+                </a:solidFill>
+                <a:latin typeface="+mn-lt"/>
+                <a:ea typeface="+mn-ea"/>
+                <a:cs typeface="+mn-cs"/>
+              </a:defRPr>
+            </a:lvl7pPr>
+            <a:lvl8pPr marL="3200400" indent="0">
+              <a:defRPr sz="1100">
+                <a:solidFill>
+                  <a:schemeClr val="lt1"/>
+                </a:solidFill>
+                <a:latin typeface="+mn-lt"/>
+                <a:ea typeface="+mn-ea"/>
+                <a:cs typeface="+mn-cs"/>
+              </a:defRPr>
+            </a:lvl8pPr>
+            <a:lvl9pPr marL="3657600" indent="0">
+              <a:defRPr sz="1100">
+                <a:solidFill>
+                  <a:schemeClr val="lt1"/>
+                </a:solidFill>
+                <a:latin typeface="+mn-lt"/>
+                <a:ea typeface="+mn-ea"/>
+                <a:cs typeface="+mn-cs"/>
+              </a:defRPr>
+            </a:lvl9pPr>
+          </a:lstStyle>
+          <a:p>
+            <a:pPr defTabSz="914400">
+              <a:defRPr/>
+            </a:pPr>
+            <a:r>
+              <a:rPr kumimoji="1" lang="en-US" altLang="ja-JP" sz="600" kern="0" dirty="0">
+                <a:solidFill>
+                  <a:sysClr val="window" lastClr="FFFFFF"/>
+                </a:solidFill>
+                <a:latin typeface="Calibri"/>
+                <a:ea typeface="ＭＳ Ｐゴシック" panose="020B0600070205080204" pitchFamily="50" charset="-128"/>
+              </a:rPr>
+              <a:t>general</a:t>
+            </a:r>
+            <a:endParaRPr kumimoji="1" lang="ja-JP" altLang="en-US" sz="500" b="0" i="0" u="none" strike="noStrike" kern="0" cap="none" spc="0" normalizeH="0" baseline="0" noProof="0" dirty="0">
+              <a:ln>
+                <a:noFill/>
+              </a:ln>
+              <a:solidFill>
+                <a:sysClr val="window" lastClr="FFFFFF"/>
+              </a:solidFill>
+              <a:effectLst/>
+              <a:uLnTx/>
+              <a:uFillTx/>
+              <a:latin typeface="Calibri"/>
+              <a:ea typeface="ＭＳ Ｐゴシック" panose="020B0600070205080204" pitchFamily="50" charset="-128"/>
+              <a:cs typeface="+mn-cs"/>
+            </a:endParaRPr>
+          </a:p>
+        </p:txBody>
+      </p:sp>
+      <p:sp>
+        <p:nvSpPr>
+          <p:cNvPr id="215" name="正方形/長方形 180">
+            <a:extLst>
+              <a:ext uri="{FF2B5EF4-FFF2-40B4-BE49-F238E27FC236}">
+                <a16:creationId xmlns:a16="http://schemas.microsoft.com/office/drawing/2014/main" id="{DCFFE979-6827-DEBF-E7A3-737DB0B82105}"/>
+              </a:ext>
+            </a:extLst>
+          </p:cNvPr>
+          <p:cNvSpPr/>
+          <p:nvPr/>
+        </p:nvSpPr>
+        <p:spPr>
+          <a:xfrm>
+            <a:off x="2757576" y="7835396"/>
+            <a:ext cx="436816" cy="192003"/>
+          </a:xfrm>
+          <a:prstGeom prst="rect">
+            <a:avLst/>
+          </a:prstGeom>
+          <a:solidFill>
+            <a:srgbClr val="4BACC6"/>
+          </a:solidFill>
+          <a:ln w="25400" cap="flat" cmpd="sng" algn="ctr">
+            <a:solidFill>
+              <a:sysClr val="windowText" lastClr="000000"/>
+            </a:solidFill>
+            <a:prstDash val="solid"/>
+          </a:ln>
+          <a:effectLst/>
+        </p:spPr>
+        <p:txBody>
+          <a:bodyPr lIns="0" tIns="0" rIns="0" bIns="0" rtlCol="0" anchor="ctr" anchorCtr="1"/>
+          <a:lstStyle>
+            <a:lvl1pPr marL="0" indent="0">
+              <a:defRPr sz="1100">
+                <a:solidFill>
+                  <a:schemeClr val="lt1"/>
+                </a:solidFill>
+                <a:latin typeface="+mn-lt"/>
+                <a:ea typeface="+mn-ea"/>
+                <a:cs typeface="+mn-cs"/>
+              </a:defRPr>
+            </a:lvl1pPr>
+            <a:lvl2pPr marL="457200" indent="0">
+              <a:defRPr sz="1100">
+                <a:solidFill>
+                  <a:schemeClr val="lt1"/>
+                </a:solidFill>
+                <a:latin typeface="+mn-lt"/>
+                <a:ea typeface="+mn-ea"/>
+                <a:cs typeface="+mn-cs"/>
+              </a:defRPr>
+            </a:lvl2pPr>
+            <a:lvl3pPr marL="914400" indent="0">
+              <a:defRPr sz="1100">
+                <a:solidFill>
+                  <a:schemeClr val="lt1"/>
+                </a:solidFill>
+                <a:latin typeface="+mn-lt"/>
+                <a:ea typeface="+mn-ea"/>
+                <a:cs typeface="+mn-cs"/>
+              </a:defRPr>
+            </a:lvl3pPr>
+            <a:lvl4pPr marL="1371600" indent="0">
+              <a:defRPr sz="1100">
+                <a:solidFill>
+                  <a:schemeClr val="lt1"/>
+                </a:solidFill>
+                <a:latin typeface="+mn-lt"/>
+                <a:ea typeface="+mn-ea"/>
+                <a:cs typeface="+mn-cs"/>
+              </a:defRPr>
+            </a:lvl4pPr>
+            <a:lvl5pPr marL="1828800" indent="0">
+              <a:defRPr sz="1100">
+                <a:solidFill>
+                  <a:schemeClr val="lt1"/>
+                </a:solidFill>
+                <a:latin typeface="+mn-lt"/>
+                <a:ea typeface="+mn-ea"/>
+                <a:cs typeface="+mn-cs"/>
+              </a:defRPr>
+            </a:lvl5pPr>
+            <a:lvl6pPr marL="2286000" indent="0">
+              <a:defRPr sz="1100">
+                <a:solidFill>
+                  <a:schemeClr val="lt1"/>
+                </a:solidFill>
+                <a:latin typeface="+mn-lt"/>
+                <a:ea typeface="+mn-ea"/>
+                <a:cs typeface="+mn-cs"/>
+              </a:defRPr>
+            </a:lvl6pPr>
+            <a:lvl7pPr marL="2743200" indent="0">
+              <a:defRPr sz="1100">
+                <a:solidFill>
+                  <a:schemeClr val="lt1"/>
+                </a:solidFill>
+                <a:latin typeface="+mn-lt"/>
+                <a:ea typeface="+mn-ea"/>
+                <a:cs typeface="+mn-cs"/>
+              </a:defRPr>
+            </a:lvl7pPr>
+            <a:lvl8pPr marL="3200400" indent="0">
+              <a:defRPr sz="1100">
+                <a:solidFill>
+                  <a:schemeClr val="lt1"/>
+                </a:solidFill>
+                <a:latin typeface="+mn-lt"/>
+                <a:ea typeface="+mn-ea"/>
+                <a:cs typeface="+mn-cs"/>
+              </a:defRPr>
+            </a:lvl8pPr>
+            <a:lvl9pPr marL="3657600" indent="0">
+              <a:defRPr sz="1100">
+                <a:solidFill>
+                  <a:schemeClr val="lt1"/>
+                </a:solidFill>
+                <a:latin typeface="+mn-lt"/>
+                <a:ea typeface="+mn-ea"/>
+                <a:cs typeface="+mn-cs"/>
+              </a:defRPr>
+            </a:lvl9pPr>
+          </a:lstStyle>
+          <a:p>
+            <a:pPr defTabSz="914400">
+              <a:defRPr/>
+            </a:pPr>
+            <a:r>
+              <a:rPr kumimoji="1" lang="en-US" altLang="ja-JP" sz="600" kern="0" dirty="0">
+                <a:solidFill>
+                  <a:sysClr val="window" lastClr="FFFFFF"/>
+                </a:solidFill>
+                <a:latin typeface="Calibri"/>
+                <a:ea typeface="ＭＳ Ｐゴシック" panose="020B0600070205080204" pitchFamily="50" charset="-128"/>
+              </a:rPr>
+              <a:t>general</a:t>
+            </a:r>
+            <a:endParaRPr kumimoji="1" lang="ja-JP" altLang="en-US" sz="500" b="0" i="0" u="none" strike="noStrike" kern="0" cap="none" spc="0" normalizeH="0" baseline="0" noProof="0" dirty="0">
+              <a:ln>
+                <a:noFill/>
+              </a:ln>
+              <a:solidFill>
+                <a:sysClr val="window" lastClr="FFFFFF"/>
+              </a:solidFill>
+              <a:effectLst/>
+              <a:uLnTx/>
+              <a:uFillTx/>
+              <a:latin typeface="Calibri"/>
+              <a:ea typeface="ＭＳ Ｐゴシック" panose="020B0600070205080204" pitchFamily="50" charset="-128"/>
+              <a:cs typeface="+mn-cs"/>
+            </a:endParaRPr>
+          </a:p>
+        </p:txBody>
+      </p:sp>
+      <p:sp>
+        <p:nvSpPr>
+          <p:cNvPr id="216" name="正方形/長方形 180">
+            <a:extLst>
+              <a:ext uri="{FF2B5EF4-FFF2-40B4-BE49-F238E27FC236}">
+                <a16:creationId xmlns:a16="http://schemas.microsoft.com/office/drawing/2014/main" id="{DCFFE979-6827-DEBF-E7A3-737DB0B82105}"/>
+              </a:ext>
+            </a:extLst>
+          </p:cNvPr>
+          <p:cNvSpPr/>
+          <p:nvPr/>
+        </p:nvSpPr>
+        <p:spPr>
+          <a:xfrm>
+            <a:off x="3214392" y="7835396"/>
+            <a:ext cx="436816" cy="192003"/>
+          </a:xfrm>
+          <a:prstGeom prst="rect">
+            <a:avLst/>
+          </a:prstGeom>
+          <a:solidFill>
+            <a:srgbClr val="4BACC6"/>
+          </a:solidFill>
+          <a:ln w="25400" cap="flat" cmpd="sng" algn="ctr">
+            <a:solidFill>
+              <a:sysClr val="windowText" lastClr="000000"/>
+            </a:solidFill>
+            <a:prstDash val="solid"/>
+          </a:ln>
+          <a:effectLst/>
+        </p:spPr>
+        <p:txBody>
+          <a:bodyPr lIns="0" tIns="0" rIns="0" bIns="0" rtlCol="0" anchor="ctr" anchorCtr="1"/>
+          <a:lstStyle>
+            <a:lvl1pPr marL="0" indent="0">
+              <a:defRPr sz="1100">
+                <a:solidFill>
+                  <a:schemeClr val="lt1"/>
+                </a:solidFill>
+                <a:latin typeface="+mn-lt"/>
+                <a:ea typeface="+mn-ea"/>
+                <a:cs typeface="+mn-cs"/>
+              </a:defRPr>
+            </a:lvl1pPr>
+            <a:lvl2pPr marL="457200" indent="0">
+              <a:defRPr sz="1100">
+                <a:solidFill>
+                  <a:schemeClr val="lt1"/>
+                </a:solidFill>
+                <a:latin typeface="+mn-lt"/>
+                <a:ea typeface="+mn-ea"/>
+                <a:cs typeface="+mn-cs"/>
+              </a:defRPr>
+            </a:lvl2pPr>
+            <a:lvl3pPr marL="914400" indent="0">
+              <a:defRPr sz="1100">
+                <a:solidFill>
+                  <a:schemeClr val="lt1"/>
+                </a:solidFill>
+                <a:latin typeface="+mn-lt"/>
+                <a:ea typeface="+mn-ea"/>
+                <a:cs typeface="+mn-cs"/>
+              </a:defRPr>
+            </a:lvl3pPr>
+            <a:lvl4pPr marL="1371600" indent="0">
+              <a:defRPr sz="1100">
+                <a:solidFill>
+                  <a:schemeClr val="lt1"/>
+                </a:solidFill>
+                <a:latin typeface="+mn-lt"/>
+                <a:ea typeface="+mn-ea"/>
+                <a:cs typeface="+mn-cs"/>
+              </a:defRPr>
+            </a:lvl4pPr>
+            <a:lvl5pPr marL="1828800" indent="0">
+              <a:defRPr sz="1100">
+                <a:solidFill>
+                  <a:schemeClr val="lt1"/>
+                </a:solidFill>
+                <a:latin typeface="+mn-lt"/>
+                <a:ea typeface="+mn-ea"/>
+                <a:cs typeface="+mn-cs"/>
+              </a:defRPr>
+            </a:lvl5pPr>
+            <a:lvl6pPr marL="2286000" indent="0">
+              <a:defRPr sz="1100">
+                <a:solidFill>
+                  <a:schemeClr val="lt1"/>
+                </a:solidFill>
+                <a:latin typeface="+mn-lt"/>
+                <a:ea typeface="+mn-ea"/>
+                <a:cs typeface="+mn-cs"/>
+              </a:defRPr>
+            </a:lvl6pPr>
+            <a:lvl7pPr marL="2743200" indent="0">
+              <a:defRPr sz="1100">
+                <a:solidFill>
+                  <a:schemeClr val="lt1"/>
+                </a:solidFill>
+                <a:latin typeface="+mn-lt"/>
+                <a:ea typeface="+mn-ea"/>
+                <a:cs typeface="+mn-cs"/>
+              </a:defRPr>
+            </a:lvl7pPr>
+            <a:lvl8pPr marL="3200400" indent="0">
+              <a:defRPr sz="1100">
+                <a:solidFill>
+                  <a:schemeClr val="lt1"/>
+                </a:solidFill>
+                <a:latin typeface="+mn-lt"/>
+                <a:ea typeface="+mn-ea"/>
+                <a:cs typeface="+mn-cs"/>
+              </a:defRPr>
+            </a:lvl8pPr>
+            <a:lvl9pPr marL="3657600" indent="0">
+              <a:defRPr sz="1100">
+                <a:solidFill>
+                  <a:schemeClr val="lt1"/>
+                </a:solidFill>
+                <a:latin typeface="+mn-lt"/>
+                <a:ea typeface="+mn-ea"/>
+                <a:cs typeface="+mn-cs"/>
+              </a:defRPr>
+            </a:lvl9pPr>
+          </a:lstStyle>
+          <a:p>
+            <a:pPr defTabSz="914400">
+              <a:defRPr/>
+            </a:pPr>
+            <a:r>
+              <a:rPr kumimoji="1" lang="en-US" altLang="ja-JP" sz="600" kern="0" dirty="0">
+                <a:solidFill>
+                  <a:sysClr val="window" lastClr="FFFFFF"/>
+                </a:solidFill>
+                <a:latin typeface="Calibri"/>
+                <a:ea typeface="ＭＳ Ｐゴシック" panose="020B0600070205080204" pitchFamily="50" charset="-128"/>
+              </a:rPr>
+              <a:t>general</a:t>
+            </a:r>
+            <a:endParaRPr kumimoji="1" lang="ja-JP" altLang="en-US" sz="500" b="0" i="0" u="none" strike="noStrike" kern="0" cap="none" spc="0" normalizeH="0" baseline="0" noProof="0" dirty="0">
+              <a:ln>
+                <a:noFill/>
+              </a:ln>
+              <a:solidFill>
+                <a:sysClr val="window" lastClr="FFFFFF"/>
+              </a:solidFill>
+              <a:effectLst/>
+              <a:uLnTx/>
+              <a:uFillTx/>
+              <a:latin typeface="Calibri"/>
+              <a:ea typeface="ＭＳ Ｐゴシック" panose="020B0600070205080204" pitchFamily="50" charset="-128"/>
+              <a:cs typeface="+mn-cs"/>
+            </a:endParaRPr>
+          </a:p>
+        </p:txBody>
+      </p:sp>
+      <p:sp>
+        <p:nvSpPr>
+          <p:cNvPr id="217" name="正方形/長方形 180">
+            <a:extLst>
+              <a:ext uri="{FF2B5EF4-FFF2-40B4-BE49-F238E27FC236}">
+                <a16:creationId xmlns:a16="http://schemas.microsoft.com/office/drawing/2014/main" id="{DCFFE979-6827-DEBF-E7A3-737DB0B82105}"/>
+              </a:ext>
+            </a:extLst>
+          </p:cNvPr>
+          <p:cNvSpPr/>
+          <p:nvPr/>
+        </p:nvSpPr>
+        <p:spPr>
+          <a:xfrm>
+            <a:off x="3671208" y="7835396"/>
+            <a:ext cx="436816" cy="192003"/>
+          </a:xfrm>
+          <a:prstGeom prst="rect">
+            <a:avLst/>
+          </a:prstGeom>
+          <a:solidFill>
+            <a:srgbClr val="4BACC6"/>
+          </a:solidFill>
+          <a:ln w="25400" cap="flat" cmpd="sng" algn="ctr">
+            <a:solidFill>
+              <a:sysClr val="windowText" lastClr="000000"/>
+            </a:solidFill>
+            <a:prstDash val="solid"/>
+          </a:ln>
+          <a:effectLst/>
+        </p:spPr>
+        <p:txBody>
+          <a:bodyPr lIns="0" tIns="0" rIns="0" bIns="0" rtlCol="0" anchor="ctr" anchorCtr="1"/>
+          <a:lstStyle>
+            <a:lvl1pPr marL="0" indent="0">
+              <a:defRPr sz="1100">
+                <a:solidFill>
+                  <a:schemeClr val="lt1"/>
+                </a:solidFill>
+                <a:latin typeface="+mn-lt"/>
+                <a:ea typeface="+mn-ea"/>
+                <a:cs typeface="+mn-cs"/>
+              </a:defRPr>
+            </a:lvl1pPr>
+            <a:lvl2pPr marL="457200" indent="0">
+              <a:defRPr sz="1100">
+                <a:solidFill>
+                  <a:schemeClr val="lt1"/>
+                </a:solidFill>
+                <a:latin typeface="+mn-lt"/>
+                <a:ea typeface="+mn-ea"/>
+                <a:cs typeface="+mn-cs"/>
+              </a:defRPr>
+            </a:lvl2pPr>
+            <a:lvl3pPr marL="914400" indent="0">
+              <a:defRPr sz="1100">
+                <a:solidFill>
+                  <a:schemeClr val="lt1"/>
+                </a:solidFill>
+                <a:latin typeface="+mn-lt"/>
+                <a:ea typeface="+mn-ea"/>
+                <a:cs typeface="+mn-cs"/>
+              </a:defRPr>
+            </a:lvl3pPr>
+            <a:lvl4pPr marL="1371600" indent="0">
+              <a:defRPr sz="1100">
+                <a:solidFill>
+                  <a:schemeClr val="lt1"/>
+                </a:solidFill>
+                <a:latin typeface="+mn-lt"/>
+                <a:ea typeface="+mn-ea"/>
+                <a:cs typeface="+mn-cs"/>
+              </a:defRPr>
+            </a:lvl4pPr>
+            <a:lvl5pPr marL="1828800" indent="0">
+              <a:defRPr sz="1100">
+                <a:solidFill>
+                  <a:schemeClr val="lt1"/>
+                </a:solidFill>
+                <a:latin typeface="+mn-lt"/>
+                <a:ea typeface="+mn-ea"/>
+                <a:cs typeface="+mn-cs"/>
+              </a:defRPr>
+            </a:lvl5pPr>
+            <a:lvl6pPr marL="2286000" indent="0">
+              <a:defRPr sz="1100">
+                <a:solidFill>
+                  <a:schemeClr val="lt1"/>
+                </a:solidFill>
+                <a:latin typeface="+mn-lt"/>
+                <a:ea typeface="+mn-ea"/>
+                <a:cs typeface="+mn-cs"/>
+              </a:defRPr>
+            </a:lvl6pPr>
+            <a:lvl7pPr marL="2743200" indent="0">
+              <a:defRPr sz="1100">
+                <a:solidFill>
+                  <a:schemeClr val="lt1"/>
+                </a:solidFill>
+                <a:latin typeface="+mn-lt"/>
+                <a:ea typeface="+mn-ea"/>
+                <a:cs typeface="+mn-cs"/>
+              </a:defRPr>
+            </a:lvl7pPr>
+            <a:lvl8pPr marL="3200400" indent="0">
+              <a:defRPr sz="1100">
+                <a:solidFill>
+                  <a:schemeClr val="lt1"/>
+                </a:solidFill>
+                <a:latin typeface="+mn-lt"/>
+                <a:ea typeface="+mn-ea"/>
+                <a:cs typeface="+mn-cs"/>
+              </a:defRPr>
+            </a:lvl8pPr>
+            <a:lvl9pPr marL="3657600" indent="0">
+              <a:defRPr sz="1100">
+                <a:solidFill>
+                  <a:schemeClr val="lt1"/>
+                </a:solidFill>
+                <a:latin typeface="+mn-lt"/>
+                <a:ea typeface="+mn-ea"/>
+                <a:cs typeface="+mn-cs"/>
+              </a:defRPr>
+            </a:lvl9pPr>
+          </a:lstStyle>
+          <a:p>
+            <a:pPr defTabSz="914400">
+              <a:defRPr/>
+            </a:pPr>
+            <a:r>
+              <a:rPr kumimoji="1" lang="en-US" altLang="ja-JP" sz="600" kern="0" dirty="0">
+                <a:solidFill>
+                  <a:sysClr val="window" lastClr="FFFFFF"/>
+                </a:solidFill>
+                <a:latin typeface="Calibri"/>
+                <a:ea typeface="ＭＳ Ｐゴシック" panose="020B0600070205080204" pitchFamily="50" charset="-128"/>
+              </a:rPr>
+              <a:t>general</a:t>
+            </a:r>
+            <a:endParaRPr kumimoji="1" lang="ja-JP" altLang="en-US" sz="500" b="0" i="0" u="none" strike="noStrike" kern="0" cap="none" spc="0" normalizeH="0" baseline="0" noProof="0" dirty="0">
+              <a:ln>
+                <a:noFill/>
+              </a:ln>
+              <a:solidFill>
+                <a:sysClr val="window" lastClr="FFFFFF"/>
+              </a:solidFill>
+              <a:effectLst/>
+              <a:uLnTx/>
+              <a:uFillTx/>
+              <a:latin typeface="Calibri"/>
+              <a:ea typeface="ＭＳ Ｐゴシック" panose="020B0600070205080204" pitchFamily="50" charset="-128"/>
+              <a:cs typeface="+mn-cs"/>
+            </a:endParaRPr>
+          </a:p>
+        </p:txBody>
+      </p:sp>
+      <p:sp>
+        <p:nvSpPr>
+          <p:cNvPr id="218" name="正方形/長方形 180">
+            <a:extLst>
+              <a:ext uri="{FF2B5EF4-FFF2-40B4-BE49-F238E27FC236}">
+                <a16:creationId xmlns:a16="http://schemas.microsoft.com/office/drawing/2014/main" id="{DCFFE979-6827-DEBF-E7A3-737DB0B82105}"/>
+              </a:ext>
+            </a:extLst>
+          </p:cNvPr>
+          <p:cNvSpPr/>
+          <p:nvPr/>
+        </p:nvSpPr>
+        <p:spPr>
+          <a:xfrm>
+            <a:off x="1843944" y="8235396"/>
+            <a:ext cx="436816" cy="192003"/>
+          </a:xfrm>
+          <a:prstGeom prst="rect">
+            <a:avLst/>
+          </a:prstGeom>
+          <a:solidFill>
+            <a:srgbClr val="4BACC6"/>
+          </a:solidFill>
+          <a:ln w="25400" cap="flat" cmpd="sng" algn="ctr">
+            <a:solidFill>
+              <a:sysClr val="windowText" lastClr="000000"/>
+            </a:solidFill>
+            <a:prstDash val="solid"/>
+          </a:ln>
+          <a:effectLst/>
+        </p:spPr>
+        <p:txBody>
+          <a:bodyPr lIns="0" tIns="0" rIns="0" bIns="0" rtlCol="0" anchor="ctr" anchorCtr="1"/>
+          <a:lstStyle>
+            <a:lvl1pPr marL="0" indent="0">
+              <a:defRPr sz="1100">
+                <a:solidFill>
+                  <a:schemeClr val="lt1"/>
+                </a:solidFill>
+                <a:latin typeface="+mn-lt"/>
+                <a:ea typeface="+mn-ea"/>
+                <a:cs typeface="+mn-cs"/>
+              </a:defRPr>
+            </a:lvl1pPr>
+            <a:lvl2pPr marL="457200" indent="0">
+              <a:defRPr sz="1100">
+                <a:solidFill>
+                  <a:schemeClr val="lt1"/>
+                </a:solidFill>
+                <a:latin typeface="+mn-lt"/>
+                <a:ea typeface="+mn-ea"/>
+                <a:cs typeface="+mn-cs"/>
+              </a:defRPr>
+            </a:lvl2pPr>
+            <a:lvl3pPr marL="914400" indent="0">
+              <a:defRPr sz="1100">
+                <a:solidFill>
+                  <a:schemeClr val="lt1"/>
+                </a:solidFill>
+                <a:latin typeface="+mn-lt"/>
+                <a:ea typeface="+mn-ea"/>
+                <a:cs typeface="+mn-cs"/>
+              </a:defRPr>
+            </a:lvl3pPr>
+            <a:lvl4pPr marL="1371600" indent="0">
+              <a:defRPr sz="1100">
+                <a:solidFill>
+                  <a:schemeClr val="lt1"/>
+                </a:solidFill>
+                <a:latin typeface="+mn-lt"/>
+                <a:ea typeface="+mn-ea"/>
+                <a:cs typeface="+mn-cs"/>
+              </a:defRPr>
+            </a:lvl4pPr>
+            <a:lvl5pPr marL="1828800" indent="0">
+              <a:defRPr sz="1100">
+                <a:solidFill>
+                  <a:schemeClr val="lt1"/>
+                </a:solidFill>
+                <a:latin typeface="+mn-lt"/>
+                <a:ea typeface="+mn-ea"/>
+                <a:cs typeface="+mn-cs"/>
+              </a:defRPr>
+            </a:lvl5pPr>
+            <a:lvl6pPr marL="2286000" indent="0">
+              <a:defRPr sz="1100">
+                <a:solidFill>
+                  <a:schemeClr val="lt1"/>
+                </a:solidFill>
+                <a:latin typeface="+mn-lt"/>
+                <a:ea typeface="+mn-ea"/>
+                <a:cs typeface="+mn-cs"/>
+              </a:defRPr>
+            </a:lvl6pPr>
+            <a:lvl7pPr marL="2743200" indent="0">
+              <a:defRPr sz="1100">
+                <a:solidFill>
+                  <a:schemeClr val="lt1"/>
+                </a:solidFill>
+                <a:latin typeface="+mn-lt"/>
+                <a:ea typeface="+mn-ea"/>
+                <a:cs typeface="+mn-cs"/>
+              </a:defRPr>
+            </a:lvl7pPr>
+            <a:lvl8pPr marL="3200400" indent="0">
+              <a:defRPr sz="1100">
+                <a:solidFill>
+                  <a:schemeClr val="lt1"/>
+                </a:solidFill>
+                <a:latin typeface="+mn-lt"/>
+                <a:ea typeface="+mn-ea"/>
+                <a:cs typeface="+mn-cs"/>
+              </a:defRPr>
+            </a:lvl8pPr>
+            <a:lvl9pPr marL="3657600" indent="0">
+              <a:defRPr sz="1100">
+                <a:solidFill>
+                  <a:schemeClr val="lt1"/>
+                </a:solidFill>
+                <a:latin typeface="+mn-lt"/>
+                <a:ea typeface="+mn-ea"/>
+                <a:cs typeface="+mn-cs"/>
+              </a:defRPr>
+            </a:lvl9pPr>
+          </a:lstStyle>
+          <a:p>
+            <a:pPr defTabSz="914400">
+              <a:defRPr/>
+            </a:pPr>
+            <a:r>
+              <a:rPr kumimoji="1" lang="en-US" altLang="ja-JP" sz="600" kern="0" dirty="0">
+                <a:solidFill>
+                  <a:sysClr val="window" lastClr="FFFFFF"/>
+                </a:solidFill>
+                <a:latin typeface="Calibri"/>
+                <a:ea typeface="ＭＳ Ｐゴシック" panose="020B0600070205080204" pitchFamily="50" charset="-128"/>
+              </a:rPr>
+              <a:t>general</a:t>
+            </a:r>
+            <a:endParaRPr kumimoji="1" lang="ja-JP" altLang="en-US" sz="500" b="0" i="0" u="none" strike="noStrike" kern="0" cap="none" spc="0" normalizeH="0" baseline="0" noProof="0" dirty="0">
+              <a:ln>
+                <a:noFill/>
+              </a:ln>
+              <a:solidFill>
+                <a:sysClr val="window" lastClr="FFFFFF"/>
+              </a:solidFill>
+              <a:effectLst/>
+              <a:uLnTx/>
+              <a:uFillTx/>
+              <a:latin typeface="Calibri"/>
+              <a:ea typeface="ＭＳ Ｐゴシック" panose="020B0600070205080204" pitchFamily="50" charset="-128"/>
+              <a:cs typeface="+mn-cs"/>
+            </a:endParaRPr>
+          </a:p>
+        </p:txBody>
+      </p:sp>
+      <p:sp>
+        <p:nvSpPr>
+          <p:cNvPr id="219" name="正方形/長方形 180">
+            <a:extLst>
+              <a:ext uri="{FF2B5EF4-FFF2-40B4-BE49-F238E27FC236}">
+                <a16:creationId xmlns:a16="http://schemas.microsoft.com/office/drawing/2014/main" id="{DCFFE979-6827-DEBF-E7A3-737DB0B82105}"/>
+              </a:ext>
+            </a:extLst>
+          </p:cNvPr>
+          <p:cNvSpPr/>
+          <p:nvPr/>
+        </p:nvSpPr>
+        <p:spPr>
+          <a:xfrm>
+            <a:off x="2300760" y="8235396"/>
+            <a:ext cx="436816" cy="192003"/>
+          </a:xfrm>
+          <a:prstGeom prst="rect">
+            <a:avLst/>
+          </a:prstGeom>
+          <a:solidFill>
+            <a:srgbClr val="4BACC6"/>
+          </a:solidFill>
+          <a:ln w="25400" cap="flat" cmpd="sng" algn="ctr">
+            <a:solidFill>
+              <a:sysClr val="windowText" lastClr="000000"/>
+            </a:solidFill>
+            <a:prstDash val="solid"/>
+          </a:ln>
+          <a:effectLst/>
+        </p:spPr>
+        <p:txBody>
+          <a:bodyPr lIns="0" tIns="0" rIns="0" bIns="0" rtlCol="0" anchor="ctr" anchorCtr="1"/>
+          <a:lstStyle>
+            <a:lvl1pPr marL="0" indent="0">
+              <a:defRPr sz="1100">
+                <a:solidFill>
+                  <a:schemeClr val="lt1"/>
+                </a:solidFill>
+                <a:latin typeface="+mn-lt"/>
+                <a:ea typeface="+mn-ea"/>
+                <a:cs typeface="+mn-cs"/>
+              </a:defRPr>
+            </a:lvl1pPr>
+            <a:lvl2pPr marL="457200" indent="0">
+              <a:defRPr sz="1100">
+                <a:solidFill>
+                  <a:schemeClr val="lt1"/>
+                </a:solidFill>
+                <a:latin typeface="+mn-lt"/>
+                <a:ea typeface="+mn-ea"/>
+                <a:cs typeface="+mn-cs"/>
+              </a:defRPr>
+            </a:lvl2pPr>
+            <a:lvl3pPr marL="914400" indent="0">
+              <a:defRPr sz="1100">
+                <a:solidFill>
+                  <a:schemeClr val="lt1"/>
+                </a:solidFill>
+                <a:latin typeface="+mn-lt"/>
+                <a:ea typeface="+mn-ea"/>
+                <a:cs typeface="+mn-cs"/>
+              </a:defRPr>
+            </a:lvl3pPr>
+            <a:lvl4pPr marL="1371600" indent="0">
+              <a:defRPr sz="1100">
+                <a:solidFill>
+                  <a:schemeClr val="lt1"/>
+                </a:solidFill>
+                <a:latin typeface="+mn-lt"/>
+                <a:ea typeface="+mn-ea"/>
+                <a:cs typeface="+mn-cs"/>
+              </a:defRPr>
+            </a:lvl4pPr>
+            <a:lvl5pPr marL="1828800" indent="0">
+              <a:defRPr sz="1100">
+                <a:solidFill>
+                  <a:schemeClr val="lt1"/>
+                </a:solidFill>
+                <a:latin typeface="+mn-lt"/>
+                <a:ea typeface="+mn-ea"/>
+                <a:cs typeface="+mn-cs"/>
+              </a:defRPr>
+            </a:lvl5pPr>
+            <a:lvl6pPr marL="2286000" indent="0">
+              <a:defRPr sz="1100">
+                <a:solidFill>
+                  <a:schemeClr val="lt1"/>
+                </a:solidFill>
+                <a:latin typeface="+mn-lt"/>
+                <a:ea typeface="+mn-ea"/>
+                <a:cs typeface="+mn-cs"/>
+              </a:defRPr>
+            </a:lvl6pPr>
+            <a:lvl7pPr marL="2743200" indent="0">
+              <a:defRPr sz="1100">
+                <a:solidFill>
+                  <a:schemeClr val="lt1"/>
+                </a:solidFill>
+                <a:latin typeface="+mn-lt"/>
+                <a:ea typeface="+mn-ea"/>
+                <a:cs typeface="+mn-cs"/>
+              </a:defRPr>
+            </a:lvl7pPr>
+            <a:lvl8pPr marL="3200400" indent="0">
+              <a:defRPr sz="1100">
+                <a:solidFill>
+                  <a:schemeClr val="lt1"/>
+                </a:solidFill>
+                <a:latin typeface="+mn-lt"/>
+                <a:ea typeface="+mn-ea"/>
+                <a:cs typeface="+mn-cs"/>
+              </a:defRPr>
+            </a:lvl8pPr>
+            <a:lvl9pPr marL="3657600" indent="0">
+              <a:defRPr sz="1100">
+                <a:solidFill>
+                  <a:schemeClr val="lt1"/>
+                </a:solidFill>
+                <a:latin typeface="+mn-lt"/>
+                <a:ea typeface="+mn-ea"/>
+                <a:cs typeface="+mn-cs"/>
+              </a:defRPr>
+            </a:lvl9pPr>
+          </a:lstStyle>
+          <a:p>
+            <a:pPr defTabSz="914400">
+              <a:defRPr/>
+            </a:pPr>
+            <a:r>
+              <a:rPr kumimoji="1" lang="en-US" altLang="ja-JP" sz="600" kern="0" dirty="0">
+                <a:solidFill>
+                  <a:sysClr val="window" lastClr="FFFFFF"/>
+                </a:solidFill>
+                <a:latin typeface="Calibri"/>
+                <a:ea typeface="ＭＳ Ｐゴシック" panose="020B0600070205080204" pitchFamily="50" charset="-128"/>
+              </a:rPr>
+              <a:t>general</a:t>
+            </a:r>
+            <a:endParaRPr kumimoji="1" lang="ja-JP" altLang="en-US" sz="500" b="0" i="0" u="none" strike="noStrike" kern="0" cap="none" spc="0" normalizeH="0" baseline="0" noProof="0" dirty="0">
+              <a:ln>
+                <a:noFill/>
+              </a:ln>
+              <a:solidFill>
+                <a:sysClr val="window" lastClr="FFFFFF"/>
+              </a:solidFill>
+              <a:effectLst/>
+              <a:uLnTx/>
+              <a:uFillTx/>
+              <a:latin typeface="Calibri"/>
+              <a:ea typeface="ＭＳ Ｐゴシック" panose="020B0600070205080204" pitchFamily="50" charset="-128"/>
+              <a:cs typeface="+mn-cs"/>
+            </a:endParaRPr>
+          </a:p>
+        </p:txBody>
+      </p:sp>
+      <p:sp>
+        <p:nvSpPr>
+          <p:cNvPr id="220" name="正方形/長方形 180">
+            <a:extLst>
+              <a:ext uri="{FF2B5EF4-FFF2-40B4-BE49-F238E27FC236}">
+                <a16:creationId xmlns:a16="http://schemas.microsoft.com/office/drawing/2014/main" id="{DCFFE979-6827-DEBF-E7A3-737DB0B82105}"/>
+              </a:ext>
+            </a:extLst>
+          </p:cNvPr>
+          <p:cNvSpPr/>
+          <p:nvPr/>
+        </p:nvSpPr>
+        <p:spPr>
+          <a:xfrm>
+            <a:off x="2757576" y="8235396"/>
+            <a:ext cx="436816" cy="192003"/>
+          </a:xfrm>
+          <a:prstGeom prst="rect">
+            <a:avLst/>
+          </a:prstGeom>
+          <a:solidFill>
+            <a:srgbClr val="4BACC6"/>
+          </a:solidFill>
+          <a:ln w="25400" cap="flat" cmpd="sng" algn="ctr">
+            <a:solidFill>
+              <a:sysClr val="windowText" lastClr="000000"/>
+            </a:solidFill>
+            <a:prstDash val="solid"/>
+          </a:ln>
+          <a:effectLst/>
+        </p:spPr>
+        <p:txBody>
+          <a:bodyPr lIns="0" tIns="0" rIns="0" bIns="0" rtlCol="0" anchor="ctr" anchorCtr="1"/>
+          <a:lstStyle>
+            <a:lvl1pPr marL="0" indent="0">
+              <a:defRPr sz="1100">
+                <a:solidFill>
+                  <a:schemeClr val="lt1"/>
+                </a:solidFill>
+                <a:latin typeface="+mn-lt"/>
+                <a:ea typeface="+mn-ea"/>
+                <a:cs typeface="+mn-cs"/>
+              </a:defRPr>
+            </a:lvl1pPr>
+            <a:lvl2pPr marL="457200" indent="0">
+              <a:defRPr sz="1100">
+                <a:solidFill>
+                  <a:schemeClr val="lt1"/>
+                </a:solidFill>
+                <a:latin typeface="+mn-lt"/>
+                <a:ea typeface="+mn-ea"/>
+                <a:cs typeface="+mn-cs"/>
+              </a:defRPr>
+            </a:lvl2pPr>
+            <a:lvl3pPr marL="914400" indent="0">
+              <a:defRPr sz="1100">
+                <a:solidFill>
+                  <a:schemeClr val="lt1"/>
+                </a:solidFill>
+                <a:latin typeface="+mn-lt"/>
+                <a:ea typeface="+mn-ea"/>
+                <a:cs typeface="+mn-cs"/>
+              </a:defRPr>
+            </a:lvl3pPr>
+            <a:lvl4pPr marL="1371600" indent="0">
+              <a:defRPr sz="1100">
+                <a:solidFill>
+                  <a:schemeClr val="lt1"/>
+                </a:solidFill>
+                <a:latin typeface="+mn-lt"/>
+                <a:ea typeface="+mn-ea"/>
+                <a:cs typeface="+mn-cs"/>
+              </a:defRPr>
+            </a:lvl4pPr>
+            <a:lvl5pPr marL="1828800" indent="0">
+              <a:defRPr sz="1100">
+                <a:solidFill>
+                  <a:schemeClr val="lt1"/>
+                </a:solidFill>
+                <a:latin typeface="+mn-lt"/>
+                <a:ea typeface="+mn-ea"/>
+                <a:cs typeface="+mn-cs"/>
+              </a:defRPr>
+            </a:lvl5pPr>
+            <a:lvl6pPr marL="2286000" indent="0">
+              <a:defRPr sz="1100">
+                <a:solidFill>
+                  <a:schemeClr val="lt1"/>
+                </a:solidFill>
+                <a:latin typeface="+mn-lt"/>
+                <a:ea typeface="+mn-ea"/>
+                <a:cs typeface="+mn-cs"/>
+              </a:defRPr>
+            </a:lvl6pPr>
+            <a:lvl7pPr marL="2743200" indent="0">
+              <a:defRPr sz="1100">
+                <a:solidFill>
+                  <a:schemeClr val="lt1"/>
+                </a:solidFill>
+                <a:latin typeface="+mn-lt"/>
+                <a:ea typeface="+mn-ea"/>
+                <a:cs typeface="+mn-cs"/>
+              </a:defRPr>
+            </a:lvl7pPr>
+            <a:lvl8pPr marL="3200400" indent="0">
+              <a:defRPr sz="1100">
+                <a:solidFill>
+                  <a:schemeClr val="lt1"/>
+                </a:solidFill>
+                <a:latin typeface="+mn-lt"/>
+                <a:ea typeface="+mn-ea"/>
+                <a:cs typeface="+mn-cs"/>
+              </a:defRPr>
+            </a:lvl8pPr>
+            <a:lvl9pPr marL="3657600" indent="0">
+              <a:defRPr sz="1100">
+                <a:solidFill>
+                  <a:schemeClr val="lt1"/>
+                </a:solidFill>
+                <a:latin typeface="+mn-lt"/>
+                <a:ea typeface="+mn-ea"/>
+                <a:cs typeface="+mn-cs"/>
+              </a:defRPr>
+            </a:lvl9pPr>
+          </a:lstStyle>
+          <a:p>
+            <a:pPr defTabSz="914400">
+              <a:defRPr/>
+            </a:pPr>
+            <a:r>
+              <a:rPr kumimoji="1" lang="en-US" altLang="ja-JP" sz="600" kern="0" dirty="0">
+                <a:solidFill>
+                  <a:sysClr val="window" lastClr="FFFFFF"/>
+                </a:solidFill>
+                <a:latin typeface="Calibri"/>
+                <a:ea typeface="ＭＳ Ｐゴシック" panose="020B0600070205080204" pitchFamily="50" charset="-128"/>
+              </a:rPr>
+              <a:t>general</a:t>
+            </a:r>
+            <a:endParaRPr kumimoji="1" lang="ja-JP" altLang="en-US" sz="500" b="0" i="0" u="none" strike="noStrike" kern="0" cap="none" spc="0" normalizeH="0" baseline="0" noProof="0" dirty="0">
+              <a:ln>
+                <a:noFill/>
+              </a:ln>
+              <a:solidFill>
+                <a:sysClr val="window" lastClr="FFFFFF"/>
+              </a:solidFill>
+              <a:effectLst/>
+              <a:uLnTx/>
+              <a:uFillTx/>
+              <a:latin typeface="Calibri"/>
+              <a:ea typeface="ＭＳ Ｐゴシック" panose="020B0600070205080204" pitchFamily="50" charset="-128"/>
+              <a:cs typeface="+mn-cs"/>
+            </a:endParaRPr>
+          </a:p>
+        </p:txBody>
+      </p:sp>
+      <p:sp>
+        <p:nvSpPr>
+          <p:cNvPr id="221" name="正方形/長方形 180">
+            <a:extLst>
+              <a:ext uri="{FF2B5EF4-FFF2-40B4-BE49-F238E27FC236}">
+                <a16:creationId xmlns:a16="http://schemas.microsoft.com/office/drawing/2014/main" id="{DCFFE979-6827-DEBF-E7A3-737DB0B82105}"/>
+              </a:ext>
+            </a:extLst>
+          </p:cNvPr>
+          <p:cNvSpPr/>
+          <p:nvPr/>
+        </p:nvSpPr>
+        <p:spPr>
+          <a:xfrm>
+            <a:off x="3214392" y="8235396"/>
+            <a:ext cx="436816" cy="192003"/>
+          </a:xfrm>
+          <a:prstGeom prst="rect">
+            <a:avLst/>
+          </a:prstGeom>
+          <a:solidFill>
+            <a:srgbClr val="4BACC6"/>
+          </a:solidFill>
+          <a:ln w="25400" cap="flat" cmpd="sng" algn="ctr">
+            <a:solidFill>
+              <a:sysClr val="windowText" lastClr="000000"/>
+            </a:solidFill>
+            <a:prstDash val="solid"/>
+          </a:ln>
+          <a:effectLst/>
+        </p:spPr>
+        <p:txBody>
+          <a:bodyPr lIns="0" tIns="0" rIns="0" bIns="0" rtlCol="0" anchor="ctr" anchorCtr="1"/>
+          <a:lstStyle>
+            <a:lvl1pPr marL="0" indent="0">
+              <a:defRPr sz="1100">
+                <a:solidFill>
+                  <a:schemeClr val="lt1"/>
+                </a:solidFill>
+                <a:latin typeface="+mn-lt"/>
+                <a:ea typeface="+mn-ea"/>
+                <a:cs typeface="+mn-cs"/>
+              </a:defRPr>
+            </a:lvl1pPr>
+            <a:lvl2pPr marL="457200" indent="0">
+              <a:defRPr sz="1100">
+                <a:solidFill>
+                  <a:schemeClr val="lt1"/>
+                </a:solidFill>
+                <a:latin typeface="+mn-lt"/>
+                <a:ea typeface="+mn-ea"/>
+                <a:cs typeface="+mn-cs"/>
+              </a:defRPr>
+            </a:lvl2pPr>
+            <a:lvl3pPr marL="914400" indent="0">
+              <a:defRPr sz="1100">
+                <a:solidFill>
+                  <a:schemeClr val="lt1"/>
+                </a:solidFill>
+                <a:latin typeface="+mn-lt"/>
+                <a:ea typeface="+mn-ea"/>
+                <a:cs typeface="+mn-cs"/>
+              </a:defRPr>
+            </a:lvl3pPr>
+            <a:lvl4pPr marL="1371600" indent="0">
+              <a:defRPr sz="1100">
+                <a:solidFill>
+                  <a:schemeClr val="lt1"/>
+                </a:solidFill>
+                <a:latin typeface="+mn-lt"/>
+                <a:ea typeface="+mn-ea"/>
+                <a:cs typeface="+mn-cs"/>
+              </a:defRPr>
+            </a:lvl4pPr>
+            <a:lvl5pPr marL="1828800" indent="0">
+              <a:defRPr sz="1100">
+                <a:solidFill>
+                  <a:schemeClr val="lt1"/>
+                </a:solidFill>
+                <a:latin typeface="+mn-lt"/>
+                <a:ea typeface="+mn-ea"/>
+                <a:cs typeface="+mn-cs"/>
+              </a:defRPr>
+            </a:lvl5pPr>
+            <a:lvl6pPr marL="2286000" indent="0">
+              <a:defRPr sz="1100">
+                <a:solidFill>
+                  <a:schemeClr val="lt1"/>
+                </a:solidFill>
+                <a:latin typeface="+mn-lt"/>
+                <a:ea typeface="+mn-ea"/>
+                <a:cs typeface="+mn-cs"/>
+              </a:defRPr>
+            </a:lvl6pPr>
+            <a:lvl7pPr marL="2743200" indent="0">
+              <a:defRPr sz="1100">
+                <a:solidFill>
+                  <a:schemeClr val="lt1"/>
+                </a:solidFill>
+                <a:latin typeface="+mn-lt"/>
+                <a:ea typeface="+mn-ea"/>
+                <a:cs typeface="+mn-cs"/>
+              </a:defRPr>
+            </a:lvl7pPr>
+            <a:lvl8pPr marL="3200400" indent="0">
+              <a:defRPr sz="1100">
+                <a:solidFill>
+                  <a:schemeClr val="lt1"/>
+                </a:solidFill>
+                <a:latin typeface="+mn-lt"/>
+                <a:ea typeface="+mn-ea"/>
+                <a:cs typeface="+mn-cs"/>
+              </a:defRPr>
+            </a:lvl8pPr>
+            <a:lvl9pPr marL="3657600" indent="0">
+              <a:defRPr sz="1100">
+                <a:solidFill>
+                  <a:schemeClr val="lt1"/>
+                </a:solidFill>
+                <a:latin typeface="+mn-lt"/>
+                <a:ea typeface="+mn-ea"/>
+                <a:cs typeface="+mn-cs"/>
+              </a:defRPr>
+            </a:lvl9pPr>
+          </a:lstStyle>
+          <a:p>
+            <a:pPr defTabSz="914400">
+              <a:defRPr/>
+            </a:pPr>
+            <a:r>
+              <a:rPr kumimoji="1" lang="en-US" altLang="ja-JP" sz="600" kern="0" dirty="0">
+                <a:solidFill>
+                  <a:sysClr val="window" lastClr="FFFFFF"/>
+                </a:solidFill>
+                <a:latin typeface="Calibri"/>
+                <a:ea typeface="ＭＳ Ｐゴシック" panose="020B0600070205080204" pitchFamily="50" charset="-128"/>
+              </a:rPr>
+              <a:t>general</a:t>
+            </a:r>
+            <a:endParaRPr kumimoji="1" lang="ja-JP" altLang="en-US" sz="500" b="0" i="0" u="none" strike="noStrike" kern="0" cap="none" spc="0" normalizeH="0" baseline="0" noProof="0" dirty="0">
+              <a:ln>
+                <a:noFill/>
+              </a:ln>
+              <a:solidFill>
+                <a:sysClr val="window" lastClr="FFFFFF"/>
+              </a:solidFill>
+              <a:effectLst/>
+              <a:uLnTx/>
+              <a:uFillTx/>
+              <a:latin typeface="Calibri"/>
+              <a:ea typeface="ＭＳ Ｐゴシック" panose="020B0600070205080204" pitchFamily="50" charset="-128"/>
+              <a:cs typeface="+mn-cs"/>
+            </a:endParaRPr>
+          </a:p>
+        </p:txBody>
+      </p:sp>
+      <p:sp>
+        <p:nvSpPr>
+          <p:cNvPr id="222" name="正方形/長方形 180">
+            <a:extLst>
+              <a:ext uri="{FF2B5EF4-FFF2-40B4-BE49-F238E27FC236}">
+                <a16:creationId xmlns:a16="http://schemas.microsoft.com/office/drawing/2014/main" id="{DCFFE979-6827-DEBF-E7A3-737DB0B82105}"/>
+              </a:ext>
+            </a:extLst>
+          </p:cNvPr>
+          <p:cNvSpPr/>
+          <p:nvPr/>
+        </p:nvSpPr>
+        <p:spPr>
+          <a:xfrm>
+            <a:off x="3671208" y="8235396"/>
+            <a:ext cx="436816" cy="192003"/>
+          </a:xfrm>
+          <a:prstGeom prst="rect">
+            <a:avLst/>
+          </a:prstGeom>
+          <a:solidFill>
+            <a:srgbClr val="4BACC6"/>
+          </a:solidFill>
+          <a:ln w="25400" cap="flat" cmpd="sng" algn="ctr">
+            <a:solidFill>
+              <a:sysClr val="windowText" lastClr="000000"/>
+            </a:solidFill>
+            <a:prstDash val="solid"/>
+          </a:ln>
+          <a:effectLst/>
+        </p:spPr>
+        <p:txBody>
+          <a:bodyPr lIns="0" tIns="0" rIns="0" bIns="0" rtlCol="0" anchor="ctr" anchorCtr="1"/>
+          <a:lstStyle>
+            <a:lvl1pPr marL="0" indent="0">
+              <a:defRPr sz="1100">
+                <a:solidFill>
+                  <a:schemeClr val="lt1"/>
+                </a:solidFill>
+                <a:latin typeface="+mn-lt"/>
+                <a:ea typeface="+mn-ea"/>
+                <a:cs typeface="+mn-cs"/>
+              </a:defRPr>
+            </a:lvl1pPr>
+            <a:lvl2pPr marL="457200" indent="0">
+              <a:defRPr sz="1100">
+                <a:solidFill>
+                  <a:schemeClr val="lt1"/>
+                </a:solidFill>
+                <a:latin typeface="+mn-lt"/>
+                <a:ea typeface="+mn-ea"/>
+                <a:cs typeface="+mn-cs"/>
+              </a:defRPr>
+            </a:lvl2pPr>
+            <a:lvl3pPr marL="914400" indent="0">
+              <a:defRPr sz="1100">
+                <a:solidFill>
+                  <a:schemeClr val="lt1"/>
+                </a:solidFill>
+                <a:latin typeface="+mn-lt"/>
+                <a:ea typeface="+mn-ea"/>
+                <a:cs typeface="+mn-cs"/>
+              </a:defRPr>
+            </a:lvl3pPr>
+            <a:lvl4pPr marL="1371600" indent="0">
+              <a:defRPr sz="1100">
+                <a:solidFill>
+                  <a:schemeClr val="lt1"/>
+                </a:solidFill>
+                <a:latin typeface="+mn-lt"/>
+                <a:ea typeface="+mn-ea"/>
+                <a:cs typeface="+mn-cs"/>
+              </a:defRPr>
+            </a:lvl4pPr>
+            <a:lvl5pPr marL="1828800" indent="0">
+              <a:defRPr sz="1100">
+                <a:solidFill>
+                  <a:schemeClr val="lt1"/>
+                </a:solidFill>
+                <a:latin typeface="+mn-lt"/>
+                <a:ea typeface="+mn-ea"/>
+                <a:cs typeface="+mn-cs"/>
+              </a:defRPr>
+            </a:lvl5pPr>
+            <a:lvl6pPr marL="2286000" indent="0">
+              <a:defRPr sz="1100">
+                <a:solidFill>
+                  <a:schemeClr val="lt1"/>
+                </a:solidFill>
+                <a:latin typeface="+mn-lt"/>
+                <a:ea typeface="+mn-ea"/>
+                <a:cs typeface="+mn-cs"/>
+              </a:defRPr>
+            </a:lvl6pPr>
+            <a:lvl7pPr marL="2743200" indent="0">
+              <a:defRPr sz="1100">
+                <a:solidFill>
+                  <a:schemeClr val="lt1"/>
+                </a:solidFill>
+                <a:latin typeface="+mn-lt"/>
+                <a:ea typeface="+mn-ea"/>
+                <a:cs typeface="+mn-cs"/>
+              </a:defRPr>
+            </a:lvl7pPr>
+            <a:lvl8pPr marL="3200400" indent="0">
+              <a:defRPr sz="1100">
+                <a:solidFill>
+                  <a:schemeClr val="lt1"/>
+                </a:solidFill>
+                <a:latin typeface="+mn-lt"/>
+                <a:ea typeface="+mn-ea"/>
+                <a:cs typeface="+mn-cs"/>
+              </a:defRPr>
+            </a:lvl8pPr>
+            <a:lvl9pPr marL="3657600" indent="0">
+              <a:defRPr sz="1100">
+                <a:solidFill>
+                  <a:schemeClr val="lt1"/>
+                </a:solidFill>
+                <a:latin typeface="+mn-lt"/>
+                <a:ea typeface="+mn-ea"/>
+                <a:cs typeface="+mn-cs"/>
+              </a:defRPr>
+            </a:lvl9pPr>
+          </a:lstStyle>
+          <a:p>
+            <a:pPr defTabSz="914400">
+              <a:defRPr/>
+            </a:pPr>
+            <a:r>
+              <a:rPr kumimoji="1" lang="en-US" altLang="ja-JP" sz="600" kern="0" dirty="0">
+                <a:solidFill>
+                  <a:sysClr val="window" lastClr="FFFFFF"/>
+                </a:solidFill>
+                <a:latin typeface="Calibri"/>
+                <a:ea typeface="ＭＳ Ｐゴシック" panose="020B0600070205080204" pitchFamily="50" charset="-128"/>
+              </a:rPr>
+              <a:t>general</a:t>
+            </a:r>
+            <a:endParaRPr kumimoji="1" lang="ja-JP" altLang="en-US" sz="500" b="0" i="0" u="none" strike="noStrike" kern="0" cap="none" spc="0" normalizeH="0" baseline="0" noProof="0" dirty="0">
+              <a:ln>
+                <a:noFill/>
+              </a:ln>
+              <a:solidFill>
+                <a:sysClr val="window" lastClr="FFFFFF"/>
+              </a:solidFill>
+              <a:effectLst/>
+              <a:uLnTx/>
+              <a:uFillTx/>
+              <a:latin typeface="Calibri"/>
+              <a:ea typeface="ＭＳ Ｐゴシック" panose="020B0600070205080204" pitchFamily="50" charset="-128"/>
+              <a:cs typeface="+mn-cs"/>
+            </a:endParaRPr>
+          </a:p>
+        </p:txBody>
+      </p:sp>
+      <p:sp>
+        <p:nvSpPr>
+          <p:cNvPr id="223" name="正方形/長方形 180">
+            <a:extLst>
+              <a:ext uri="{FF2B5EF4-FFF2-40B4-BE49-F238E27FC236}">
+                <a16:creationId xmlns:a16="http://schemas.microsoft.com/office/drawing/2014/main" id="{DCFFE979-6827-DEBF-E7A3-737DB0B82105}"/>
+              </a:ext>
+            </a:extLst>
+          </p:cNvPr>
+          <p:cNvSpPr/>
+          <p:nvPr/>
+        </p:nvSpPr>
+        <p:spPr>
+          <a:xfrm>
+            <a:off x="1843944" y="8635396"/>
+            <a:ext cx="436816" cy="192003"/>
+          </a:xfrm>
+          <a:prstGeom prst="rect">
+            <a:avLst/>
+          </a:prstGeom>
+          <a:solidFill>
+            <a:srgbClr val="4BACC6"/>
+          </a:solidFill>
+          <a:ln w="25400" cap="flat" cmpd="sng" algn="ctr">
+            <a:solidFill>
+              <a:sysClr val="windowText" lastClr="000000"/>
+            </a:solidFill>
+            <a:prstDash val="solid"/>
+          </a:ln>
+          <a:effectLst/>
+        </p:spPr>
+        <p:txBody>
+          <a:bodyPr lIns="0" tIns="0" rIns="0" bIns="0" rtlCol="0" anchor="ctr" anchorCtr="1"/>
+          <a:lstStyle>
+            <a:lvl1pPr marL="0" indent="0">
+              <a:defRPr sz="1100">
+                <a:solidFill>
+                  <a:schemeClr val="lt1"/>
+                </a:solidFill>
+                <a:latin typeface="+mn-lt"/>
+                <a:ea typeface="+mn-ea"/>
+                <a:cs typeface="+mn-cs"/>
+              </a:defRPr>
+            </a:lvl1pPr>
+            <a:lvl2pPr marL="457200" indent="0">
+              <a:defRPr sz="1100">
+                <a:solidFill>
+                  <a:schemeClr val="lt1"/>
+                </a:solidFill>
+                <a:latin typeface="+mn-lt"/>
+                <a:ea typeface="+mn-ea"/>
+                <a:cs typeface="+mn-cs"/>
+              </a:defRPr>
+            </a:lvl2pPr>
+            <a:lvl3pPr marL="914400" indent="0">
+              <a:defRPr sz="1100">
+                <a:solidFill>
+                  <a:schemeClr val="lt1"/>
+                </a:solidFill>
+                <a:latin typeface="+mn-lt"/>
+                <a:ea typeface="+mn-ea"/>
+                <a:cs typeface="+mn-cs"/>
+              </a:defRPr>
+            </a:lvl3pPr>
+            <a:lvl4pPr marL="1371600" indent="0">
+              <a:defRPr sz="1100">
+                <a:solidFill>
+                  <a:schemeClr val="lt1"/>
+                </a:solidFill>
+                <a:latin typeface="+mn-lt"/>
+                <a:ea typeface="+mn-ea"/>
+                <a:cs typeface="+mn-cs"/>
+              </a:defRPr>
+            </a:lvl4pPr>
+            <a:lvl5pPr marL="1828800" indent="0">
+              <a:defRPr sz="1100">
+                <a:solidFill>
+                  <a:schemeClr val="lt1"/>
+                </a:solidFill>
+                <a:latin typeface="+mn-lt"/>
+                <a:ea typeface="+mn-ea"/>
+                <a:cs typeface="+mn-cs"/>
+              </a:defRPr>
+            </a:lvl5pPr>
+            <a:lvl6pPr marL="2286000" indent="0">
+              <a:defRPr sz="1100">
+                <a:solidFill>
+                  <a:schemeClr val="lt1"/>
+                </a:solidFill>
+                <a:latin typeface="+mn-lt"/>
+                <a:ea typeface="+mn-ea"/>
+                <a:cs typeface="+mn-cs"/>
+              </a:defRPr>
+            </a:lvl6pPr>
+            <a:lvl7pPr marL="2743200" indent="0">
+              <a:defRPr sz="1100">
+                <a:solidFill>
+                  <a:schemeClr val="lt1"/>
+                </a:solidFill>
+                <a:latin typeface="+mn-lt"/>
+                <a:ea typeface="+mn-ea"/>
+                <a:cs typeface="+mn-cs"/>
+              </a:defRPr>
+            </a:lvl7pPr>
+            <a:lvl8pPr marL="3200400" indent="0">
+              <a:defRPr sz="1100">
+                <a:solidFill>
+                  <a:schemeClr val="lt1"/>
+                </a:solidFill>
+                <a:latin typeface="+mn-lt"/>
+                <a:ea typeface="+mn-ea"/>
+                <a:cs typeface="+mn-cs"/>
+              </a:defRPr>
+            </a:lvl8pPr>
+            <a:lvl9pPr marL="3657600" indent="0">
+              <a:defRPr sz="1100">
+                <a:solidFill>
+                  <a:schemeClr val="lt1"/>
+                </a:solidFill>
+                <a:latin typeface="+mn-lt"/>
+                <a:ea typeface="+mn-ea"/>
+                <a:cs typeface="+mn-cs"/>
+              </a:defRPr>
+            </a:lvl9pPr>
+          </a:lstStyle>
+          <a:p>
+            <a:pPr defTabSz="914400">
+              <a:defRPr/>
+            </a:pPr>
+            <a:r>
+              <a:rPr kumimoji="1" lang="en-US" altLang="ja-JP" sz="600" kern="0" dirty="0">
+                <a:solidFill>
+                  <a:sysClr val="window" lastClr="FFFFFF"/>
+                </a:solidFill>
+                <a:latin typeface="Calibri"/>
+                <a:ea typeface="ＭＳ Ｐゴシック" panose="020B0600070205080204" pitchFamily="50" charset="-128"/>
+              </a:rPr>
+              <a:t>general</a:t>
+            </a:r>
+            <a:endParaRPr kumimoji="1" lang="ja-JP" altLang="en-US" sz="500" b="0" i="0" u="none" strike="noStrike" kern="0" cap="none" spc="0" normalizeH="0" baseline="0" noProof="0" dirty="0">
+              <a:ln>
+                <a:noFill/>
+              </a:ln>
+              <a:solidFill>
+                <a:sysClr val="window" lastClr="FFFFFF"/>
+              </a:solidFill>
+              <a:effectLst/>
+              <a:uLnTx/>
+              <a:uFillTx/>
+              <a:latin typeface="Calibri"/>
+              <a:ea typeface="ＭＳ Ｐゴシック" panose="020B0600070205080204" pitchFamily="50" charset="-128"/>
+              <a:cs typeface="+mn-cs"/>
+            </a:endParaRPr>
+          </a:p>
+        </p:txBody>
+      </p:sp>
+      <p:sp>
+        <p:nvSpPr>
+          <p:cNvPr id="224" name="正方形/長方形 180">
+            <a:extLst>
+              <a:ext uri="{FF2B5EF4-FFF2-40B4-BE49-F238E27FC236}">
+                <a16:creationId xmlns:a16="http://schemas.microsoft.com/office/drawing/2014/main" id="{DCFFE979-6827-DEBF-E7A3-737DB0B82105}"/>
+              </a:ext>
+            </a:extLst>
+          </p:cNvPr>
+          <p:cNvSpPr/>
+          <p:nvPr/>
+        </p:nvSpPr>
+        <p:spPr>
+          <a:xfrm>
+            <a:off x="2300760" y="8635396"/>
+            <a:ext cx="436816" cy="192003"/>
+          </a:xfrm>
+          <a:prstGeom prst="rect">
+            <a:avLst/>
+          </a:prstGeom>
+          <a:solidFill>
+            <a:srgbClr val="4BACC6"/>
+          </a:solidFill>
+          <a:ln w="25400" cap="flat" cmpd="sng" algn="ctr">
+            <a:solidFill>
+              <a:sysClr val="windowText" lastClr="000000"/>
+            </a:solidFill>
+            <a:prstDash val="solid"/>
+          </a:ln>
+          <a:effectLst/>
+        </p:spPr>
+        <p:txBody>
+          <a:bodyPr lIns="0" tIns="0" rIns="0" bIns="0" rtlCol="0" anchor="ctr" anchorCtr="1"/>
+          <a:lstStyle>
+            <a:lvl1pPr marL="0" indent="0">
+              <a:defRPr sz="1100">
+                <a:solidFill>
+                  <a:schemeClr val="lt1"/>
+                </a:solidFill>
+                <a:latin typeface="+mn-lt"/>
+                <a:ea typeface="+mn-ea"/>
+                <a:cs typeface="+mn-cs"/>
+              </a:defRPr>
+            </a:lvl1pPr>
+            <a:lvl2pPr marL="457200" indent="0">
+              <a:defRPr sz="1100">
+                <a:solidFill>
+                  <a:schemeClr val="lt1"/>
+                </a:solidFill>
+                <a:latin typeface="+mn-lt"/>
+                <a:ea typeface="+mn-ea"/>
+                <a:cs typeface="+mn-cs"/>
+              </a:defRPr>
+            </a:lvl2pPr>
+            <a:lvl3pPr marL="914400" indent="0">
+              <a:defRPr sz="1100">
+                <a:solidFill>
+                  <a:schemeClr val="lt1"/>
+                </a:solidFill>
+                <a:latin typeface="+mn-lt"/>
+                <a:ea typeface="+mn-ea"/>
+                <a:cs typeface="+mn-cs"/>
+              </a:defRPr>
+            </a:lvl3pPr>
+            <a:lvl4pPr marL="1371600" indent="0">
+              <a:defRPr sz="1100">
+                <a:solidFill>
+                  <a:schemeClr val="lt1"/>
+                </a:solidFill>
+                <a:latin typeface="+mn-lt"/>
+                <a:ea typeface="+mn-ea"/>
+                <a:cs typeface="+mn-cs"/>
+              </a:defRPr>
+            </a:lvl4pPr>
+            <a:lvl5pPr marL="1828800" indent="0">
+              <a:defRPr sz="1100">
+                <a:solidFill>
+                  <a:schemeClr val="lt1"/>
+                </a:solidFill>
+                <a:latin typeface="+mn-lt"/>
+                <a:ea typeface="+mn-ea"/>
+                <a:cs typeface="+mn-cs"/>
+              </a:defRPr>
+            </a:lvl5pPr>
+            <a:lvl6pPr marL="2286000" indent="0">
+              <a:defRPr sz="1100">
+                <a:solidFill>
+                  <a:schemeClr val="lt1"/>
+                </a:solidFill>
+                <a:latin typeface="+mn-lt"/>
+                <a:ea typeface="+mn-ea"/>
+                <a:cs typeface="+mn-cs"/>
+              </a:defRPr>
+            </a:lvl6pPr>
+            <a:lvl7pPr marL="2743200" indent="0">
+              <a:defRPr sz="1100">
+                <a:solidFill>
+                  <a:schemeClr val="lt1"/>
+                </a:solidFill>
+                <a:latin typeface="+mn-lt"/>
+                <a:ea typeface="+mn-ea"/>
+                <a:cs typeface="+mn-cs"/>
+              </a:defRPr>
+            </a:lvl7pPr>
+            <a:lvl8pPr marL="3200400" indent="0">
+              <a:defRPr sz="1100">
+                <a:solidFill>
+                  <a:schemeClr val="lt1"/>
+                </a:solidFill>
+                <a:latin typeface="+mn-lt"/>
+                <a:ea typeface="+mn-ea"/>
+                <a:cs typeface="+mn-cs"/>
+              </a:defRPr>
+            </a:lvl8pPr>
+            <a:lvl9pPr marL="3657600" indent="0">
+              <a:defRPr sz="1100">
+                <a:solidFill>
+                  <a:schemeClr val="lt1"/>
+                </a:solidFill>
+                <a:latin typeface="+mn-lt"/>
+                <a:ea typeface="+mn-ea"/>
+                <a:cs typeface="+mn-cs"/>
+              </a:defRPr>
+            </a:lvl9pPr>
+          </a:lstStyle>
+          <a:p>
+            <a:pPr defTabSz="914400">
+              <a:defRPr/>
+            </a:pPr>
+            <a:r>
+              <a:rPr kumimoji="1" lang="en-US" altLang="ja-JP" sz="600" kern="0" dirty="0">
+                <a:solidFill>
+                  <a:sysClr val="window" lastClr="FFFFFF"/>
+                </a:solidFill>
+                <a:latin typeface="Calibri"/>
+                <a:ea typeface="ＭＳ Ｐゴシック" panose="020B0600070205080204" pitchFamily="50" charset="-128"/>
+              </a:rPr>
+              <a:t>general</a:t>
+            </a:r>
+            <a:endParaRPr kumimoji="1" lang="ja-JP" altLang="en-US" sz="500" b="0" i="0" u="none" strike="noStrike" kern="0" cap="none" spc="0" normalizeH="0" baseline="0" noProof="0" dirty="0">
+              <a:ln>
+                <a:noFill/>
+              </a:ln>
+              <a:solidFill>
+                <a:sysClr val="window" lastClr="FFFFFF"/>
+              </a:solidFill>
+              <a:effectLst/>
+              <a:uLnTx/>
+              <a:uFillTx/>
+              <a:latin typeface="Calibri"/>
+              <a:ea typeface="ＭＳ Ｐゴシック" panose="020B0600070205080204" pitchFamily="50" charset="-128"/>
+              <a:cs typeface="+mn-cs"/>
+            </a:endParaRPr>
+          </a:p>
+        </p:txBody>
+      </p:sp>
+      <p:sp>
+        <p:nvSpPr>
+          <p:cNvPr id="225" name="正方形/長方形 180">
+            <a:extLst>
+              <a:ext uri="{FF2B5EF4-FFF2-40B4-BE49-F238E27FC236}">
+                <a16:creationId xmlns:a16="http://schemas.microsoft.com/office/drawing/2014/main" id="{DCFFE979-6827-DEBF-E7A3-737DB0B82105}"/>
+              </a:ext>
+            </a:extLst>
+          </p:cNvPr>
+          <p:cNvSpPr/>
+          <p:nvPr/>
+        </p:nvSpPr>
+        <p:spPr>
+          <a:xfrm>
+            <a:off x="2757576" y="8635396"/>
+            <a:ext cx="436816" cy="192003"/>
+          </a:xfrm>
+          <a:prstGeom prst="rect">
+            <a:avLst/>
+          </a:prstGeom>
+          <a:solidFill>
+            <a:srgbClr val="4BACC6"/>
+          </a:solidFill>
+          <a:ln w="25400" cap="flat" cmpd="sng" algn="ctr">
+            <a:solidFill>
+              <a:sysClr val="windowText" lastClr="000000"/>
+            </a:solidFill>
+            <a:prstDash val="solid"/>
+          </a:ln>
+          <a:effectLst/>
+        </p:spPr>
+        <p:txBody>
+          <a:bodyPr lIns="0" tIns="0" rIns="0" bIns="0" rtlCol="0" anchor="ctr" anchorCtr="1"/>
+          <a:lstStyle>
+            <a:lvl1pPr marL="0" indent="0">
+              <a:defRPr sz="1100">
+                <a:solidFill>
+                  <a:schemeClr val="lt1"/>
+                </a:solidFill>
+                <a:latin typeface="+mn-lt"/>
+                <a:ea typeface="+mn-ea"/>
+                <a:cs typeface="+mn-cs"/>
+              </a:defRPr>
+            </a:lvl1pPr>
+            <a:lvl2pPr marL="457200" indent="0">
+              <a:defRPr sz="1100">
+                <a:solidFill>
+                  <a:schemeClr val="lt1"/>
+                </a:solidFill>
+                <a:latin typeface="+mn-lt"/>
+                <a:ea typeface="+mn-ea"/>
+                <a:cs typeface="+mn-cs"/>
+              </a:defRPr>
+            </a:lvl2pPr>
+            <a:lvl3pPr marL="914400" indent="0">
+              <a:defRPr sz="1100">
+                <a:solidFill>
+                  <a:schemeClr val="lt1"/>
+                </a:solidFill>
+                <a:latin typeface="+mn-lt"/>
+                <a:ea typeface="+mn-ea"/>
+                <a:cs typeface="+mn-cs"/>
+              </a:defRPr>
+            </a:lvl3pPr>
+            <a:lvl4pPr marL="1371600" indent="0">
+              <a:defRPr sz="1100">
+                <a:solidFill>
+                  <a:schemeClr val="lt1"/>
+                </a:solidFill>
+                <a:latin typeface="+mn-lt"/>
+                <a:ea typeface="+mn-ea"/>
+                <a:cs typeface="+mn-cs"/>
+              </a:defRPr>
+            </a:lvl4pPr>
+            <a:lvl5pPr marL="1828800" indent="0">
+              <a:defRPr sz="1100">
+                <a:solidFill>
+                  <a:schemeClr val="lt1"/>
+                </a:solidFill>
+                <a:latin typeface="+mn-lt"/>
+                <a:ea typeface="+mn-ea"/>
+                <a:cs typeface="+mn-cs"/>
+              </a:defRPr>
+            </a:lvl5pPr>
+            <a:lvl6pPr marL="2286000" indent="0">
+              <a:defRPr sz="1100">
+                <a:solidFill>
+                  <a:schemeClr val="lt1"/>
+                </a:solidFill>
+                <a:latin typeface="+mn-lt"/>
+                <a:ea typeface="+mn-ea"/>
+                <a:cs typeface="+mn-cs"/>
+              </a:defRPr>
+            </a:lvl6pPr>
+            <a:lvl7pPr marL="2743200" indent="0">
+              <a:defRPr sz="1100">
+                <a:solidFill>
+                  <a:schemeClr val="lt1"/>
+                </a:solidFill>
+                <a:latin typeface="+mn-lt"/>
+                <a:ea typeface="+mn-ea"/>
+                <a:cs typeface="+mn-cs"/>
+              </a:defRPr>
+            </a:lvl7pPr>
+            <a:lvl8pPr marL="3200400" indent="0">
+              <a:defRPr sz="1100">
+                <a:solidFill>
+                  <a:schemeClr val="lt1"/>
+                </a:solidFill>
+                <a:latin typeface="+mn-lt"/>
+                <a:ea typeface="+mn-ea"/>
+                <a:cs typeface="+mn-cs"/>
+              </a:defRPr>
+            </a:lvl8pPr>
+            <a:lvl9pPr marL="3657600" indent="0">
+              <a:defRPr sz="1100">
+                <a:solidFill>
+                  <a:schemeClr val="lt1"/>
+                </a:solidFill>
+                <a:latin typeface="+mn-lt"/>
+                <a:ea typeface="+mn-ea"/>
+                <a:cs typeface="+mn-cs"/>
+              </a:defRPr>
+            </a:lvl9pPr>
+          </a:lstStyle>
+          <a:p>
+            <a:pPr defTabSz="914400">
+              <a:defRPr/>
+            </a:pPr>
+            <a:r>
+              <a:rPr kumimoji="1" lang="en-US" altLang="ja-JP" sz="600" kern="0" dirty="0">
+                <a:solidFill>
+                  <a:sysClr val="window" lastClr="FFFFFF"/>
+                </a:solidFill>
+                <a:latin typeface="Calibri"/>
+                <a:ea typeface="ＭＳ Ｐゴシック" panose="020B0600070205080204" pitchFamily="50" charset="-128"/>
+              </a:rPr>
+              <a:t>general</a:t>
+            </a:r>
+            <a:endParaRPr kumimoji="1" lang="ja-JP" altLang="en-US" sz="500" b="0" i="0" u="none" strike="noStrike" kern="0" cap="none" spc="0" normalizeH="0" baseline="0" noProof="0" dirty="0">
+              <a:ln>
+                <a:noFill/>
+              </a:ln>
+              <a:solidFill>
+                <a:sysClr val="window" lastClr="FFFFFF"/>
+              </a:solidFill>
+              <a:effectLst/>
+              <a:uLnTx/>
+              <a:uFillTx/>
+              <a:latin typeface="Calibri"/>
+              <a:ea typeface="ＭＳ Ｐゴシック" panose="020B0600070205080204" pitchFamily="50" charset="-128"/>
+              <a:cs typeface="+mn-cs"/>
+            </a:endParaRPr>
+          </a:p>
+        </p:txBody>
+      </p:sp>
+      <p:sp>
+        <p:nvSpPr>
+          <p:cNvPr id="226" name="正方形/長方形 180">
+            <a:extLst>
+              <a:ext uri="{FF2B5EF4-FFF2-40B4-BE49-F238E27FC236}">
+                <a16:creationId xmlns:a16="http://schemas.microsoft.com/office/drawing/2014/main" id="{DCFFE979-6827-DEBF-E7A3-737DB0B82105}"/>
+              </a:ext>
+            </a:extLst>
+          </p:cNvPr>
+          <p:cNvSpPr/>
+          <p:nvPr/>
+        </p:nvSpPr>
+        <p:spPr>
+          <a:xfrm>
+            <a:off x="3214392" y="8635396"/>
+            <a:ext cx="436816" cy="192003"/>
+          </a:xfrm>
+          <a:prstGeom prst="rect">
+            <a:avLst/>
+          </a:prstGeom>
+          <a:solidFill>
+            <a:srgbClr val="4BACC6"/>
+          </a:solidFill>
+          <a:ln w="25400" cap="flat" cmpd="sng" algn="ctr">
+            <a:solidFill>
+              <a:sysClr val="windowText" lastClr="000000"/>
+            </a:solidFill>
+            <a:prstDash val="solid"/>
+          </a:ln>
+          <a:effectLst/>
+        </p:spPr>
+        <p:txBody>
+          <a:bodyPr lIns="0" tIns="0" rIns="0" bIns="0" rtlCol="0" anchor="ctr" anchorCtr="1"/>
+          <a:lstStyle>
+            <a:lvl1pPr marL="0" indent="0">
+              <a:defRPr sz="1100">
+                <a:solidFill>
+                  <a:schemeClr val="lt1"/>
+                </a:solidFill>
+                <a:latin typeface="+mn-lt"/>
+                <a:ea typeface="+mn-ea"/>
+                <a:cs typeface="+mn-cs"/>
+              </a:defRPr>
+            </a:lvl1pPr>
+            <a:lvl2pPr marL="457200" indent="0">
+              <a:defRPr sz="1100">
+                <a:solidFill>
+                  <a:schemeClr val="lt1"/>
+                </a:solidFill>
+                <a:latin typeface="+mn-lt"/>
+                <a:ea typeface="+mn-ea"/>
+                <a:cs typeface="+mn-cs"/>
+              </a:defRPr>
+            </a:lvl2pPr>
+            <a:lvl3pPr marL="914400" indent="0">
+              <a:defRPr sz="1100">
+                <a:solidFill>
+                  <a:schemeClr val="lt1"/>
+                </a:solidFill>
+                <a:latin typeface="+mn-lt"/>
+                <a:ea typeface="+mn-ea"/>
+                <a:cs typeface="+mn-cs"/>
+              </a:defRPr>
+            </a:lvl3pPr>
+            <a:lvl4pPr marL="1371600" indent="0">
+              <a:defRPr sz="1100">
+                <a:solidFill>
+                  <a:schemeClr val="lt1"/>
+                </a:solidFill>
+                <a:latin typeface="+mn-lt"/>
+                <a:ea typeface="+mn-ea"/>
+                <a:cs typeface="+mn-cs"/>
+              </a:defRPr>
+            </a:lvl4pPr>
+            <a:lvl5pPr marL="1828800" indent="0">
+              <a:defRPr sz="1100">
+                <a:solidFill>
+                  <a:schemeClr val="lt1"/>
+                </a:solidFill>
+                <a:latin typeface="+mn-lt"/>
+                <a:ea typeface="+mn-ea"/>
+                <a:cs typeface="+mn-cs"/>
+              </a:defRPr>
+            </a:lvl5pPr>
+            <a:lvl6pPr marL="2286000" indent="0">
+              <a:defRPr sz="1100">
+                <a:solidFill>
+                  <a:schemeClr val="lt1"/>
+                </a:solidFill>
+                <a:latin typeface="+mn-lt"/>
+                <a:ea typeface="+mn-ea"/>
+                <a:cs typeface="+mn-cs"/>
+              </a:defRPr>
+            </a:lvl6pPr>
+            <a:lvl7pPr marL="2743200" indent="0">
+              <a:defRPr sz="1100">
+                <a:solidFill>
+                  <a:schemeClr val="lt1"/>
+                </a:solidFill>
+                <a:latin typeface="+mn-lt"/>
+                <a:ea typeface="+mn-ea"/>
+                <a:cs typeface="+mn-cs"/>
+              </a:defRPr>
+            </a:lvl7pPr>
+            <a:lvl8pPr marL="3200400" indent="0">
+              <a:defRPr sz="1100">
+                <a:solidFill>
+                  <a:schemeClr val="lt1"/>
+                </a:solidFill>
+                <a:latin typeface="+mn-lt"/>
+                <a:ea typeface="+mn-ea"/>
+                <a:cs typeface="+mn-cs"/>
+              </a:defRPr>
+            </a:lvl8pPr>
+            <a:lvl9pPr marL="3657600" indent="0">
+              <a:defRPr sz="1100">
+                <a:solidFill>
+                  <a:schemeClr val="lt1"/>
+                </a:solidFill>
+                <a:latin typeface="+mn-lt"/>
+                <a:ea typeface="+mn-ea"/>
+                <a:cs typeface="+mn-cs"/>
+              </a:defRPr>
+            </a:lvl9pPr>
+          </a:lstStyle>
+          <a:p>
+            <a:pPr defTabSz="914400">
+              <a:defRPr/>
+            </a:pPr>
+            <a:r>
+              <a:rPr kumimoji="1" lang="en-US" altLang="ja-JP" sz="600" kern="0" dirty="0">
+                <a:solidFill>
+                  <a:sysClr val="window" lastClr="FFFFFF"/>
+                </a:solidFill>
+                <a:latin typeface="Calibri"/>
+                <a:ea typeface="ＭＳ Ｐゴシック" panose="020B0600070205080204" pitchFamily="50" charset="-128"/>
+              </a:rPr>
+              <a:t>general</a:t>
+            </a:r>
+            <a:endParaRPr kumimoji="1" lang="ja-JP" altLang="en-US" sz="500" b="0" i="0" u="none" strike="noStrike" kern="0" cap="none" spc="0" normalizeH="0" baseline="0" noProof="0" dirty="0">
+              <a:ln>
+                <a:noFill/>
+              </a:ln>
+              <a:solidFill>
+                <a:sysClr val="window" lastClr="FFFFFF"/>
+              </a:solidFill>
+              <a:effectLst/>
+              <a:uLnTx/>
+              <a:uFillTx/>
+              <a:latin typeface="Calibri"/>
+              <a:ea typeface="ＭＳ Ｐゴシック" panose="020B0600070205080204" pitchFamily="50" charset="-128"/>
+              <a:cs typeface="+mn-cs"/>
+            </a:endParaRPr>
+          </a:p>
+        </p:txBody>
+      </p:sp>
+      <p:sp>
+        <p:nvSpPr>
+          <p:cNvPr id="227" name="正方形/長方形 180">
+            <a:extLst>
+              <a:ext uri="{FF2B5EF4-FFF2-40B4-BE49-F238E27FC236}">
+                <a16:creationId xmlns:a16="http://schemas.microsoft.com/office/drawing/2014/main" id="{DCFFE979-6827-DEBF-E7A3-737DB0B82105}"/>
+              </a:ext>
+            </a:extLst>
+          </p:cNvPr>
+          <p:cNvSpPr/>
+          <p:nvPr/>
+        </p:nvSpPr>
+        <p:spPr>
+          <a:xfrm>
+            <a:off x="3671208" y="8635396"/>
+            <a:ext cx="436816" cy="192003"/>
+          </a:xfrm>
+          <a:prstGeom prst="rect">
+            <a:avLst/>
+          </a:prstGeom>
+          <a:solidFill>
+            <a:srgbClr val="4BACC6"/>
+          </a:solidFill>
+          <a:ln w="25400" cap="flat" cmpd="sng" algn="ctr">
+            <a:solidFill>
+              <a:sysClr val="windowText" lastClr="000000"/>
+            </a:solidFill>
+            <a:prstDash val="solid"/>
+          </a:ln>
+          <a:effectLst/>
+        </p:spPr>
+        <p:txBody>
+          <a:bodyPr lIns="0" tIns="0" rIns="0" bIns="0" rtlCol="0" anchor="ctr" anchorCtr="1"/>
+          <a:lstStyle>
+            <a:lvl1pPr marL="0" indent="0">
+              <a:defRPr sz="1100">
+                <a:solidFill>
+                  <a:schemeClr val="lt1"/>
+                </a:solidFill>
+                <a:latin typeface="+mn-lt"/>
+                <a:ea typeface="+mn-ea"/>
+                <a:cs typeface="+mn-cs"/>
+              </a:defRPr>
+            </a:lvl1pPr>
+            <a:lvl2pPr marL="457200" indent="0">
+              <a:defRPr sz="1100">
+                <a:solidFill>
+                  <a:schemeClr val="lt1"/>
+                </a:solidFill>
+                <a:latin typeface="+mn-lt"/>
+                <a:ea typeface="+mn-ea"/>
+                <a:cs typeface="+mn-cs"/>
+              </a:defRPr>
+            </a:lvl2pPr>
+            <a:lvl3pPr marL="914400" indent="0">
+              <a:defRPr sz="1100">
+                <a:solidFill>
+                  <a:schemeClr val="lt1"/>
+                </a:solidFill>
+                <a:latin typeface="+mn-lt"/>
+                <a:ea typeface="+mn-ea"/>
+                <a:cs typeface="+mn-cs"/>
+              </a:defRPr>
+            </a:lvl3pPr>
+            <a:lvl4pPr marL="1371600" indent="0">
+              <a:defRPr sz="1100">
+                <a:solidFill>
+                  <a:schemeClr val="lt1"/>
+                </a:solidFill>
+                <a:latin typeface="+mn-lt"/>
+                <a:ea typeface="+mn-ea"/>
+                <a:cs typeface="+mn-cs"/>
+              </a:defRPr>
+            </a:lvl4pPr>
+            <a:lvl5pPr marL="1828800" indent="0">
+              <a:defRPr sz="1100">
+                <a:solidFill>
+                  <a:schemeClr val="lt1"/>
+                </a:solidFill>
+                <a:latin typeface="+mn-lt"/>
+                <a:ea typeface="+mn-ea"/>
+                <a:cs typeface="+mn-cs"/>
+              </a:defRPr>
+            </a:lvl5pPr>
+            <a:lvl6pPr marL="2286000" indent="0">
+              <a:defRPr sz="1100">
+                <a:solidFill>
+                  <a:schemeClr val="lt1"/>
+                </a:solidFill>
+                <a:latin typeface="+mn-lt"/>
+                <a:ea typeface="+mn-ea"/>
+                <a:cs typeface="+mn-cs"/>
+              </a:defRPr>
+            </a:lvl6pPr>
+            <a:lvl7pPr marL="2743200" indent="0">
+              <a:defRPr sz="1100">
+                <a:solidFill>
+                  <a:schemeClr val="lt1"/>
+                </a:solidFill>
+                <a:latin typeface="+mn-lt"/>
+                <a:ea typeface="+mn-ea"/>
+                <a:cs typeface="+mn-cs"/>
+              </a:defRPr>
+            </a:lvl7pPr>
+            <a:lvl8pPr marL="3200400" indent="0">
+              <a:defRPr sz="1100">
+                <a:solidFill>
+                  <a:schemeClr val="lt1"/>
+                </a:solidFill>
+                <a:latin typeface="+mn-lt"/>
+                <a:ea typeface="+mn-ea"/>
+                <a:cs typeface="+mn-cs"/>
+              </a:defRPr>
+            </a:lvl8pPr>
+            <a:lvl9pPr marL="3657600" indent="0">
+              <a:defRPr sz="1100">
+                <a:solidFill>
+                  <a:schemeClr val="lt1"/>
+                </a:solidFill>
+                <a:latin typeface="+mn-lt"/>
+                <a:ea typeface="+mn-ea"/>
+                <a:cs typeface="+mn-cs"/>
+              </a:defRPr>
+            </a:lvl9pPr>
+          </a:lstStyle>
+          <a:p>
+            <a:pPr defTabSz="914400">
+              <a:defRPr/>
+            </a:pPr>
+            <a:r>
+              <a:rPr kumimoji="1" lang="en-US" altLang="ja-JP" sz="600" kern="0" dirty="0">
+                <a:solidFill>
+                  <a:sysClr val="window" lastClr="FFFFFF"/>
+                </a:solidFill>
+                <a:latin typeface="Calibri"/>
+                <a:ea typeface="ＭＳ Ｐゴシック" panose="020B0600070205080204" pitchFamily="50" charset="-128"/>
+              </a:rPr>
+              <a:t>general</a:t>
+            </a:r>
+            <a:endParaRPr kumimoji="1" lang="ja-JP" altLang="en-US" sz="500" b="0" i="0" u="none" strike="noStrike" kern="0" cap="none" spc="0" normalizeH="0" baseline="0" noProof="0" dirty="0">
+              <a:ln>
+                <a:noFill/>
+              </a:ln>
+              <a:solidFill>
+                <a:sysClr val="window" lastClr="FFFFFF"/>
+              </a:solidFill>
+              <a:effectLst/>
+              <a:uLnTx/>
+              <a:uFillTx/>
+              <a:latin typeface="Calibri"/>
+              <a:ea typeface="ＭＳ Ｐゴシック" panose="020B0600070205080204" pitchFamily="50" charset="-128"/>
+              <a:cs typeface="+mn-cs"/>
+            </a:endParaRPr>
+          </a:p>
+        </p:txBody>
+      </p:sp>
+      <p:sp>
+        <p:nvSpPr>
+          <p:cNvPr id="228" name="正方形/長方形 186">
+            <a:extLst>
+              <a:ext uri="{FF2B5EF4-FFF2-40B4-BE49-F238E27FC236}">
+                <a16:creationId xmlns:a16="http://schemas.microsoft.com/office/drawing/2014/main" id="{691FF50D-B26B-3AE6-972B-AB9315D96FA0}"/>
+              </a:ext>
+            </a:extLst>
+          </p:cNvPr>
+          <p:cNvSpPr/>
+          <p:nvPr/>
+        </p:nvSpPr>
+        <p:spPr>
+          <a:xfrm>
+            <a:off x="2072352" y="9035396"/>
+            <a:ext cx="436816" cy="192003"/>
+          </a:xfrm>
+          <a:prstGeom prst="rect">
+            <a:avLst/>
+          </a:prstGeom>
+          <a:solidFill>
+            <a:srgbClr val="4BACC6"/>
+          </a:solidFill>
+          <a:ln w="25400" cap="flat" cmpd="sng" algn="ctr">
+            <a:solidFill>
+              <a:sysClr val="windowText" lastClr="000000"/>
+            </a:solidFill>
+            <a:prstDash val="solid"/>
+          </a:ln>
+          <a:effectLst/>
+        </p:spPr>
+        <p:txBody>
+          <a:bodyPr lIns="0" tIns="0" rIns="0" bIns="0" rtlCol="0" anchor="ctr" anchorCtr="1"/>
+          <a:lstStyle>
+            <a:lvl1pPr marL="0" indent="0">
+              <a:defRPr sz="1100">
+                <a:solidFill>
+                  <a:schemeClr val="lt1"/>
+                </a:solidFill>
+                <a:latin typeface="+mn-lt"/>
+                <a:ea typeface="+mn-ea"/>
+                <a:cs typeface="+mn-cs"/>
+              </a:defRPr>
+            </a:lvl1pPr>
+            <a:lvl2pPr marL="457200" indent="0">
+              <a:defRPr sz="1100">
+                <a:solidFill>
+                  <a:schemeClr val="lt1"/>
+                </a:solidFill>
+                <a:latin typeface="+mn-lt"/>
+                <a:ea typeface="+mn-ea"/>
+                <a:cs typeface="+mn-cs"/>
+              </a:defRPr>
+            </a:lvl2pPr>
+            <a:lvl3pPr marL="914400" indent="0">
+              <a:defRPr sz="1100">
+                <a:solidFill>
+                  <a:schemeClr val="lt1"/>
+                </a:solidFill>
+                <a:latin typeface="+mn-lt"/>
+                <a:ea typeface="+mn-ea"/>
+                <a:cs typeface="+mn-cs"/>
+              </a:defRPr>
+            </a:lvl3pPr>
+            <a:lvl4pPr marL="1371600" indent="0">
+              <a:defRPr sz="1100">
+                <a:solidFill>
+                  <a:schemeClr val="lt1"/>
+                </a:solidFill>
+                <a:latin typeface="+mn-lt"/>
+                <a:ea typeface="+mn-ea"/>
+                <a:cs typeface="+mn-cs"/>
+              </a:defRPr>
+            </a:lvl4pPr>
+            <a:lvl5pPr marL="1828800" indent="0">
+              <a:defRPr sz="1100">
+                <a:solidFill>
+                  <a:schemeClr val="lt1"/>
+                </a:solidFill>
+                <a:latin typeface="+mn-lt"/>
+                <a:ea typeface="+mn-ea"/>
+                <a:cs typeface="+mn-cs"/>
+              </a:defRPr>
+            </a:lvl5pPr>
+            <a:lvl6pPr marL="2286000" indent="0">
+              <a:defRPr sz="1100">
+                <a:solidFill>
+                  <a:schemeClr val="lt1"/>
+                </a:solidFill>
+                <a:latin typeface="+mn-lt"/>
+                <a:ea typeface="+mn-ea"/>
+                <a:cs typeface="+mn-cs"/>
+              </a:defRPr>
+            </a:lvl6pPr>
+            <a:lvl7pPr marL="2743200" indent="0">
+              <a:defRPr sz="1100">
+                <a:solidFill>
+                  <a:schemeClr val="lt1"/>
+                </a:solidFill>
+                <a:latin typeface="+mn-lt"/>
+                <a:ea typeface="+mn-ea"/>
+                <a:cs typeface="+mn-cs"/>
+              </a:defRPr>
+            </a:lvl7pPr>
+            <a:lvl8pPr marL="3200400" indent="0">
+              <a:defRPr sz="1100">
+                <a:solidFill>
+                  <a:schemeClr val="lt1"/>
+                </a:solidFill>
+                <a:latin typeface="+mn-lt"/>
+                <a:ea typeface="+mn-ea"/>
+                <a:cs typeface="+mn-cs"/>
+              </a:defRPr>
+            </a:lvl8pPr>
+            <a:lvl9pPr marL="3657600" indent="0">
+              <a:defRPr sz="1100">
+                <a:solidFill>
+                  <a:schemeClr val="lt1"/>
+                </a:solidFill>
+                <a:latin typeface="+mn-lt"/>
+                <a:ea typeface="+mn-ea"/>
+                <a:cs typeface="+mn-cs"/>
+              </a:defRPr>
+            </a:lvl9pPr>
+          </a:lstStyle>
+          <a:p>
+            <a:pPr defTabSz="914400">
+              <a:defRPr/>
+            </a:pPr>
+            <a:r>
+              <a:rPr kumimoji="1" lang="en-US" altLang="ja-JP" sz="600" kern="0" dirty="0">
+                <a:solidFill>
+                  <a:sysClr val="window" lastClr="FFFFFF"/>
+                </a:solidFill>
+                <a:latin typeface="Calibri"/>
+                <a:ea typeface="ＭＳ Ｐゴシック" panose="020B0600070205080204" pitchFamily="50" charset="-128"/>
+              </a:rPr>
+              <a:t>resource</a:t>
+            </a:r>
+            <a:endParaRPr kumimoji="1" lang="ja-JP" altLang="en-US" sz="500" b="0" i="0" u="none" strike="noStrike" kern="0" cap="none" spc="0" normalizeH="0" baseline="0" noProof="0" dirty="0">
+              <a:ln>
+                <a:noFill/>
+              </a:ln>
+              <a:solidFill>
+                <a:sysClr val="window" lastClr="FFFFFF"/>
+              </a:solidFill>
+              <a:effectLst/>
+              <a:uLnTx/>
+              <a:uFillTx/>
+              <a:latin typeface="Calibri"/>
+              <a:ea typeface="ＭＳ Ｐゴシック" panose="020B0600070205080204" pitchFamily="50" charset="-128"/>
+              <a:cs typeface="+mn-cs"/>
+            </a:endParaRPr>
+          </a:p>
+        </p:txBody>
+      </p:sp>
+      <p:sp>
+        <p:nvSpPr>
+          <p:cNvPr id="229" name="正方形/長方形 188">
+            <a:extLst>
+              <a:ext uri="{FF2B5EF4-FFF2-40B4-BE49-F238E27FC236}">
+                <a16:creationId xmlns:a16="http://schemas.microsoft.com/office/drawing/2014/main" id="{850D3B30-7CC8-BF81-BC70-9E6AB6445636}"/>
+              </a:ext>
+            </a:extLst>
+          </p:cNvPr>
+          <p:cNvSpPr/>
+          <p:nvPr/>
+        </p:nvSpPr>
+        <p:spPr>
+          <a:xfrm>
+            <a:off x="2529168" y="9035396"/>
+            <a:ext cx="436816" cy="192003"/>
+          </a:xfrm>
+          <a:prstGeom prst="rect">
+            <a:avLst/>
+          </a:prstGeom>
+          <a:solidFill>
+            <a:srgbClr val="4BACC6"/>
+          </a:solidFill>
+          <a:ln w="25400" cap="flat" cmpd="sng" algn="ctr">
+            <a:solidFill>
+              <a:sysClr val="windowText" lastClr="000000"/>
+            </a:solidFill>
+            <a:prstDash val="solid"/>
+          </a:ln>
+          <a:effectLst/>
+        </p:spPr>
+        <p:txBody>
+          <a:bodyPr lIns="0" tIns="0" rIns="0" bIns="0" rtlCol="0" anchor="ctr" anchorCtr="1"/>
+          <a:lstStyle>
+            <a:lvl1pPr marL="0" indent="0">
+              <a:defRPr sz="1100">
+                <a:solidFill>
+                  <a:schemeClr val="lt1"/>
+                </a:solidFill>
+                <a:latin typeface="+mn-lt"/>
+                <a:ea typeface="+mn-ea"/>
+                <a:cs typeface="+mn-cs"/>
+              </a:defRPr>
+            </a:lvl1pPr>
+            <a:lvl2pPr marL="457200" indent="0">
+              <a:defRPr sz="1100">
+                <a:solidFill>
+                  <a:schemeClr val="lt1"/>
+                </a:solidFill>
+                <a:latin typeface="+mn-lt"/>
+                <a:ea typeface="+mn-ea"/>
+                <a:cs typeface="+mn-cs"/>
+              </a:defRPr>
+            </a:lvl2pPr>
+            <a:lvl3pPr marL="914400" indent="0">
+              <a:defRPr sz="1100">
+                <a:solidFill>
+                  <a:schemeClr val="lt1"/>
+                </a:solidFill>
+                <a:latin typeface="+mn-lt"/>
+                <a:ea typeface="+mn-ea"/>
+                <a:cs typeface="+mn-cs"/>
+              </a:defRPr>
+            </a:lvl3pPr>
+            <a:lvl4pPr marL="1371600" indent="0">
+              <a:defRPr sz="1100">
+                <a:solidFill>
+                  <a:schemeClr val="lt1"/>
+                </a:solidFill>
+                <a:latin typeface="+mn-lt"/>
+                <a:ea typeface="+mn-ea"/>
+                <a:cs typeface="+mn-cs"/>
+              </a:defRPr>
+            </a:lvl4pPr>
+            <a:lvl5pPr marL="1828800" indent="0">
+              <a:defRPr sz="1100">
+                <a:solidFill>
+                  <a:schemeClr val="lt1"/>
+                </a:solidFill>
+                <a:latin typeface="+mn-lt"/>
+                <a:ea typeface="+mn-ea"/>
+                <a:cs typeface="+mn-cs"/>
+              </a:defRPr>
+            </a:lvl5pPr>
+            <a:lvl6pPr marL="2286000" indent="0">
+              <a:defRPr sz="1100">
+                <a:solidFill>
+                  <a:schemeClr val="lt1"/>
+                </a:solidFill>
+                <a:latin typeface="+mn-lt"/>
+                <a:ea typeface="+mn-ea"/>
+                <a:cs typeface="+mn-cs"/>
+              </a:defRPr>
+            </a:lvl6pPr>
+            <a:lvl7pPr marL="2743200" indent="0">
+              <a:defRPr sz="1100">
+                <a:solidFill>
+                  <a:schemeClr val="lt1"/>
+                </a:solidFill>
+                <a:latin typeface="+mn-lt"/>
+                <a:ea typeface="+mn-ea"/>
+                <a:cs typeface="+mn-cs"/>
+              </a:defRPr>
+            </a:lvl7pPr>
+            <a:lvl8pPr marL="3200400" indent="0">
+              <a:defRPr sz="1100">
+                <a:solidFill>
+                  <a:schemeClr val="lt1"/>
+                </a:solidFill>
+                <a:latin typeface="+mn-lt"/>
+                <a:ea typeface="+mn-ea"/>
+                <a:cs typeface="+mn-cs"/>
+              </a:defRPr>
+            </a:lvl8pPr>
+            <a:lvl9pPr marL="3657600" indent="0">
+              <a:defRPr sz="1100">
+                <a:solidFill>
+                  <a:schemeClr val="lt1"/>
+                </a:solidFill>
+                <a:latin typeface="+mn-lt"/>
+                <a:ea typeface="+mn-ea"/>
+                <a:cs typeface="+mn-cs"/>
+              </a:defRPr>
+            </a:lvl9pPr>
+          </a:lstStyle>
+          <a:p>
+            <a:pPr defTabSz="914400">
+              <a:defRPr/>
+            </a:pPr>
+            <a:r>
+              <a:rPr kumimoji="1" lang="en-US" altLang="ja-JP" sz="600" kern="0" dirty="0">
+                <a:solidFill>
+                  <a:sysClr val="window" lastClr="FFFFFF"/>
+                </a:solidFill>
+                <a:latin typeface="Calibri"/>
+                <a:ea typeface="ＭＳ Ｐゴシック" panose="020B0600070205080204" pitchFamily="50" charset="-128"/>
+              </a:rPr>
+              <a:t>resource</a:t>
+            </a:r>
+            <a:endParaRPr kumimoji="1" lang="ja-JP" altLang="en-US" sz="500" b="0" i="0" u="none" strike="noStrike" kern="0" cap="none" spc="0" normalizeH="0" baseline="0" noProof="0" dirty="0">
+              <a:ln>
+                <a:noFill/>
+              </a:ln>
+              <a:solidFill>
+                <a:sysClr val="window" lastClr="FFFFFF"/>
+              </a:solidFill>
+              <a:effectLst/>
+              <a:uLnTx/>
+              <a:uFillTx/>
+              <a:latin typeface="Calibri"/>
+              <a:ea typeface="ＭＳ Ｐゴシック" panose="020B0600070205080204" pitchFamily="50" charset="-128"/>
+              <a:cs typeface="+mn-cs"/>
+            </a:endParaRPr>
+          </a:p>
+        </p:txBody>
+      </p:sp>
+      <p:sp>
+        <p:nvSpPr>
+          <p:cNvPr id="230" name="正方形/長方形 190">
+            <a:extLst>
+              <a:ext uri="{FF2B5EF4-FFF2-40B4-BE49-F238E27FC236}">
+                <a16:creationId xmlns:a16="http://schemas.microsoft.com/office/drawing/2014/main" id="{2B7BC6FF-3A7E-2B26-F43F-C74B22D9AF96}"/>
+              </a:ext>
+            </a:extLst>
+          </p:cNvPr>
+          <p:cNvSpPr/>
+          <p:nvPr/>
+        </p:nvSpPr>
+        <p:spPr>
+          <a:xfrm>
+            <a:off x="2985984" y="9035396"/>
+            <a:ext cx="436816" cy="192003"/>
+          </a:xfrm>
+          <a:prstGeom prst="rect">
+            <a:avLst/>
+          </a:prstGeom>
+          <a:solidFill>
+            <a:srgbClr val="4BACC6"/>
+          </a:solidFill>
+          <a:ln w="25400" cap="flat" cmpd="sng" algn="ctr">
+            <a:solidFill>
+              <a:sysClr val="windowText" lastClr="000000"/>
+            </a:solidFill>
+            <a:prstDash val="solid"/>
+          </a:ln>
+          <a:effectLst/>
+        </p:spPr>
+        <p:txBody>
+          <a:bodyPr lIns="0" tIns="0" rIns="0" bIns="0" rtlCol="0" anchor="ctr" anchorCtr="1"/>
+          <a:lstStyle>
+            <a:lvl1pPr marL="0" indent="0">
+              <a:defRPr sz="1100">
+                <a:solidFill>
+                  <a:schemeClr val="lt1"/>
+                </a:solidFill>
+                <a:latin typeface="+mn-lt"/>
+                <a:ea typeface="+mn-ea"/>
+                <a:cs typeface="+mn-cs"/>
+              </a:defRPr>
+            </a:lvl1pPr>
+            <a:lvl2pPr marL="457200" indent="0">
+              <a:defRPr sz="1100">
+                <a:solidFill>
+                  <a:schemeClr val="lt1"/>
+                </a:solidFill>
+                <a:latin typeface="+mn-lt"/>
+                <a:ea typeface="+mn-ea"/>
+                <a:cs typeface="+mn-cs"/>
+              </a:defRPr>
+            </a:lvl2pPr>
+            <a:lvl3pPr marL="914400" indent="0">
+              <a:defRPr sz="1100">
+                <a:solidFill>
+                  <a:schemeClr val="lt1"/>
+                </a:solidFill>
+                <a:latin typeface="+mn-lt"/>
+                <a:ea typeface="+mn-ea"/>
+                <a:cs typeface="+mn-cs"/>
+              </a:defRPr>
+            </a:lvl3pPr>
+            <a:lvl4pPr marL="1371600" indent="0">
+              <a:defRPr sz="1100">
+                <a:solidFill>
+                  <a:schemeClr val="lt1"/>
+                </a:solidFill>
+                <a:latin typeface="+mn-lt"/>
+                <a:ea typeface="+mn-ea"/>
+                <a:cs typeface="+mn-cs"/>
+              </a:defRPr>
+            </a:lvl4pPr>
+            <a:lvl5pPr marL="1828800" indent="0">
+              <a:defRPr sz="1100">
+                <a:solidFill>
+                  <a:schemeClr val="lt1"/>
+                </a:solidFill>
+                <a:latin typeface="+mn-lt"/>
+                <a:ea typeface="+mn-ea"/>
+                <a:cs typeface="+mn-cs"/>
+              </a:defRPr>
+            </a:lvl5pPr>
+            <a:lvl6pPr marL="2286000" indent="0">
+              <a:defRPr sz="1100">
+                <a:solidFill>
+                  <a:schemeClr val="lt1"/>
+                </a:solidFill>
+                <a:latin typeface="+mn-lt"/>
+                <a:ea typeface="+mn-ea"/>
+                <a:cs typeface="+mn-cs"/>
+              </a:defRPr>
+            </a:lvl6pPr>
+            <a:lvl7pPr marL="2743200" indent="0">
+              <a:defRPr sz="1100">
+                <a:solidFill>
+                  <a:schemeClr val="lt1"/>
+                </a:solidFill>
+                <a:latin typeface="+mn-lt"/>
+                <a:ea typeface="+mn-ea"/>
+                <a:cs typeface="+mn-cs"/>
+              </a:defRPr>
+            </a:lvl7pPr>
+            <a:lvl8pPr marL="3200400" indent="0">
+              <a:defRPr sz="1100">
+                <a:solidFill>
+                  <a:schemeClr val="lt1"/>
+                </a:solidFill>
+                <a:latin typeface="+mn-lt"/>
+                <a:ea typeface="+mn-ea"/>
+                <a:cs typeface="+mn-cs"/>
+              </a:defRPr>
+            </a:lvl8pPr>
+            <a:lvl9pPr marL="3657600" indent="0">
+              <a:defRPr sz="1100">
+                <a:solidFill>
+                  <a:schemeClr val="lt1"/>
+                </a:solidFill>
+                <a:latin typeface="+mn-lt"/>
+                <a:ea typeface="+mn-ea"/>
+                <a:cs typeface="+mn-cs"/>
+              </a:defRPr>
+            </a:lvl9pPr>
+          </a:lstStyle>
+          <a:p>
+            <a:pPr defTabSz="914400">
+              <a:defRPr/>
+            </a:pPr>
+            <a:r>
+              <a:rPr kumimoji="1" lang="en-US" altLang="ja-JP" sz="600" kern="0" dirty="0">
+                <a:solidFill>
+                  <a:sysClr val="window" lastClr="FFFFFF"/>
+                </a:solidFill>
+                <a:latin typeface="Calibri"/>
+                <a:ea typeface="ＭＳ Ｐゴシック" panose="020B0600070205080204" pitchFamily="50" charset="-128"/>
+              </a:rPr>
+              <a:t>resource</a:t>
+            </a:r>
+            <a:endParaRPr kumimoji="1" lang="ja-JP" altLang="en-US" sz="500" b="0" i="0" u="none" strike="noStrike" kern="0" cap="none" spc="0" normalizeH="0" baseline="0" noProof="0" dirty="0">
+              <a:ln>
+                <a:noFill/>
+              </a:ln>
+              <a:solidFill>
+                <a:sysClr val="window" lastClr="FFFFFF"/>
+              </a:solidFill>
+              <a:effectLst/>
+              <a:uLnTx/>
+              <a:uFillTx/>
+              <a:latin typeface="Calibri"/>
+              <a:ea typeface="ＭＳ Ｐゴシック" panose="020B0600070205080204" pitchFamily="50" charset="-128"/>
+              <a:cs typeface="+mn-cs"/>
+            </a:endParaRPr>
+          </a:p>
+        </p:txBody>
+      </p:sp>
+      <p:sp>
+        <p:nvSpPr>
+          <p:cNvPr id="231" name="正方形/長方形 192">
+            <a:extLst>
+              <a:ext uri="{FF2B5EF4-FFF2-40B4-BE49-F238E27FC236}">
+                <a16:creationId xmlns:a16="http://schemas.microsoft.com/office/drawing/2014/main" id="{5CC4A228-6FFA-04E1-127D-7EAC917168BB}"/>
+              </a:ext>
+            </a:extLst>
+          </p:cNvPr>
+          <p:cNvSpPr/>
+          <p:nvPr/>
+        </p:nvSpPr>
+        <p:spPr>
+          <a:xfrm>
+            <a:off x="3442800" y="9035396"/>
+            <a:ext cx="436816" cy="192003"/>
+          </a:xfrm>
+          <a:prstGeom prst="rect">
+            <a:avLst/>
+          </a:prstGeom>
+          <a:solidFill>
+            <a:srgbClr val="4BACC6"/>
+          </a:solidFill>
+          <a:ln w="25400" cap="flat" cmpd="sng" algn="ctr">
+            <a:solidFill>
+              <a:sysClr val="windowText" lastClr="000000"/>
+            </a:solidFill>
+            <a:prstDash val="solid"/>
+          </a:ln>
+          <a:effectLst/>
+        </p:spPr>
+        <p:txBody>
+          <a:bodyPr lIns="0" tIns="0" rIns="0" bIns="0" rtlCol="0" anchor="ctr" anchorCtr="1"/>
+          <a:lstStyle>
+            <a:lvl1pPr marL="0" indent="0">
+              <a:defRPr sz="1100">
+                <a:solidFill>
+                  <a:schemeClr val="lt1"/>
+                </a:solidFill>
+                <a:latin typeface="+mn-lt"/>
+                <a:ea typeface="+mn-ea"/>
+                <a:cs typeface="+mn-cs"/>
+              </a:defRPr>
+            </a:lvl1pPr>
+            <a:lvl2pPr marL="457200" indent="0">
+              <a:defRPr sz="1100">
+                <a:solidFill>
+                  <a:schemeClr val="lt1"/>
+                </a:solidFill>
+                <a:latin typeface="+mn-lt"/>
+                <a:ea typeface="+mn-ea"/>
+                <a:cs typeface="+mn-cs"/>
+              </a:defRPr>
+            </a:lvl2pPr>
+            <a:lvl3pPr marL="914400" indent="0">
+              <a:defRPr sz="1100">
+                <a:solidFill>
+                  <a:schemeClr val="lt1"/>
+                </a:solidFill>
+                <a:latin typeface="+mn-lt"/>
+                <a:ea typeface="+mn-ea"/>
+                <a:cs typeface="+mn-cs"/>
+              </a:defRPr>
+            </a:lvl3pPr>
+            <a:lvl4pPr marL="1371600" indent="0">
+              <a:defRPr sz="1100">
+                <a:solidFill>
+                  <a:schemeClr val="lt1"/>
+                </a:solidFill>
+                <a:latin typeface="+mn-lt"/>
+                <a:ea typeface="+mn-ea"/>
+                <a:cs typeface="+mn-cs"/>
+              </a:defRPr>
+            </a:lvl4pPr>
+            <a:lvl5pPr marL="1828800" indent="0">
+              <a:defRPr sz="1100">
+                <a:solidFill>
+                  <a:schemeClr val="lt1"/>
+                </a:solidFill>
+                <a:latin typeface="+mn-lt"/>
+                <a:ea typeface="+mn-ea"/>
+                <a:cs typeface="+mn-cs"/>
+              </a:defRPr>
+            </a:lvl5pPr>
+            <a:lvl6pPr marL="2286000" indent="0">
+              <a:defRPr sz="1100">
+                <a:solidFill>
+                  <a:schemeClr val="lt1"/>
+                </a:solidFill>
+                <a:latin typeface="+mn-lt"/>
+                <a:ea typeface="+mn-ea"/>
+                <a:cs typeface="+mn-cs"/>
+              </a:defRPr>
+            </a:lvl6pPr>
+            <a:lvl7pPr marL="2743200" indent="0">
+              <a:defRPr sz="1100">
+                <a:solidFill>
+                  <a:schemeClr val="lt1"/>
+                </a:solidFill>
+                <a:latin typeface="+mn-lt"/>
+                <a:ea typeface="+mn-ea"/>
+                <a:cs typeface="+mn-cs"/>
+              </a:defRPr>
+            </a:lvl7pPr>
+            <a:lvl8pPr marL="3200400" indent="0">
+              <a:defRPr sz="1100">
+                <a:solidFill>
+                  <a:schemeClr val="lt1"/>
+                </a:solidFill>
+                <a:latin typeface="+mn-lt"/>
+                <a:ea typeface="+mn-ea"/>
+                <a:cs typeface="+mn-cs"/>
+              </a:defRPr>
+            </a:lvl8pPr>
+            <a:lvl9pPr marL="3657600" indent="0">
+              <a:defRPr sz="1100">
+                <a:solidFill>
+                  <a:schemeClr val="lt1"/>
+                </a:solidFill>
+                <a:latin typeface="+mn-lt"/>
+                <a:ea typeface="+mn-ea"/>
+                <a:cs typeface="+mn-cs"/>
+              </a:defRPr>
+            </a:lvl9pPr>
+          </a:lstStyle>
+          <a:p>
+            <a:pPr defTabSz="914400">
+              <a:defRPr/>
+            </a:pPr>
+            <a:r>
+              <a:rPr kumimoji="1" lang="en-US" altLang="ja-JP" sz="600" kern="0" dirty="0">
+                <a:solidFill>
+                  <a:sysClr val="window" lastClr="FFFFFF"/>
+                </a:solidFill>
+                <a:latin typeface="Calibri"/>
+                <a:ea typeface="ＭＳ Ｐゴシック" panose="020B0600070205080204" pitchFamily="50" charset="-128"/>
+              </a:rPr>
+              <a:t>resource</a:t>
+            </a:r>
+            <a:endParaRPr kumimoji="1" lang="ja-JP" altLang="en-US" sz="500" b="0" i="0" u="none" strike="noStrike" kern="0" cap="none" spc="0" normalizeH="0" baseline="0" noProof="0" dirty="0">
+              <a:ln>
+                <a:noFill/>
+              </a:ln>
+              <a:solidFill>
+                <a:sysClr val="window" lastClr="FFFFFF"/>
+              </a:solidFill>
+              <a:effectLst/>
+              <a:uLnTx/>
+              <a:uFillTx/>
+              <a:latin typeface="Calibri"/>
+              <a:ea typeface="ＭＳ Ｐゴシック" panose="020B0600070205080204" pitchFamily="50" charset="-128"/>
+              <a:cs typeface="+mn-cs"/>
+            </a:endParaRPr>
+          </a:p>
+        </p:txBody>
+      </p:sp>
+      <p:sp>
+        <p:nvSpPr>
+          <p:cNvPr id="232" name="テキスト ボックス 144">
+            <a:extLst>
+              <a:ext uri="{FF2B5EF4-FFF2-40B4-BE49-F238E27FC236}">
+                <a16:creationId xmlns:a16="http://schemas.microsoft.com/office/drawing/2014/main" id="{6451F370-7251-CA17-6373-FA7B8E90DF8F}"/>
+              </a:ext>
+            </a:extLst>
+          </p:cNvPr>
+          <p:cNvSpPr txBox="1"/>
+          <p:nvPr/>
+        </p:nvSpPr>
+        <p:spPr>
+          <a:xfrm>
+            <a:off x="2072352" y="9250396"/>
+            <a:ext cx="2600000" cy="80791"/>
+          </a:xfrm>
+          <a:prstGeom prst="rect">
+            <a:avLst/>
+          </a:prstGeom>
+          <a:noFill/>
+        </p:spPr>
+        <p:txBody>
+          <a:bodyPr wrap="none" lIns="0" tIns="0" rIns="0" bIns="0">
+            <a:spAutoFit/>
+          </a:bodyPr>
+          <a:lstStyle/>
+          <a:p>
+            <a:pPr algn="l" fontAlgn="ctr">
+              <a:lnSpc>
+                <a:spcPts val="600"/>
+              </a:lnSpc>
+              <a:buNone/>
+            </a:pPr>
+            <a:r>
+              <a:rPr lang="en-GB" altLang="ja-JP" sz="600" u="none" strike="noStrike" dirty="0">
+                <a:effectLst/>
+                <a:latin typeface="Meiryo UI" panose="020B0604030504040204" pitchFamily="50" charset="-128"/>
+                <a:ea typeface="Meiryo UI" panose="020B0604030504040204" pitchFamily="50" charset="-128"/>
+              </a:rPr>
+              <a:t>TS（29日）のみ前方の登壇者席（6名＋モデレーター＋Co-chair）。他のセッションは2列目・教室型に名札付き</a:t>
+            </a:r>
+          </a:p>
+        </p:txBody>
+      </p:sp>
+      <p:sp>
+        <p:nvSpPr>
+          <p:cNvPr id="233" name="TextBox 232"/>
+          <p:cNvSpPr txBox="1"/>
+          <p:nvPr/>
+        </p:nvSpPr>
+        <p:spPr>
+          <a:xfrm>
+            <a:off x="1450000" y="9370000"/>
+            <a:ext cx="4900000" cy="500000"/>
           </a:xfrm>
           <a:prstGeom prst="rect">
             <a:avLst/>
@@ -13343,32 +15767,14 @@
           <a:lstStyle/>
           <a:p>
             <a:r>
-              <a:rPr sz="700" b="1"/>
-              <a:t>配席案 9/28 荒木田修正（9/25 名簿・9/25 所内決定を反映）</a:t>
-            </a:r>
-          </a:p>
-          <a:p>
-            <a:r>
-              <a:rPr sz="700" b="0"/>
-              <a:t>・U字28席: 上端を主催3者に。左上 ADRC×2（三浦会長・北本理事長）、右上 Singapore×2（Comr・Alan Chow）＋Japan（内閣府）。以下は時計回りに国名アルファベット順（Armenia の位置を修正）。</a:t>
-            </a:r>
-          </a:p>
-          <a:p>
-            <a:r>
-              <a:rPr sz="700" b="0"/>
-              <a:t>・2列目右: Japan×3（仙台市: 副市長ほか）を Japan の後ろへ。Singapore×2, Azerbaijan, Brunei, India×2 は各国の後ろ。</a:t>
-            </a:r>
-          </a:p>
-          <a:p>
-            <a:r>
-              <a:rPr sz="700" b="0"/>
-              <a:t>・2列目左: 左上4卓（8席）は ADRC 事務局ブロック（9/25 決定）。残り8席に NZ×2, Viet Nam×2, Uzbekistan, Turkiye×2, ROK。ROK 3・4人目は教室型へ。ADRC の2列目2席は事務局ブロックに吸収。</a:t>
-            </a:r>
-          </a:p>
-          <a:p>
-            <a:r>
-              <a:rPr sz="700" b="0"/>
-              <a:t>・要確認: AUS 未登録（登録なければ空席か Japan 2席目）／Thailand・Uzbekistan は登録待ち／仙台副市長の RT 発言（2列目はマイクなし）／Comr の RT 在席。</a:t>
+              <a:rPr sz="650"/>
+              <a:t>配席案 9/28（荒木田修正）: U字は児玉案を基本に Japan を底へ（仙台市を後方中央に）、Maldives を右脚へ。Armenia／Azerbaijan は離す。2列目左は左上4卓が ADRC 事務局（9/25 決定）、ROK 3・4人目は教室型へ。</a:t>
+            </a:r>
+          </a:p>
+          <a:p>
+            <a:r>
+              <a:rPr sz="650"/>
+              <a:t>教室型は2人掛け×5卓×4列＝40席（Expo に再作図依頼）。* は卓上マイク（RT 発言用: Google・仙台副市長）。前方登壇者席は TS のみ。AUS は未登録のまま席を保持。</a:t>
             </a:r>
           </a:p>
         </p:txBody>
